--- a/solution_presentation.pptx
+++ b/solution_presentation.pptx
@@ -4762,7 +4762,7 @@
 
 <file path=ppt/slides/slide10.xml><?xml version="1.0" encoding="utf-8"?>
 <p:sld xmlns:a="http://schemas.openxmlformats.org/drawingml/2006/main" xmlns:r="http://schemas.openxmlformats.org/officeDocument/2006/relationships" xmlns:p="http://schemas.openxmlformats.org/presentationml/2006/main">
-  <p:cSld name="Slide 5">
+  <p:cSld>
     <p:spTree>
       <p:nvGrpSpPr>
         <p:cNvPr id="1" name=""/>
@@ -4949,7 +4949,7 @@
         <p:spPr>
           <a:xfrm>
             <a:off x="838505" y="1295705"/>
-            <a:ext cx="10296144" cy="467258"/>
+            <a:ext cx="3604565" cy="467258"/>
           </a:xfrm>
           <a:prstGeom prst="rect">
             <a:avLst/>
@@ -4961,6 +4961,9 @@
           <a:bodyPr wrap="square" lIns="0" tIns="0" rIns="0" bIns="0" rtlCol="0" anchor="ctr"/>
           <a:lstStyle/>
           <a:p>
+            <a:pPr marL="0" indent="0" algn="l">
+              <a:buNone/>
+            </a:pPr>
             <a:r>
               <a:rPr lang="en-US" sz="2600" b="1" dirty="0">
                 <a:solidFill>
@@ -4970,37 +4973,7 @@
                 <a:ea typeface="Poppins" pitchFamily="34" charset="-122"/>
                 <a:cs typeface="Poppins" pitchFamily="34" charset="-120"/>
               </a:rPr>
-              <a:t>Proposed Solution -</a:t>
-            </a:r>
-            <a:r>
-              <a:rPr lang="en-US" sz="2400" b="1" dirty="0">
-                <a:solidFill>
-                  <a:schemeClr val="tx2"/>
-                </a:solidFill>
-                <a:latin typeface="Poppins" panose="00000500000000000000" pitchFamily="2" charset="0"/>
-                <a:cs typeface="Poppins" panose="00000500000000000000" pitchFamily="2" charset="0"/>
-              </a:rPr>
-              <a:t> The localisation pipeline</a:t>
-            </a:r>
-            <a:r>
-              <a:rPr lang="en-US" sz="2400" b="1" u="sng" dirty="0">
-                <a:solidFill>
-                  <a:schemeClr val="tx2"/>
-                </a:solidFill>
-                <a:latin typeface="Poppins" panose="00000500000000000000" pitchFamily="2" charset="0"/>
-                <a:cs typeface="Poppins" panose="00000500000000000000" pitchFamily="2" charset="0"/>
-              </a:rPr>
-              <a:t/>
-            </a:r>
-            <a:r>
-              <a:rPr lang="en-US" sz="2400" b="1" dirty="0">
-                <a:solidFill>
-                  <a:schemeClr val="tx2"/>
-                </a:solidFill>
-                <a:latin typeface="Poppins" panose="00000500000000000000" pitchFamily="2" charset="0"/>
-                <a:cs typeface="Poppins" panose="00000500000000000000" pitchFamily="2" charset="0"/>
-              </a:rPr>
-              <a:t/>
+              <a:t>GitHub &amp; Video Link</a:t>
             </a:r>
             <a:endParaRPr lang="en-US" sz="2600" dirty="0"/>
           </a:p>
@@ -5014,8 +4987,8 @@
         </p:nvSpPr>
         <p:spPr>
           <a:xfrm>
-            <a:off x="571500" y="2021737"/>
-            <a:ext cx="11048695" cy="4693463"/>
+            <a:off x="571500" y="2030703"/>
+            <a:ext cx="11048695" cy="4552798"/>
           </a:xfrm>
           <a:prstGeom prst="roundRect">
             <a:avLst>
@@ -5174,15 +5147,49 @@
         </p:nvSpPr>
         <p:spPr>
           <a:xfrm>
-            <a:off x="961949" y="2412187"/>
-            <a:ext cx="571500" cy="571500"/>
+            <a:off x="1190549" y="2696566"/>
+            <a:ext cx="9810598" cy="1447495"/>
+          </a:xfrm>
+          <a:prstGeom prst="roundRect">
+            <a:avLst>
+              <a:gd name="adj" fmla="val 4987"/>
+            </a:avLst>
+          </a:prstGeom>
+          <a:noFill/>
+          <a:ln w="12700">
+            <a:solidFill>
+              <a:srgbClr val="88E555">
+                <a:alpha val="20000"/>
+              </a:srgbClr>
+            </a:solidFill>
+            <a:prstDash val="solid"/>
+          </a:ln>
+        </p:spPr>
+        <p:txBody>
+          <a:bodyPr/>
+          <a:lstStyle/>
+          <a:p>
+            <a:endParaRPr lang="en-IN"/>
+          </a:p>
+        </p:txBody>
+      </p:sp>
+      <p:sp>
+        <p:nvSpPr>
+          <p:cNvPr id="15" name="Shape 10"/>
+          <p:cNvSpPr/>
+          <p:nvPr/>
+        </p:nvSpPr>
+        <p:spPr>
+          <a:xfrm>
+            <a:off x="1429207" y="3087014"/>
+            <a:ext cx="666598" cy="666598"/>
           </a:xfrm>
           <a:prstGeom prst="ellipse">
             <a:avLst/>
           </a:prstGeom>
           <a:solidFill>
             <a:srgbClr val="273383">
-              <a:alpha val="50000"/>
+              <a:alpha val="60000"/>
             </a:srgbClr>
           </a:solidFill>
           <a:ln w="25400">
@@ -5191,6 +5198,13 @@
             </a:solidFill>
             <a:prstDash val="solid"/>
           </a:ln>
+          <a:effectLst>
+            <a:outerShdw blurRad="139700" dist="12700" dir="16200000" algn="bl" rotWithShape="0">
+              <a:srgbClr val="88E555">
+                <a:alpha val="20000"/>
+              </a:srgbClr>
+            </a:outerShdw>
+          </a:effectLst>
         </p:spPr>
         <p:txBody>
           <a:bodyPr/>
@@ -5202,7 +5216,7 @@
       </p:sp>
       <p:pic>
         <p:nvPicPr>
-          <p:cNvPr id="15" name="Image 3" descr="preencoded.png"/>
+          <p:cNvPr id="16" name="Image 3" descr="preencoded.png"/>
           <p:cNvPicPr>
             <a:picLocks noChangeAspect="1"/>
           </p:cNvPicPr>
@@ -5210,13 +5224,13 @@
         </p:nvPicPr>
         <p:blipFill>
           <a:blip r:embed="rId6"/>
-          <a:srcRect l="-80" r="-80"/>
+          <a:srcRect l="-237" r="-237"/>
           <a:stretch/>
         </p:blipFill>
         <p:spPr>
           <a:xfrm>
-            <a:off x="1104595" y="2583180"/>
-            <a:ext cx="286207" cy="228600"/>
+            <a:off x="1595628" y="3248863"/>
+            <a:ext cx="333756" cy="342900"/>
           </a:xfrm>
           <a:prstGeom prst="rect">
             <a:avLst/>
@@ -5225,14 +5239,14 @@
       </p:pic>
       <p:sp>
         <p:nvSpPr>
-          <p:cNvPr id="16" name="Text 10"/>
+          <p:cNvPr id="17" name="Text 11"/>
           <p:cNvSpPr txBox="1"/>
           <p:nvPr/>
         </p:nvSpPr>
         <p:spPr>
           <a:xfrm>
-            <a:off x="961949" y="3193085"/>
-            <a:ext cx="10172700" cy="685800"/>
+            <a:off x="2400300" y="2934310"/>
+            <a:ext cx="2000707" cy="267005"/>
           </a:xfrm>
           <a:prstGeom prst="rect">
             <a:avLst/>
@@ -5248,46 +5262,44 @@
               <a:buNone/>
             </a:pPr>
             <a:r>
-              <a:rPr lang="en-US" sz="1800" dirty="0">
-                <a:solidFill>
-                  <a:srgbClr val="AEFF82">
-                    <a:alpha val="80000"/>
-                  </a:srgbClr>
-                </a:solidFill>
-                <a:latin typeface="Poppins" pitchFamily="34" charset="0"/>
-                <a:ea typeface="Poppins" pitchFamily="34" charset="-122"/>
-                <a:cs typeface="Poppins" pitchFamily="34" charset="-120"/>
-              </a:rPr>
-              <a:t>Describe your idea in detail. Include the methodology, technologies involved, and how it addresses the chosen problem statement.</a:t>
-            </a:r>
-            <a:endParaRPr lang="en-US" sz="1800" dirty="0"/>
-          </a:p>
-        </p:txBody>
-      </p:sp>
-      <p:sp>
-        <p:nvSpPr>
-          <p:cNvPr id="17" name="Shape 11"/>
+              <a:rPr lang="en-US" sz="1500" b="1" dirty="0">
+                <a:solidFill>
+                  <a:srgbClr val="88E555"/>
+                </a:solidFill>
+                <a:latin typeface="Poppins" pitchFamily="34" charset="0"/>
+                <a:ea typeface="Poppins" pitchFamily="34" charset="-122"/>
+                <a:cs typeface="Poppins" pitchFamily="34" charset="-120"/>
+              </a:rPr>
+              <a:t>GitHub Repository</a:t>
+            </a:r>
+            <a:endParaRPr lang="en-US" sz="1500" dirty="0"/>
+          </a:p>
+        </p:txBody>
+      </p:sp>
+      <p:sp>
+        <p:nvSpPr>
+          <p:cNvPr id="18" name="Shape 12"/>
           <p:cNvSpPr/>
           <p:nvPr/>
         </p:nvSpPr>
         <p:spPr>
           <a:xfrm>
-            <a:off x="1033576" y="3800404"/>
-            <a:ext cx="10029444" cy="2829886"/>
+            <a:off x="2400300" y="3315614"/>
+            <a:ext cx="8363102" cy="590702"/>
           </a:xfrm>
           <a:prstGeom prst="roundRect">
             <a:avLst>
-              <a:gd name="adj" fmla="val 4277"/>
+              <a:gd name="adj" fmla="val 19974"/>
             </a:avLst>
           </a:prstGeom>
           <a:solidFill>
-            <a:srgbClr val="1E3A8A">
-              <a:alpha val="40000"/>
+            <a:srgbClr val="FFFFFF">
+              <a:alpha val="10000"/>
             </a:srgbClr>
           </a:solidFill>
           <a:ln w="12700">
             <a:solidFill>
-              <a:srgbClr val="1D4ED8"/>
+              <a:srgbClr val="4B5563"/>
             </a:solidFill>
             <a:prstDash val="solid"/>
           </a:ln>
@@ -5300,16 +5312,39 @@
           </a:p>
         </p:txBody>
       </p:sp>
-      <p:sp>
-        <p:nvSpPr>
-          <p:cNvPr id="18" name="Text 12"/>
+      <p:pic>
+        <p:nvPicPr>
+          <p:cNvPr id="19" name="Image 4" descr="preencoded.png"/>
+          <p:cNvPicPr>
+            <a:picLocks noChangeAspect="1"/>
+          </p:cNvPicPr>
+          <p:nvPr/>
+        </p:nvPicPr>
+        <p:blipFill>
+          <a:blip r:embed="rId7"/>
+          <a:srcRect t="-180" b="-180"/>
+          <a:stretch/>
+        </p:blipFill>
+        <p:spPr>
+          <a:xfrm>
+            <a:off x="2562149" y="3535070"/>
+            <a:ext cx="190195" cy="152705"/>
+          </a:xfrm>
+          <a:prstGeom prst="rect">
+            <a:avLst/>
+          </a:prstGeom>
+        </p:spPr>
+      </p:pic>
+      <p:sp>
+        <p:nvSpPr>
+          <p:cNvPr id="20" name="Text 13"/>
           <p:cNvSpPr txBox="1"/>
           <p:nvPr/>
         </p:nvSpPr>
         <p:spPr>
           <a:xfrm>
-            <a:off x="1200607" y="4050000"/>
-            <a:ext cx="1367028" cy="191110"/>
+            <a:off x="2866644" y="3487522"/>
+            <a:ext cx="3891686" cy="238658"/>
           </a:xfrm>
           <a:prstGeom prst="rect">
             <a:avLst/>
@@ -5321,34 +5356,130 @@
           <a:bodyPr wrap="square" lIns="0" tIns="0" rIns="0" bIns="0" rtlCol="0" anchor="ctr"/>
           <a:lstStyle/>
           <a:p>
-            <a:pPr marL="0" indent="0" algn="l">
-              <a:buNone/>
-            </a:pPr>
-            <a:r>
-              <a:rPr lang="en-US" sz="1000" b="1" dirty="0">
-                <a:solidFill>
-                  <a:srgbClr val="9CA3AF"/>
-                </a:solidFill>
-                <a:latin typeface="Poppins" pitchFamily="34" charset="0"/>
-                <a:ea typeface="Poppins" pitchFamily="34" charset="-122"/>
-                <a:cs typeface="Poppins" pitchFamily="34" charset="-120"/>
-              </a:rPr>
-              <a:t>PIPELINE</a:t>
-            </a:r>
-            <a:endParaRPr lang="en-US" sz="1000" dirty="0"/>
-          </a:p>
-        </p:txBody>
-      </p:sp>
-      <p:sp>
-        <p:nvSpPr>
-          <p:cNvPr id="19" name="Text 13"/>
+            <a:r>
+              <a:rPr lang="en-IN" sz="1400">
+                <a:solidFill>
+                  <a:schemeClr val="bg1"/>
+                </a:solidFill>
+              </a:rPr>
+              <a:t>https://github.com/Mandy434/drift-sense</a:t>
+            </a:r>
+            <a:endParaRPr lang="en-US" sz="1300" dirty="0">
+              <a:solidFill>
+                <a:schemeClr val="bg1"/>
+              </a:solidFill>
+            </a:endParaRPr>
+          </a:p>
+        </p:txBody>
+      </p:sp>
+      <p:sp>
+        <p:nvSpPr>
+          <p:cNvPr id="21" name="Shape 14"/>
+          <p:cNvSpPr/>
+          <p:nvPr/>
+        </p:nvSpPr>
+        <p:spPr>
+          <a:xfrm>
+            <a:off x="1190549" y="4449470"/>
+            <a:ext cx="9810598" cy="1447495"/>
+          </a:xfrm>
+          <a:prstGeom prst="roundRect">
+            <a:avLst>
+              <a:gd name="adj" fmla="val 4987"/>
+            </a:avLst>
+          </a:prstGeom>
+          <a:noFill/>
+          <a:ln w="12700">
+            <a:solidFill>
+              <a:srgbClr val="88E555">
+                <a:alpha val="20000"/>
+              </a:srgbClr>
+            </a:solidFill>
+            <a:prstDash val="solid"/>
+          </a:ln>
+        </p:spPr>
+        <p:txBody>
+          <a:bodyPr/>
+          <a:lstStyle/>
+          <a:p>
+            <a:endParaRPr lang="en-IN"/>
+          </a:p>
+        </p:txBody>
+      </p:sp>
+      <p:sp>
+        <p:nvSpPr>
+          <p:cNvPr id="22" name="Shape 15"/>
+          <p:cNvSpPr/>
+          <p:nvPr/>
+        </p:nvSpPr>
+        <p:spPr>
+          <a:xfrm>
+            <a:off x="1429207" y="4839919"/>
+            <a:ext cx="666598" cy="666598"/>
+          </a:xfrm>
+          <a:prstGeom prst="ellipse">
+            <a:avLst/>
+          </a:prstGeom>
+          <a:solidFill>
+            <a:srgbClr val="273383">
+              <a:alpha val="60000"/>
+            </a:srgbClr>
+          </a:solidFill>
+          <a:ln w="25400">
+            <a:solidFill>
+              <a:srgbClr val="AEFF82"/>
+            </a:solidFill>
+            <a:prstDash val="solid"/>
+          </a:ln>
+          <a:effectLst>
+            <a:outerShdw blurRad="139700" dist="12700" dir="16200000" algn="bl" rotWithShape="0">
+              <a:srgbClr val="88E555">
+                <a:alpha val="20000"/>
+              </a:srgbClr>
+            </a:outerShdw>
+          </a:effectLst>
+        </p:spPr>
+        <p:txBody>
+          <a:bodyPr/>
+          <a:lstStyle/>
+          <a:p>
+            <a:endParaRPr lang="en-IN"/>
+          </a:p>
+        </p:txBody>
+      </p:sp>
+      <p:pic>
+        <p:nvPicPr>
+          <p:cNvPr id="23" name="Image 5" descr="preencoded.png"/>
+          <p:cNvPicPr>
+            <a:picLocks noChangeAspect="1"/>
+          </p:cNvPicPr>
+          <p:nvPr/>
+        </p:nvPicPr>
+        <p:blipFill>
+          <a:blip r:embed="rId8"/>
+          <a:srcRect l="-607" r="-607"/>
+          <a:stretch/>
+        </p:blipFill>
+        <p:spPr>
+          <a:xfrm>
+            <a:off x="1567282" y="5001768"/>
+            <a:ext cx="390449" cy="342900"/>
+          </a:xfrm>
+          <a:prstGeom prst="rect">
+            <a:avLst/>
+          </a:prstGeom>
+        </p:spPr>
+      </p:pic>
+      <p:sp>
+        <p:nvSpPr>
+          <p:cNvPr id="24" name="Text 16"/>
           <p:cNvSpPr txBox="1"/>
           <p:nvPr/>
         </p:nvSpPr>
         <p:spPr>
           <a:xfrm>
-            <a:off x="1200607" y="4648810"/>
-            <a:ext cx="8996782" cy="505663"/>
+            <a:off x="2400300" y="4687214"/>
+            <a:ext cx="3086100" cy="267005"/>
           </a:xfrm>
           <a:prstGeom prst="rect">
             <a:avLst/>
@@ -5363,243 +5494,125 @@
             <a:pPr marL="0" indent="0" algn="l">
               <a:buNone/>
             </a:pPr>
-            <a:endParaRPr lang="en-US" sz="1200" i="1" dirty="0">
-              <a:solidFill>
-                <a:srgbClr val="FFFFFF">
-                  <a:alpha val="70000"/>
-                </a:srgbClr>
-              </a:solidFill>
-              <a:latin typeface="Poppins" pitchFamily="34" charset="0"/>
-              <a:ea typeface="Poppins" pitchFamily="34" charset="-122"/>
-              <a:cs typeface="Poppins" pitchFamily="34" charset="-120"/>
-            </a:endParaRPr>
-          </a:p>
-          <a:p>
-            <a:pPr marL="0" indent="0" algn="l">
-              <a:buNone/>
-            </a:pPr>
-            <a:endParaRPr lang="en-US" sz="1200" i="1" dirty="0">
-              <a:solidFill>
-                <a:srgbClr val="FFFFFF">
-                  <a:alpha val="70000"/>
-                </a:srgbClr>
-              </a:solidFill>
-              <a:latin typeface="Poppins" pitchFamily="34" charset="0"/>
-              <a:ea typeface="Poppins" pitchFamily="34" charset="-122"/>
-              <a:cs typeface="Poppins" pitchFamily="34" charset="-120"/>
-            </a:endParaRPr>
-          </a:p>
-          <a:p>
-            <a:pPr marL="0" indent="0" algn="l">
-              <a:buNone/>
-            </a:pPr>
-            <a:endParaRPr lang="en-US" sz="1200" i="1" dirty="0">
-              <a:solidFill>
-                <a:srgbClr val="FFFFFF">
-                  <a:alpha val="70000"/>
-                </a:srgbClr>
-              </a:solidFill>
-              <a:latin typeface="Poppins" pitchFamily="34" charset="0"/>
-              <a:ea typeface="Poppins" pitchFamily="34" charset="-122"/>
-              <a:cs typeface="Poppins" pitchFamily="34" charset="-120"/>
-            </a:endParaRPr>
-          </a:p>
-          <a:p>
-            <a:pPr marL="0" indent="0" algn="l">
-              <a:buNone/>
-            </a:pPr>
-            <a:endParaRPr lang="en-US" sz="1200" i="1" dirty="0">
-              <a:solidFill>
-                <a:srgbClr val="FFFFFF">
-                  <a:alpha val="70000"/>
-                </a:srgbClr>
-              </a:solidFill>
-              <a:latin typeface="Poppins" pitchFamily="34" charset="0"/>
-              <a:ea typeface="Poppins" pitchFamily="34" charset="-122"/>
-              <a:cs typeface="Poppins" pitchFamily="34" charset="-120"/>
-            </a:endParaRPr>
-          </a:p>
-          <a:p>
-            <a:pPr marL="0" indent="0" algn="l">
-              <a:buNone/>
-            </a:pPr>
-            <a:endParaRPr lang="en-US" sz="1200" i="1" dirty="0">
-              <a:solidFill>
-                <a:srgbClr val="FFFFFF">
-                  <a:alpha val="70000"/>
-                </a:srgbClr>
-              </a:solidFill>
-              <a:latin typeface="Poppins" pitchFamily="34" charset="0"/>
-              <a:ea typeface="Poppins" pitchFamily="34" charset="-122"/>
-              <a:cs typeface="Poppins" pitchFamily="34" charset="-120"/>
-            </a:endParaRPr>
-          </a:p>
-          <a:p>
-            <a:pPr marL="0" indent="0" algn="l">
-              <a:buNone/>
-            </a:pPr>
-            <a:endParaRPr lang="en-US" sz="900" dirty="0"/>
-          </a:p>
-          <a:p>
-            <a:pPr marL="0" indent="0" algn="l">
-              <a:buNone/>
-            </a:pPr>
-            <a:r>
-              <a:rPr lang="en-US" sz="1200" i="1" dirty="0">
-                <a:solidFill>
-                  <a:srgbClr val="FFFFFF">
-                    <a:alpha val="70000"/>
-                  </a:srgbClr>
-                </a:solidFill>
-                <a:latin typeface="Poppins" pitchFamily="34" charset="0"/>
-                <a:ea typeface="Poppins" pitchFamily="34" charset="-122"/>
-                <a:cs typeface="Poppins" pitchFamily="34" charset="-120"/>
-              </a:rPr>
-              <a:t>PIPELINE — denoise, then coarse-to-fine NCC over scale (±12 %) and rotation (±2°).</a:t>
-            </a:r>
-            <a:endParaRPr lang="en-US" sz="1200" dirty="0"/>
-          </a:p>
-          <a:p>
-            <a:pPr marL="0" indent="0" algn="l">
-              <a:buNone/>
-            </a:pPr>
-            <a:r>
-              <a:rPr lang="en-US" sz="1200" i="1" dirty="0">
-                <a:solidFill>
-                  <a:srgbClr val="FFFFFF">
-                    <a:alpha val="70000"/>
-                  </a:srgbClr>
-                </a:solidFill>
-                <a:latin typeface="Poppins" pitchFamily="34" charset="0"/>
-                <a:ea typeface="Poppins" pitchFamily="34" charset="-122"/>
-                <a:cs typeface="Poppins" pitchFamily="34" charset="-120"/>
-              </a:rPr>
-              <a:t>Denoise first: mild Gaussian blur kills independent sensor noise, keeps layout structure.</a:t>
-            </a:r>
-            <a:endParaRPr lang="en-US" sz="1200" dirty="0"/>
-          </a:p>
-          <a:p>
-            <a:pPr marL="0" indent="0" algn="l">
-              <a:buNone/>
-            </a:pPr>
-            <a:r>
-              <a:rPr lang="en-US" sz="1200" i="1" dirty="0">
-                <a:solidFill>
-                  <a:srgbClr val="FFFFFF">
-                    <a:alpha val="70000"/>
-                  </a:srgbClr>
-                </a:solidFill>
-                <a:latin typeface="Poppins" pitchFamily="34" charset="0"/>
-                <a:ea typeface="Poppins" pitchFamily="34" charset="-122"/>
-                <a:cs typeface="Poppins" pitchFamily="34" charset="-120"/>
-              </a:rPr>
-              <a:t>Scale ratio 10× for a 1-channel SEM pair, 3× for 3-channel optical — read from channel count.</a:t>
-            </a:r>
-            <a:endParaRPr lang="en-US" sz="1200" dirty="0"/>
-          </a:p>
-          <a:p>
-            <a:pPr marL="0" indent="0" algn="l">
-              <a:buNone/>
-            </a:pPr>
-            <a:r>
-              <a:rPr lang="en-US" sz="1200" i="1" dirty="0">
-                <a:solidFill>
-                  <a:srgbClr val="FFFFFF">
-                    <a:alpha val="70000"/>
-                  </a:srgbClr>
-                </a:solidFill>
-                <a:latin typeface="Poppins" pitchFamily="34" charset="0"/>
-                <a:ea typeface="Poppins" pitchFamily="34" charset="-122"/>
-                <a:cs typeface="Poppins" pitchFamily="34" charset="-120"/>
-              </a:rPr>
-              <a:t>Extract ALL near-equal peaks: in a periodic array, multi-peak ambiguity is the normal case.</a:t>
-            </a:r>
-            <a:endParaRPr lang="en-US" sz="1200" dirty="0"/>
-          </a:p>
-          <a:p>
-            <a:pPr marL="0" indent="0" algn="l">
-              <a:buNone/>
-            </a:pPr>
-            <a:r>
-              <a:rPr lang="en-US" sz="1200" i="1" dirty="0">
-                <a:solidFill>
-                  <a:srgbClr val="FFFFFF">
-                    <a:alpha val="70000"/>
-                  </a:srgbClr>
-                </a:solidFill>
-                <a:latin typeface="Poppins" pitchFamily="34" charset="0"/>
-                <a:ea typeface="Poppins" pitchFamily="34" charset="-122"/>
-                <a:cs typeface="Poppins" pitchFamily="34" charset="-120"/>
-              </a:rPr>
-              <a:t>Low-pass below array pitch to isolate the process-variation fingerprint; re-score candidates.</a:t>
-            </a:r>
-            <a:endParaRPr lang="en-US" sz="1200" dirty="0"/>
-          </a:p>
-          <a:p>
-            <a:pPr marL="0" indent="0" algn="l">
-              <a:buNone/>
-            </a:pPr>
-            <a:r>
-              <a:rPr lang="en-US" sz="1200" i="1" dirty="0">
-                <a:solidFill>
-                  <a:srgbClr val="FFFFFF">
-                    <a:alpha val="70000"/>
-                  </a:srgbClr>
-                </a:solidFill>
-                <a:latin typeface="Poppins" pitchFamily="34" charset="0"/>
-                <a:ea typeface="Poppins" pitchFamily="34" charset="-122"/>
-                <a:cs typeface="Poppins" pitchFamily="34" charset="-120"/>
-              </a:rPr>
-              <a:t>Colour pairs correlate all three channels jointly — in optical the fingerprint lives in hue.</a:t>
-            </a:r>
-            <a:endParaRPr lang="en-US" sz="1200" dirty="0"/>
-          </a:p>
-          <a:p>
-            <a:pPr marL="0" indent="0" algn="l">
-              <a:buNone/>
-            </a:pPr>
-            <a:r>
-              <a:rPr lang="en-US" sz="1200" i="1" dirty="0">
-                <a:solidFill>
-                  <a:srgbClr val="FFFFFF">
-                    <a:alpha val="70000"/>
-                  </a:srgbClr>
-                </a:solidFill>
-                <a:latin typeface="Poppins" pitchFamily="34" charset="0"/>
-                <a:ea typeface="Poppins" pitchFamily="34" charset="-122"/>
-                <a:cs typeface="Poppins" pitchFamily="34" charset="-120"/>
-              </a:rPr>
-              <a:t>Fingerprint overrides the lattice winner only on strong evidence — a confident lattice win is never demoted.</a:t>
-            </a:r>
-            <a:endParaRPr lang="en-US" sz="1200" dirty="0"/>
-          </a:p>
-          <a:p>
-            <a:pPr marL="0" indent="0" algn="l">
-              <a:buNone/>
-            </a:pPr>
-            <a:r>
-              <a:rPr lang="en-US" sz="1200" i="1" dirty="0">
-                <a:solidFill>
-                  <a:srgbClr val="FFFFFF">
-                    <a:alpha val="70000"/>
-                  </a:srgbClr>
-                </a:solidFill>
-                <a:latin typeface="Poppins" pitchFamily="34" charset="0"/>
-                <a:ea typeface="Poppins" pitchFamily="34" charset="-122"/>
-                <a:cs typeface="Poppins" pitchFamily="34" charset="-120"/>
-              </a:rPr>
-              <a:t>Nearest-to-centre rule for true ties, then parabolic sub-pixel fit → (x, y).</a:t>
-            </a:r>
-            <a:endParaRPr lang="en-US" sz="1200" dirty="0"/>
+            <a:r>
+              <a:rPr lang="en-US" sz="1500" b="1" dirty="0">
+                <a:solidFill>
+                  <a:srgbClr val="88E555"/>
+                </a:solidFill>
+                <a:latin typeface="Poppins" pitchFamily="34" charset="0"/>
+                <a:ea typeface="Poppins" pitchFamily="34" charset="-122"/>
+                <a:cs typeface="Poppins" pitchFamily="34" charset="-120"/>
+              </a:rPr>
+              <a:t>Prototype / Simulation Video</a:t>
+            </a:r>
+            <a:endParaRPr lang="en-US" sz="1500" dirty="0"/>
+          </a:p>
+        </p:txBody>
+      </p:sp>
+      <p:sp>
+        <p:nvSpPr>
+          <p:cNvPr id="25" name="Shape 17"/>
+          <p:cNvSpPr/>
+          <p:nvPr/>
+        </p:nvSpPr>
+        <p:spPr>
+          <a:xfrm>
+            <a:off x="2400300" y="5068519"/>
+            <a:ext cx="8363102" cy="590702"/>
+          </a:xfrm>
+          <a:prstGeom prst="roundRect">
+            <a:avLst>
+              <a:gd name="adj" fmla="val 19974"/>
+            </a:avLst>
+          </a:prstGeom>
+          <a:solidFill>
+            <a:srgbClr val="FFFFFF">
+              <a:alpha val="10000"/>
+            </a:srgbClr>
+          </a:solidFill>
+          <a:ln w="12700">
+            <a:solidFill>
+              <a:srgbClr val="4B5563"/>
+            </a:solidFill>
+            <a:prstDash val="solid"/>
+          </a:ln>
+        </p:spPr>
+        <p:txBody>
+          <a:bodyPr/>
+          <a:lstStyle/>
+          <a:p>
+            <a:endParaRPr lang="en-IN"/>
           </a:p>
         </p:txBody>
       </p:sp>
       <p:pic>
         <p:nvPicPr>
-          <p:cNvPr id="20" name="Picture 19">
+          <p:cNvPr id="26" name="Image 6" descr="preencoded.png"/>
+          <p:cNvPicPr>
+            <a:picLocks noChangeAspect="1"/>
+          </p:cNvPicPr>
+          <p:nvPr/>
+        </p:nvPicPr>
+        <p:blipFill>
+          <a:blip r:embed="rId9"/>
+          <a:srcRect l="-33" r="-33"/>
+          <a:stretch/>
+        </p:blipFill>
+        <p:spPr>
+          <a:xfrm>
+            <a:off x="2562149" y="5287061"/>
+            <a:ext cx="171907" cy="152705"/>
+          </a:xfrm>
+          <a:prstGeom prst="rect">
+            <a:avLst/>
+          </a:prstGeom>
+        </p:spPr>
+      </p:pic>
+      <p:sp>
+        <p:nvSpPr>
+          <p:cNvPr id="27" name="Text 18"/>
+          <p:cNvSpPr txBox="1"/>
+          <p:nvPr/>
+        </p:nvSpPr>
+        <p:spPr>
+          <a:xfrm>
+            <a:off x="2848356" y="5239512"/>
+            <a:ext cx="6053328" cy="238658"/>
+          </a:xfrm>
+          <a:prstGeom prst="rect">
+            <a:avLst/>
+          </a:prstGeom>
+          <a:noFill/>
+          <a:ln/>
+        </p:spPr>
+        <p:txBody>
+          <a:bodyPr wrap="square" lIns="0" tIns="0" rIns="0" bIns="0" rtlCol="0" anchor="ctr"/>
+          <a:lstStyle/>
+          <a:p>
+            <a:pPr marL="0" indent="0" algn="l">
+              <a:buNone/>
+            </a:pPr>
+            <a:r>
+              <a:rPr lang="en-US" sz="1300" i="1" dirty="0">
+                <a:solidFill>
+                  <a:srgbClr val="D1D5DB"/>
+                </a:solidFill>
+                <a:latin typeface="Poppins" pitchFamily="34" charset="0"/>
+                <a:ea typeface="Poppins" pitchFamily="34" charset="-122"/>
+                <a:cs typeface="Poppins" pitchFamily="34" charset="-120"/>
+              </a:rPr>
+              <a:t>Not included — optional per problem statement; core deliverables (code, results, PPT) stand on their own.</a:t>
+            </a:r>
+            <a:endParaRPr lang="en-US" sz="1300" dirty="0"/>
+          </a:p>
+        </p:txBody>
+      </p:sp>
+      <p:pic>
+        <p:nvPicPr>
+          <p:cNvPr id="28" name="Picture 27">
             <a:extLst>
               <a:ext uri="{FF2B5EF4-FFF2-40B4-BE49-F238E27FC236}">
-                <a16:creationId xmlns:a16="http://schemas.microsoft.com/office/drawing/2014/main" id="{667D8EB9-0510-8E20-AE50-3B9EC8704685}"/>
+                <a16:creationId xmlns:a16="http://schemas.microsoft.com/office/drawing/2014/main" id="{DAC5205F-3589-4B54-7039-C1C70523478B}"/>
               </a:ext>
             </a:extLst>
           </p:cNvPr>
@@ -5609,7 +5622,7 @@
           <p:nvPr/>
         </p:nvPicPr>
         <p:blipFill>
-          <a:blip r:embed="rId7"/>
+          <a:blip r:embed="rId10"/>
           <a:stretch>
             <a:fillRect/>
           </a:stretch>
@@ -5626,10 +5639,10 @@
       </p:pic>
       <p:sp>
         <p:nvSpPr>
-          <p:cNvPr id="22" name="Shape 1">
+          <p:cNvPr id="30" name="Shape 1">
             <a:extLst>
               <a:ext uri="{FF2B5EF4-FFF2-40B4-BE49-F238E27FC236}">
-                <a16:creationId xmlns:a16="http://schemas.microsoft.com/office/drawing/2014/main" id="{50164B49-38DE-6195-0A8B-DC6EC6DA2457}"/>
+                <a16:creationId xmlns:a16="http://schemas.microsoft.com/office/drawing/2014/main" id="{89A93441-4E5C-0FCA-6BDD-16AB2E1B711C}"/>
               </a:ext>
             </a:extLst>
           </p:cNvPr>
@@ -5638,7 +5651,7 @@
         </p:nvSpPr>
         <p:spPr>
           <a:xfrm>
-            <a:off x="571500" y="142799"/>
+            <a:off x="571500" y="167944"/>
             <a:ext cx="11048695" cy="857707"/>
           </a:xfrm>
           <a:prstGeom prst="roundRect">
@@ -5670,10 +5683,10 @@
       </p:sp>
       <p:pic>
         <p:nvPicPr>
-          <p:cNvPr id="23" name="Picture 22">
+          <p:cNvPr id="31" name="Picture 30">
             <a:extLst>
               <a:ext uri="{FF2B5EF4-FFF2-40B4-BE49-F238E27FC236}">
-                <a16:creationId xmlns:a16="http://schemas.microsoft.com/office/drawing/2014/main" id="{18A68BD0-3127-AC0B-80B4-CA2643B37A26}"/>
+                <a16:creationId xmlns:a16="http://schemas.microsoft.com/office/drawing/2014/main" id="{73E0C32B-9271-FA34-86BB-7D95EB5AB342}"/>
               </a:ext>
             </a:extLst>
           </p:cNvPr>
@@ -5683,7 +5696,7 @@
           <p:nvPr/>
         </p:nvPicPr>
         <p:blipFill>
-          <a:blip r:embed="rId8">
+          <a:blip r:embed="rId11">
             <a:extLst>
               <a:ext uri="{28A0092B-C50C-407E-A947-70E740481C1C}">
                 <a14:useLocalDpi xmlns:a14="http://schemas.microsoft.com/office/drawing/2010/main" val="0"/>
@@ -5696,7 +5709,7 @@
         </p:blipFill>
         <p:spPr>
           <a:xfrm>
-            <a:off x="1466553" y="276669"/>
+            <a:off x="1514101" y="297181"/>
             <a:ext cx="9163491" cy="586435"/>
           </a:xfrm>
           <a:prstGeom prst="rect">
@@ -5714,7 +5727,7 @@
 
 <file path=ppt/slides/slide11.xml><?xml version="1.0" encoding="utf-8"?>
 <p:sld xmlns:a="http://schemas.openxmlformats.org/drawingml/2006/main" xmlns:r="http://schemas.openxmlformats.org/officeDocument/2006/relationships" xmlns:p="http://schemas.openxmlformats.org/presentationml/2006/main">
-  <p:cSld name="Slide 6">
+  <p:cSld>
     <p:spTree>
       <p:nvGrpSpPr>
         <p:cNvPr id="1" name=""/>
@@ -5873,7 +5886,7 @@
         </p:nvSpPr>
         <p:spPr>
           <a:xfrm>
-            <a:off x="571500" y="1333195"/>
+            <a:off x="571500" y="1190549"/>
             <a:ext cx="75895" cy="409651"/>
           </a:xfrm>
           <a:prstGeom prst="rect">
@@ -5900,8 +5913,8 @@
         </p:nvSpPr>
         <p:spPr>
           <a:xfrm>
-            <a:off x="838505" y="1295705"/>
-            <a:ext cx="4986223" cy="467258"/>
+            <a:off x="838505" y="1152144"/>
+            <a:ext cx="4624121" cy="467258"/>
           </a:xfrm>
           <a:prstGeom prst="rect">
             <a:avLst/>
@@ -5925,7 +5938,7 @@
                 <a:ea typeface="Poppins" pitchFamily="34" charset="-122"/>
                 <a:cs typeface="Poppins" pitchFamily="34" charset="-120"/>
               </a:rPr>
-              <a:t>Measurement and Validation</a:t>
+              <a:t>Research Background</a:t>
             </a:r>
             <a:endParaRPr lang="en-US" sz="2600" dirty="0"/>
           </a:p>
@@ -5939,12 +5952,12 @@
         </p:nvSpPr>
         <p:spPr>
           <a:xfrm>
-            <a:off x="571500" y="2021738"/>
-            <a:ext cx="11048695" cy="4552798"/>
+            <a:off x="571500" y="1830629"/>
+            <a:ext cx="11048695" cy="4743907"/>
           </a:xfrm>
           <a:prstGeom prst="roundRect">
             <a:avLst>
-              <a:gd name="adj" fmla="val 672"/>
+              <a:gd name="adj" fmla="val 619"/>
             </a:avLst>
           </a:prstGeom>
           <a:solidFill>
@@ -5977,7 +5990,7 @@
         </p:nvSpPr>
         <p:spPr>
           <a:xfrm>
-            <a:off x="571500" y="2021738"/>
+            <a:off x="571500" y="1830629"/>
             <a:ext cx="190195" cy="190195"/>
           </a:xfrm>
           <a:prstGeom prst="roundRect">
@@ -6009,7 +6022,7 @@
         </p:nvSpPr>
         <p:spPr>
           <a:xfrm>
-            <a:off x="11430000" y="2021738"/>
+            <a:off x="11430000" y="1830629"/>
             <a:ext cx="190195" cy="190195"/>
           </a:xfrm>
           <a:prstGeom prst="rect">
@@ -6099,8 +6112,8 @@
         </p:nvSpPr>
         <p:spPr>
           <a:xfrm>
-            <a:off x="961949" y="2412187"/>
-            <a:ext cx="571500" cy="571500"/>
+            <a:off x="961949" y="2173529"/>
+            <a:ext cx="476402" cy="476402"/>
           </a:xfrm>
           <a:prstGeom prst="ellipse">
             <a:avLst/>
@@ -6135,13 +6148,13 @@
         </p:nvPicPr>
         <p:blipFill>
           <a:blip r:embed="rId6"/>
-          <a:srcRect l="-133" r="-133"/>
+          <a:srcRect/>
           <a:stretch/>
         </p:blipFill>
         <p:spPr>
           <a:xfrm>
-            <a:off x="1162202" y="2583180"/>
-            <a:ext cx="171907" cy="228600"/>
+            <a:off x="1086307" y="2297887"/>
+            <a:ext cx="228600" cy="228600"/>
           </a:xfrm>
           <a:prstGeom prst="rect">
             <a:avLst/>
@@ -6156,8 +6169,8 @@
         </p:nvSpPr>
         <p:spPr>
           <a:xfrm>
-            <a:off x="961949" y="3193085"/>
-            <a:ext cx="9801454" cy="314554"/>
+            <a:off x="1628546" y="2173529"/>
+            <a:ext cx="3810305" cy="267005"/>
           </a:xfrm>
           <a:prstGeom prst="rect">
             <a:avLst/>
@@ -6173,36 +6186,73 @@
               <a:buNone/>
             </a:pPr>
             <a:r>
-              <a:rPr lang="en-US" sz="1800" dirty="0">
-                <a:solidFill>
-                  <a:srgbClr val="AEFF82">
-                    <a:alpha val="80000"/>
-                  </a:srgbClr>
-                </a:solidFill>
-                <a:latin typeface="Poppins" pitchFamily="34" charset="0"/>
-                <a:ea typeface="Poppins" pitchFamily="34" charset="-122"/>
-                <a:cs typeface="Poppins" pitchFamily="34" charset="-120"/>
-              </a:rPr>
-              <a:t>How we know the numbers hold: per-layer ablations, a shipped honesty flag, and a contract test suite.</a:t>
-            </a:r>
-            <a:endParaRPr lang="en-US" sz="1800" dirty="0"/>
-          </a:p>
-        </p:txBody>
-      </p:sp>
-      <p:sp>
-        <p:nvSpPr>
-          <p:cNvPr id="17" name="Shape 11"/>
+              <a:rPr lang="en-US" sz="1500" b="1" dirty="0">
+                <a:solidFill>
+                  <a:srgbClr val="88E555"/>
+                </a:solidFill>
+                <a:latin typeface="Poppins" pitchFamily="34" charset="0"/>
+                <a:ea typeface="Poppins" pitchFamily="34" charset="-122"/>
+                <a:cs typeface="Poppins" pitchFamily="34" charset="-120"/>
+              </a:rPr>
+              <a:t>Research Background &amp; Methodology</a:t>
+            </a:r>
+            <a:endParaRPr lang="en-US" sz="1500" dirty="0"/>
+          </a:p>
+        </p:txBody>
+      </p:sp>
+      <p:sp>
+        <p:nvSpPr>
+          <p:cNvPr id="17" name="Text 11"/>
+          <p:cNvSpPr txBox="1"/>
+          <p:nvPr/>
+        </p:nvSpPr>
+        <p:spPr>
+          <a:xfrm>
+            <a:off x="1628546" y="2516429"/>
+            <a:ext cx="5701284" cy="191110"/>
+          </a:xfrm>
+          <a:prstGeom prst="rect">
+            <a:avLst/>
+          </a:prstGeom>
+          <a:noFill/>
+          <a:ln/>
+        </p:spPr>
+        <p:txBody>
+          <a:bodyPr wrap="square" lIns="0" tIns="0" rIns="0" bIns="0" rtlCol="0" anchor="ctr"/>
+          <a:lstStyle/>
+          <a:p>
+            <a:pPr marL="0" indent="0" algn="l">
+              <a:buNone/>
+            </a:pPr>
+            <a:r>
+              <a:rPr lang="en-US" sz="1000" dirty="0">
+                <a:solidFill>
+                  <a:srgbClr val="D1D5DB"/>
+                </a:solidFill>
+                <a:latin typeface="Poppins" pitchFamily="34" charset="0"/>
+                <a:ea typeface="Poppins" pitchFamily="34" charset="-122"/>
+                <a:cs typeface="Poppins" pitchFamily="34" charset="-120"/>
+              </a:rPr>
+              <a:t>Briefly describe the research foundation or scientific principles supporting your idea.</a:t>
+            </a:r>
+            <a:endParaRPr lang="en-US" sz="1000" dirty="0"/>
+          </a:p>
+        </p:txBody>
+      </p:sp>
+      <p:sp>
+        <p:nvSpPr>
+          <p:cNvPr id="18" name="Shape 12"/>
           <p:cNvSpPr/>
           <p:nvPr/>
         </p:nvSpPr>
         <p:spPr>
           <a:xfrm>
-            <a:off x="961949" y="3845052"/>
-            <a:ext cx="5020056" cy="2536546"/>
+            <a:off x="1628546" y="2783434"/>
+            <a:ext cx="9601200" cy="3400000"/>
           </a:xfrm>
           <a:prstGeom prst="roundRect">
             <a:avLst>
-              <a:gd name="adj" fmla="val 3412"/>
+              <a:gd name="adj" fmla="val 6121"/>
             </a:avLst>
           </a:prstGeom>
           <a:solidFill>
@@ -6227,14 +6277,14 @@
       </p:sp>
       <p:sp>
         <p:nvSpPr>
-          <p:cNvPr id="18" name="Text 12"/>
+          <p:cNvPr id="19" name="Text 13"/>
           <p:cNvSpPr txBox="1"/>
           <p:nvPr/>
         </p:nvSpPr>
         <p:spPr>
           <a:xfrm>
-            <a:off x="1200607" y="4030000"/>
-            <a:ext cx="1271930" cy="191110"/>
+            <a:off x="1790395" y="2900000"/>
+            <a:ext cx="9200000" cy="3100000"/>
           </a:xfrm>
           <a:prstGeom prst="rect">
             <a:avLst/>
@@ -6243,339 +6293,7 @@
           <a:ln/>
         </p:spPr>
         <p:txBody>
-          <a:bodyPr wrap="square" lIns="0" tIns="0" rIns="0" bIns="0" rtlCol="0" anchor="ctr"/>
-          <a:lstStyle/>
-          <a:p>
-            <a:pPr marL="0" indent="0" algn="l">
-              <a:buNone/>
-            </a:pPr>
-            <a:r>
-              <a:rPr lang="en-US" sz="1000" b="1" dirty="0">
-                <a:solidFill>
-                  <a:srgbClr val="9CA3AF"/>
-                </a:solidFill>
-                <a:latin typeface="Poppins" pitchFamily="34" charset="0"/>
-                <a:ea typeface="Poppins" pitchFamily="34" charset="-122"/>
-                <a:cs typeface="Poppins" pitchFamily="34" charset="-120"/>
-              </a:rPr>
-              <a:t>PER-LAYER ABLATIONS</a:t>
-            </a:r>
-            <a:endParaRPr lang="en-US" sz="1000" dirty="0"/>
-          </a:p>
-        </p:txBody>
-      </p:sp>
-      <p:sp>
-        <p:nvSpPr>
-          <p:cNvPr id="19" name="Text 13"/>
-          <p:cNvSpPr txBox="1"/>
-          <p:nvPr/>
-        </p:nvSpPr>
-        <p:spPr>
-          <a:xfrm>
-            <a:off x="1200607" y="4349801"/>
-            <a:ext cx="4429354" cy="448056"/>
-          </a:xfrm>
-          <a:prstGeom prst="rect">
-            <a:avLst/>
-          </a:prstGeom>
-          <a:noFill/>
-          <a:ln/>
-        </p:spPr>
-        <p:txBody>
-          <a:bodyPr wrap="square" lIns="0" tIns="0" rIns="0" bIns="0" rtlCol="0" anchor="ctr"/>
-          <a:lstStyle/>
-          <a:p>
-            <a:pPr marL="0" indent="0" algn="l">
-              <a:buNone/>
-            </a:pPr>
-            <a:endParaRPr lang="en-US" sz="1050" i="1" dirty="0">
-              <a:solidFill>
-                <a:srgbClr val="FFFFFF">
-                  <a:alpha val="70000"/>
-                </a:srgbClr>
-              </a:solidFill>
-              <a:latin typeface="Poppins" pitchFamily="34" charset="0"/>
-              <a:ea typeface="Poppins" pitchFamily="34" charset="-122"/>
-              <a:cs typeface="Poppins" pitchFamily="34" charset="-120"/>
-            </a:endParaRPr>
-          </a:p>
-          <a:p>
-            <a:pPr marL="0" indent="0" algn="l">
-              <a:buNone/>
-            </a:pPr>
-            <a:endParaRPr lang="en-US" sz="1050" i="1" dirty="0">
-              <a:solidFill>
-                <a:srgbClr val="FFFFFF">
-                  <a:alpha val="70000"/>
-                </a:srgbClr>
-              </a:solidFill>
-              <a:latin typeface="Poppins" pitchFamily="34" charset="0"/>
-              <a:ea typeface="Poppins" pitchFamily="34" charset="-122"/>
-              <a:cs typeface="Poppins" pitchFamily="34" charset="-120"/>
-            </a:endParaRPr>
-          </a:p>
-          <a:p>
-            <a:pPr marL="0" indent="0" algn="l">
-              <a:buNone/>
-            </a:pPr>
-            <a:endParaRPr lang="en-US" sz="1050" i="1" dirty="0">
-              <a:solidFill>
-                <a:srgbClr val="FFFFFF">
-                  <a:alpha val="70000"/>
-                </a:srgbClr>
-              </a:solidFill>
-              <a:latin typeface="Poppins" pitchFamily="34" charset="0"/>
-              <a:ea typeface="Poppins" pitchFamily="34" charset="-122"/>
-              <a:cs typeface="Poppins" pitchFamily="34" charset="-120"/>
-            </a:endParaRPr>
-          </a:p>
-          <a:p>
-            <a:pPr marL="0" indent="0" algn="l">
-              <a:buNone/>
-            </a:pPr>
-            <a:endParaRPr lang="en-US" sz="1050" i="1" dirty="0">
-              <a:solidFill>
-                <a:srgbClr val="FFFFFF">
-                  <a:alpha val="70000"/>
-                </a:srgbClr>
-              </a:solidFill>
-              <a:latin typeface="Poppins" pitchFamily="34" charset="0"/>
-              <a:ea typeface="Poppins" pitchFamily="34" charset="-122"/>
-              <a:cs typeface="Poppins" pitchFamily="34" charset="-120"/>
-            </a:endParaRPr>
-          </a:p>
-          <a:p>
-            <a:pPr marL="0" indent="0" algn="l">
-              <a:buNone/>
-            </a:pPr>
-            <a:endParaRPr lang="en-US" sz="1050" i="1" dirty="0">
-              <a:solidFill>
-                <a:srgbClr val="FFFFFF">
-                  <a:alpha val="70000"/>
-                </a:srgbClr>
-              </a:solidFill>
-              <a:latin typeface="Poppins" pitchFamily="34" charset="0"/>
-              <a:ea typeface="Poppins" pitchFamily="34" charset="-122"/>
-              <a:cs typeface="Poppins" pitchFamily="34" charset="-120"/>
-            </a:endParaRPr>
-          </a:p>
-          <a:p>
-            <a:pPr marL="0" indent="0" algn="l">
-              <a:buNone/>
-            </a:pPr>
-            <a:endParaRPr lang="en-US" sz="1050" i="1" dirty="0">
-              <a:solidFill>
-                <a:srgbClr val="FFFFFF">
-                  <a:alpha val="70000"/>
-                </a:srgbClr>
-              </a:solidFill>
-              <a:latin typeface="Poppins" pitchFamily="34" charset="0"/>
-              <a:ea typeface="Poppins" pitchFamily="34" charset="-122"/>
-              <a:cs typeface="Poppins" pitchFamily="34" charset="-120"/>
-            </a:endParaRPr>
-          </a:p>
-          <a:p>
-            <a:pPr marL="0" indent="0" algn="l">
-              <a:buNone/>
-            </a:pPr>
-            <a:endParaRPr lang="en-US" sz="1050" i="1" dirty="0">
-              <a:solidFill>
-                <a:srgbClr val="FFFFFF">
-                  <a:alpha val="70000"/>
-                </a:srgbClr>
-              </a:solidFill>
-              <a:latin typeface="Poppins" pitchFamily="34" charset="0"/>
-              <a:ea typeface="Poppins" pitchFamily="34" charset="-122"/>
-              <a:cs typeface="Poppins" pitchFamily="34" charset="-120"/>
-            </a:endParaRPr>
-          </a:p>
-          <a:p>
-            <a:pPr marL="0" indent="0" algn="l">
-              <a:buNone/>
-            </a:pPr>
-            <a:endParaRPr lang="en-US" sz="1050" i="1" dirty="0">
-              <a:solidFill>
-                <a:srgbClr val="FFFFFF">
-                  <a:alpha val="70000"/>
-                </a:srgbClr>
-              </a:solidFill>
-              <a:latin typeface="Poppins" pitchFamily="34" charset="0"/>
-              <a:ea typeface="Poppins" pitchFamily="34" charset="-122"/>
-              <a:cs typeface="Poppins" pitchFamily="34" charset="-120"/>
-            </a:endParaRPr>
-          </a:p>
-          <a:p>
-            <a:pPr marL="0" indent="0" algn="l">
-              <a:buNone/>
-            </a:pPr>
-            <a:r>
-              <a:rPr lang="en-US" sz="1050" i="1" dirty="0">
-                <a:solidFill>
-                  <a:srgbClr val="FFFFFF">
-                    <a:alpha val="70000"/>
-                  </a:srgbClr>
-                </a:solidFill>
-                <a:latin typeface="Poppins" pitchFamily="34" charset="0"/>
-                <a:ea typeface="Poppins" pitchFamily="34" charset="-122"/>
-                <a:cs typeface="Poppins" pitchFamily="34" charset="-120"/>
-              </a:rPr>
-              <a:t>Layered die realism, each layer measured: one uniform array 40 % under fingerprint ablation; mats + strips 90 %; micron landmarks 95 %.</a:t>
-            </a:r>
-            <a:endParaRPr lang="en-US" sz="1050" dirty="0"/>
-          </a:p>
-          <a:p>
-            <a:pPr marL="0" indent="0" algn="l">
-              <a:buNone/>
-            </a:pPr>
-            <a:r>
-              <a:rPr lang="en-US" sz="1050" i="1" dirty="0">
-                <a:solidFill>
-                  <a:srgbClr val="FFFFFF">
-                    <a:alpha val="70000"/>
-                  </a:srgbClr>
-                </a:solidFill>
-                <a:latin typeface="Poppins" pitchFamily="34" charset="0"/>
-                <a:ea typeface="Poppins" pitchFamily="34" charset="-122"/>
-                <a:cs typeface="Poppins" pitchFamily="34" charset="-120"/>
-              </a:rPr>
-              <a:t>Honest ablation shipped: the --visual-clarity flag makes cleaner images by disabling both cues — it costs 24 points (71.2 %), off by default.</a:t>
-            </a:r>
-            <a:endParaRPr lang="en-US" sz="1050" dirty="0"/>
-          </a:p>
-          <a:p>
-            <a:pPr marL="0" indent="0" algn="l">
-              <a:buNone/>
-            </a:pPr>
-            <a:r>
-              <a:rPr lang="en-US" sz="1050" i="1" dirty="0">
-                <a:solidFill>
-                  <a:srgbClr val="FFFFFF">
-                    <a:alpha val="70000"/>
-                  </a:srgbClr>
-                </a:solidFill>
-                <a:latin typeface="Poppins" pitchFamily="34" charset="0"/>
-                <a:ea typeface="Poppins" pitchFamily="34" charset="-122"/>
-                <a:cs typeface="Poppins" pitchFamily="34" charset="-120"/>
-              </a:rPr>
-              <a:t>Fingerprint fully disabled (--pv-amplitude 0.0, seed 404): still 19/20, median 0.10 px — the non-periodic micron landmarks carry it alone.</a:t>
-            </a:r>
-            <a:endParaRPr lang="en-US" sz="1050" dirty="0"/>
-          </a:p>
-          <a:p>
-            <a:pPr marL="0" indent="0" algn="l">
-              <a:buNone/>
-            </a:pPr>
-            <a:r>
-              <a:rPr lang="en-US" sz="1050" i="1" dirty="0">
-                <a:solidFill>
-                  <a:srgbClr val="FFFFFF">
-                    <a:alpha val="70000"/>
-                  </a:srgbClr>
-                </a:solidFill>
-                <a:latin typeface="Poppins" pitchFamily="34" charset="0"/>
-                <a:ea typeface="Poppins" pitchFamily="34" charset="-122"/>
-                <a:cs typeface="Poppins" pitchFamily="34" charset="-120"/>
-              </a:rPr>
-              <a:t>Scale and rotation edges also hold: 9:1 and 11:1 magnification ratio both 100% (20/20); 2° rotation edge 100% (20/20) — no measurable cost outside the nominal 10:1 / 1.5° defaults.</a:t>
-            </a:r>
-            <a:endParaRPr lang="en-US" sz="1050" dirty="0"/>
-          </a:p>
-        </p:txBody>
-      </p:sp>
-      <p:sp>
-        <p:nvSpPr>
-          <p:cNvPr id="20" name="Shape 14"/>
-          <p:cNvSpPr/>
-          <p:nvPr/>
-        </p:nvSpPr>
-        <p:spPr>
-          <a:xfrm>
-            <a:off x="6210605" y="3845052"/>
-            <a:ext cx="5020056" cy="2439207"/>
-          </a:xfrm>
-          <a:prstGeom prst="roundRect">
-            <a:avLst>
-              <a:gd name="adj" fmla="val 3412"/>
-            </a:avLst>
-          </a:prstGeom>
-          <a:solidFill>
-            <a:srgbClr val="1E3A8A">
-              <a:alpha val="40000"/>
-            </a:srgbClr>
-          </a:solidFill>
-          <a:ln w="12700">
-            <a:solidFill>
-              <a:srgbClr val="1D4ED8"/>
-            </a:solidFill>
-            <a:prstDash val="solid"/>
-          </a:ln>
-        </p:spPr>
-        <p:txBody>
-          <a:bodyPr/>
-          <a:lstStyle/>
-          <a:p>
-            <a:endParaRPr lang="en-IN"/>
-          </a:p>
-        </p:txBody>
-      </p:sp>
-      <p:sp>
-        <p:nvSpPr>
-          <p:cNvPr id="21" name="Text 15"/>
-          <p:cNvSpPr txBox="1"/>
-          <p:nvPr/>
-        </p:nvSpPr>
-        <p:spPr>
-          <a:xfrm>
-            <a:off x="6448349" y="4082796"/>
-            <a:ext cx="1901038" cy="191110"/>
-          </a:xfrm>
-          <a:prstGeom prst="rect">
-            <a:avLst/>
-          </a:prstGeom>
-          <a:noFill/>
-          <a:ln/>
-        </p:spPr>
-        <p:txBody>
-          <a:bodyPr wrap="square" lIns="0" tIns="0" rIns="0" bIns="0" rtlCol="0" anchor="ctr"/>
-          <a:lstStyle/>
-          <a:p>
-            <a:pPr marL="0" indent="0" algn="l">
-              <a:buNone/>
-            </a:pPr>
-            <a:r>
-              <a:rPr lang="en-US" sz="1000" b="1" dirty="0">
-                <a:solidFill>
-                  <a:srgbClr val="9CA3AF"/>
-                </a:solidFill>
-                <a:latin typeface="Poppins" pitchFamily="34" charset="0"/>
-                <a:ea typeface="Poppins" pitchFamily="34" charset="-122"/>
-                <a:cs typeface="Poppins" pitchFamily="34" charset="-120"/>
-              </a:rPr>
-              <a:t>COVERAGE AND GUARDRAILS</a:t>
-            </a:r>
-            <a:endParaRPr lang="en-US" sz="1000" dirty="0"/>
-          </a:p>
-        </p:txBody>
-      </p:sp>
-      <p:sp>
-        <p:nvSpPr>
-          <p:cNvPr id="22" name="Text 16"/>
-          <p:cNvSpPr txBox="1"/>
-          <p:nvPr/>
-        </p:nvSpPr>
-        <p:spPr>
-          <a:xfrm>
-            <a:off x="6448349" y="4349800"/>
-            <a:ext cx="4239158" cy="1429207"/>
-          </a:xfrm>
-          <a:prstGeom prst="rect">
-            <a:avLst/>
-          </a:prstGeom>
-          <a:noFill/>
-          <a:ln/>
-        </p:spPr>
-        <p:txBody>
-          <a:bodyPr wrap="square" lIns="0" tIns="0" rIns="0" bIns="0" rtlCol="0" anchor="ctr"/>
+          <a:bodyPr wrap="square" lIns="0" tIns="0" rIns="0" bIns="0" rtlCol="0" anchor="t"/>
           <a:lstStyle/>
           <a:p>
             <a:pPr marL="0" indent="0" algn="l">
@@ -6596,6 +6314,66 @@
             <a:pPr marL="0" indent="0" algn="l">
               <a:buNone/>
             </a:pPr>
+            <a:endParaRPr lang="en-US" sz="1200" i="1" dirty="0">
+              <a:solidFill>
+                <a:srgbClr val="FFFFFF">
+                  <a:alpha val="70000"/>
+                </a:srgbClr>
+              </a:solidFill>
+              <a:latin typeface="Poppins" pitchFamily="34" charset="0"/>
+              <a:ea typeface="Poppins" pitchFamily="34" charset="-122"/>
+              <a:cs typeface="Poppins" pitchFamily="34" charset="-120"/>
+            </a:endParaRPr>
+          </a:p>
+          <a:p>
+            <a:pPr marL="0" indent="0" algn="l">
+              <a:buNone/>
+            </a:pPr>
+            <a:endParaRPr lang="en-US" sz="1200" i="1" dirty="0">
+              <a:solidFill>
+                <a:srgbClr val="FFFFFF">
+                  <a:alpha val="70000"/>
+                </a:srgbClr>
+              </a:solidFill>
+              <a:latin typeface="Poppins" pitchFamily="34" charset="0"/>
+              <a:ea typeface="Poppins" pitchFamily="34" charset="-122"/>
+              <a:cs typeface="Poppins" pitchFamily="34" charset="-120"/>
+            </a:endParaRPr>
+          </a:p>
+          <a:p>
+            <a:pPr marL="0" indent="0" algn="l">
+              <a:buNone/>
+            </a:pPr>
+            <a:endParaRPr lang="en-US" sz="1200" i="1" dirty="0">
+              <a:solidFill>
+                <a:srgbClr val="FFFFFF">
+                  <a:alpha val="70000"/>
+                </a:srgbClr>
+              </a:solidFill>
+              <a:latin typeface="Poppins" pitchFamily="34" charset="0"/>
+              <a:ea typeface="Poppins" pitchFamily="34" charset="-122"/>
+              <a:cs typeface="Poppins" pitchFamily="34" charset="-120"/>
+            </a:endParaRPr>
+          </a:p>
+          <a:p>
+            <a:pPr marL="0" indent="0" algn="l">
+              <a:buNone/>
+            </a:pPr>
+            <a:endParaRPr lang="en-US" sz="1200" i="1" dirty="0">
+              <a:solidFill>
+                <a:srgbClr val="FFFFFF">
+                  <a:alpha val="70000"/>
+                </a:srgbClr>
+              </a:solidFill>
+              <a:latin typeface="Poppins" pitchFamily="34" charset="0"/>
+              <a:ea typeface="Poppins" pitchFamily="34" charset="-122"/>
+              <a:cs typeface="Poppins" pitchFamily="34" charset="-120"/>
+            </a:endParaRPr>
+          </a:p>
+          <a:p>
+            <a:pPr marL="0" indent="0" algn="l">
+              <a:buNone/>
+            </a:pPr>
             <a:r>
               <a:rPr lang="en-US" sz="1200" i="1" dirty="0">
                 <a:solidFill>
@@ -6607,7 +6385,7 @@
                 <a:ea typeface="Poppins" pitchFamily="34" charset="-122"/>
                 <a:cs typeface="Poppins" pitchFamily="34" charset="-120"/>
               </a:rPr>
-              <a:t>One pipeline covers DRAM and FinFET with no per-architecture retuning.</a:t>
+              <a:t>Every noise model and augmentation follows published SEM physics and process-variation literature.</a:t>
             </a:r>
             <a:endParaRPr lang="en-US" sz="1200" dirty="0"/>
           </a:p>
@@ -6626,7 +6404,7 @@
                 <a:ea typeface="Poppins" pitchFamily="34" charset="-122"/>
                 <a:cs typeface="Poppins" pitchFamily="34" charset="-120"/>
               </a:rPr>
-              <a:t>Also covers SEM and 3-channel optical capture: the localiser reads the channel count and adapts.</a:t>
+              <a:t>SEM chain: secondary-electron edge contrast, Gaussian probe PSF, dose-dependent Poisson statistics.</a:t>
             </a:r>
             <a:endParaRPr lang="en-US" sz="1200" dirty="0"/>
           </a:p>
@@ -6645,7 +6423,121 @@
                 <a:ea typeface="Poppins" pitchFamily="34" charset="-122"/>
                 <a:cs typeface="Poppins" pitchFamily="34" charset="-120"/>
               </a:rPr>
-              <a:t>26 contract tests, including one that fails loudly if the optical path degenerates into applyColorMap.</a:t>
+              <a:t>Structure: DRAM word-line/bit-line/via organisation; FinFET fin-plus-gate cell geometry.</a:t>
+            </a:r>
+            <a:endParaRPr lang="en-US" sz="1200" dirty="0"/>
+          </a:p>
+          <a:p>
+            <a:pPr marL="0" indent="0" algn="l">
+              <a:buNone/>
+            </a:pPr>
+            <a:r>
+              <a:rPr lang="en-US" sz="1200" i="1" dirty="0">
+                <a:solidFill>
+                  <a:srgbClr val="FFFFFF">
+                    <a:alpha val="70000"/>
+                  </a:srgbClr>
+                </a:solidFill>
+                <a:latin typeface="Poppins" pitchFamily="34" charset="0"/>
+                <a:ea typeface="Poppins" pitchFamily="34" charset="-122"/>
+                <a:cs typeface="Poppins" pitchFamily="34" charset="-120"/>
+              </a:rPr>
+              <a:t>Process variation: systematic across-die CD non-uniformity — the physical reason a site is findable at all.</a:t>
+            </a:r>
+            <a:endParaRPr lang="en-US" sz="1200" dirty="0"/>
+          </a:p>
+          <a:p>
+            <a:pPr marL="0" indent="0" algn="l">
+              <a:buNone/>
+            </a:pPr>
+            <a:r>
+              <a:rPr lang="en-US" sz="1200" i="1" dirty="0">
+                <a:solidFill>
+                  <a:srgbClr val="FFFFFF">
+                    <a:alpha val="70000"/>
+                  </a:srgbClr>
+                </a:solidFill>
+                <a:latin typeface="Poppins" pitchFamily="34" charset="0"/>
+                <a:ea typeface="Poppins" pitchFamily="34" charset="-122"/>
+                <a:cs typeface="Poppins" pitchFamily="34" charset="-120"/>
+              </a:rPr>
+              <a:t>Optical modality: thin-film interference reflectance, diffraction-limited imaging, chromatic aberration, Bayer demosaic correlation.</a:t>
+            </a:r>
+            <a:endParaRPr lang="en-US" sz="1200" dirty="0"/>
+          </a:p>
+          <a:p>
+            <a:pPr marL="0" indent="0" algn="l">
+              <a:buNone/>
+            </a:pPr>
+            <a:r>
+              <a:rPr lang="en-US" sz="1200" i="1" dirty="0">
+                <a:solidFill>
+                  <a:srgbClr val="FFFFFF">
+                    <a:alpha val="70000"/>
+                  </a:srgbClr>
+                </a:solidFill>
+                <a:latin typeface="Poppins" pitchFamily="34" charset="0"/>
+                <a:ea typeface="Poppins" pitchFamily="34" charset="-122"/>
+                <a:cs typeface="Poppins" pitchFamily="34" charset="-120"/>
+              </a:rPr>
+              <a:t>Airy disc approximated as a Gaussian, σ ≈ 0.21 λ/NA — the Rayleigh radius as sigma over-blurs by ~1.5×.</a:t>
+            </a:r>
+            <a:endParaRPr lang="en-US" sz="1200" dirty="0"/>
+          </a:p>
+          <a:p>
+            <a:pPr marL="0" indent="0" algn="l">
+              <a:buNone/>
+            </a:pPr>
+            <a:r>
+              <a:rPr lang="en-US" sz="1200" i="1" dirty="0">
+                <a:solidFill>
+                  <a:srgbClr val="FFFFFF">
+                    <a:alpha val="70000"/>
+                  </a:srgbClr>
+                </a:solidFill>
+                <a:latin typeface="Poppins" pitchFamily="34" charset="0"/>
+                <a:ea typeface="Poppins" pitchFamily="34" charset="-122"/>
+                <a:cs typeface="Poppins" pitchFamily="34" charset="-120"/>
+              </a:rPr>
+              <a:t>Solvability: a margin bug let ~1 pair in 30 be unsolvable by construction; found, fixed, and now a regression test.</a:t>
+            </a:r>
+            <a:endParaRPr lang="en-US" sz="1200" dirty="0"/>
+          </a:p>
+          <a:p>
+            <a:pPr marL="0" indent="0" algn="l">
+              <a:buNone/>
+            </a:pPr>
+            <a:r>
+              <a:rPr lang="en-US" sz="1200" i="1" dirty="0">
+                <a:solidFill>
+                  <a:srgbClr val="FFFFFF">
+                    <a:alpha val="70000"/>
+                  </a:srgbClr>
+                </a:solidFill>
+                <a:latin typeface="Poppins" pitchFamily="34" charset="0"/>
+                <a:ea typeface="Poppins" pitchFamily="34" charset="-122"/>
+                <a:cs typeface="Poppins" pitchFamily="34" charset="-120"/>
+              </a:rPr>
+              <a:t>Multi-seed reporting: at n=20 the standard error is ~5 pp, so one run cannot separate two variants.</a:t>
+            </a:r>
+            <a:endParaRPr lang="en-US" sz="1200" dirty="0"/>
+          </a:p>
+          <a:p>
+            <a:pPr marL="0" indent="0" algn="l">
+              <a:buNone/>
+            </a:pPr>
+            <a:r>
+              <a:rPr lang="en-US" sz="1200" i="1" dirty="0">
+                <a:solidFill>
+                  <a:srgbClr val="FFFFFF">
+                    <a:alpha val="70000"/>
+                  </a:srgbClr>
+                </a:solidFill>
+                <a:latin typeface="Poppins" pitchFamily="34" charset="0"/>
+                <a:ea typeface="Poppins" pitchFamily="34" charset="-122"/>
+                <a:cs typeface="Poppins" pitchFamily="34" charset="-120"/>
+              </a:rPr>
+              <a:t>Full choice-by-choice citation map is in references.md in the repository.</a:t>
             </a:r>
             <a:endParaRPr lang="en-US" sz="1200" dirty="0"/>
           </a:p>
@@ -6653,10 +6545,10 @@
       </p:sp>
       <p:pic>
         <p:nvPicPr>
-          <p:cNvPr id="23" name="Picture 22">
+          <p:cNvPr id="30" name="Picture 29">
             <a:extLst>
               <a:ext uri="{FF2B5EF4-FFF2-40B4-BE49-F238E27FC236}">
-                <a16:creationId xmlns:a16="http://schemas.microsoft.com/office/drawing/2014/main" id="{48B85B4A-4413-5424-84AE-2AF429F27FBC}"/>
+                <a16:creationId xmlns:a16="http://schemas.microsoft.com/office/drawing/2014/main" id="{135E3709-F1C8-6E84-EA51-720EFCF71B26}"/>
               </a:ext>
             </a:extLst>
           </p:cNvPr>
@@ -6666,14 +6558,14 @@
           <p:nvPr/>
         </p:nvPicPr>
         <p:blipFill>
-          <a:blip r:embed="rId7"/>
+          <a:blip r:embed="rId8"/>
           <a:stretch>
             <a:fillRect/>
           </a:stretch>
         </p:blipFill>
         <p:spPr>
           <a:xfrm>
-            <a:off x="5178322" y="228650"/>
+            <a:off x="5292164" y="227710"/>
             <a:ext cx="1607366" cy="783591"/>
           </a:xfrm>
           <a:prstGeom prst="rect">
@@ -6683,10 +6575,10 @@
       </p:pic>
       <p:sp>
         <p:nvSpPr>
-          <p:cNvPr id="25" name="Shape 1">
+          <p:cNvPr id="32" name="Shape 1">
             <a:extLst>
               <a:ext uri="{FF2B5EF4-FFF2-40B4-BE49-F238E27FC236}">
-                <a16:creationId xmlns:a16="http://schemas.microsoft.com/office/drawing/2014/main" id="{BB3A3471-21A6-8A80-8399-32E98C63F186}"/>
+                <a16:creationId xmlns:a16="http://schemas.microsoft.com/office/drawing/2014/main" id="{3E27E131-AC1D-E75C-0267-02565ACC1BC3}"/>
               </a:ext>
             </a:extLst>
           </p:cNvPr>
@@ -6695,7 +6587,7 @@
         </p:nvSpPr>
         <p:spPr>
           <a:xfrm>
-            <a:off x="571500" y="258065"/>
+            <a:off x="571500" y="259714"/>
             <a:ext cx="11048695" cy="857707"/>
           </a:xfrm>
           <a:prstGeom prst="roundRect">
@@ -6727,10 +6619,10 @@
       </p:sp>
       <p:pic>
         <p:nvPicPr>
-          <p:cNvPr id="26" name="Picture 25">
+          <p:cNvPr id="33" name="Picture 32">
             <a:extLst>
               <a:ext uri="{FF2B5EF4-FFF2-40B4-BE49-F238E27FC236}">
-                <a16:creationId xmlns:a16="http://schemas.microsoft.com/office/drawing/2014/main" id="{1ADA517E-8996-A444-E540-A2F9B8F98D2B}"/>
+                <a16:creationId xmlns:a16="http://schemas.microsoft.com/office/drawing/2014/main" id="{1D876DBE-D402-1B41-B952-69F6F5BF98C9}"/>
               </a:ext>
             </a:extLst>
           </p:cNvPr>
@@ -6740,7 +6632,7 @@
           <p:nvPr/>
         </p:nvPicPr>
         <p:blipFill>
-          <a:blip r:embed="rId8">
+          <a:blip r:embed="rId9">
             <a:extLst>
               <a:ext uri="{28A0092B-C50C-407E-A947-70E740481C1C}">
                 <a14:useLocalDpi xmlns:a14="http://schemas.microsoft.com/office/drawing/2010/main" val="0"/>
@@ -6753,7 +6645,7 @@
         </p:blipFill>
         <p:spPr>
           <a:xfrm>
-            <a:off x="1490929" y="393700"/>
+            <a:off x="1514101" y="390016"/>
             <a:ext cx="9163491" cy="586435"/>
           </a:xfrm>
           <a:prstGeom prst="rect">
@@ -9441,7 +9333,7 @@
                 <a:ea typeface="Poppins" pitchFamily="34" charset="-122"/>
                 <a:cs typeface="Poppins" pitchFamily="34" charset="-120"/>
               </a:rPr>
-              <a:t>93.75 % within 5 px (75/80 pairs, four seeds); median error 0.10 px; ~2.3 s/pair on CPU.</a:t>
+              <a:t>93.33 % within 5 px (112/120 pairs, four seeds); median error 0.09 px; ~2.3 s/pair on CPU.</a:t>
             </a:r>
             <a:endParaRPr lang="en-US" sz="1200" dirty="0"/>
           </a:p>
@@ -10538,6 +10430,958 @@
 
 <file path=ppt/slides/slide5.xml><?xml version="1.0" encoding="utf-8"?>
 <p:sld xmlns:a="http://schemas.openxmlformats.org/drawingml/2006/main" xmlns:r="http://schemas.openxmlformats.org/officeDocument/2006/relationships" xmlns:p="http://schemas.openxmlformats.org/presentationml/2006/main">
+  <p:cSld name="Slide 5">
+    <p:spTree>
+      <p:nvGrpSpPr>
+        <p:cNvPr id="1" name=""/>
+        <p:cNvGrpSpPr/>
+        <p:nvPr/>
+      </p:nvGrpSpPr>
+      <p:grpSpPr>
+        <a:xfrm>
+          <a:off x="0" y="0"/>
+          <a:ext cx="0" cy="0"/>
+          <a:chOff x="0" y="0"/>
+          <a:chExt cx="0" cy="0"/>
+        </a:xfrm>
+      </p:grpSpPr>
+      <p:sp>
+        <p:nvSpPr>
+          <p:cNvPr id="2" name="Shape 0"/>
+          <p:cNvSpPr/>
+          <p:nvPr/>
+        </p:nvSpPr>
+        <p:spPr>
+          <a:xfrm>
+            <a:off x="0" y="0"/>
+            <a:ext cx="12191695" cy="6858000"/>
+          </a:xfrm>
+          <a:prstGeom prst="rect">
+            <a:avLst/>
+          </a:prstGeom>
+          <a:solidFill>
+            <a:srgbClr val="000036"/>
+          </a:solidFill>
+          <a:ln/>
+        </p:spPr>
+        <p:txBody>
+          <a:bodyPr/>
+          <a:lstStyle/>
+          <a:p>
+            <a:endParaRPr lang="en-IN"/>
+          </a:p>
+        </p:txBody>
+      </p:sp>
+      <p:pic>
+        <p:nvPicPr>
+          <p:cNvPr id="3" name="Image 0" descr="preencoded.png"/>
+          <p:cNvPicPr>
+            <a:picLocks noChangeAspect="1"/>
+          </p:cNvPicPr>
+          <p:nvPr/>
+        </p:nvPicPr>
+        <p:blipFill>
+          <a:blip r:embed="rId3">
+            <a:alphaModFix amt="10000"/>
+          </a:blip>
+          <a:srcRect l="12327" r="12327"/>
+          <a:stretch/>
+        </p:blipFill>
+        <p:spPr>
+          <a:xfrm>
+            <a:off x="0" y="0"/>
+            <a:ext cx="12191695" cy="6858000"/>
+          </a:xfrm>
+          <a:prstGeom prst="rect">
+            <a:avLst/>
+          </a:prstGeom>
+        </p:spPr>
+      </p:pic>
+      <p:sp>
+        <p:nvSpPr>
+          <p:cNvPr id="4" name="Shape 1"/>
+          <p:cNvSpPr/>
+          <p:nvPr/>
+        </p:nvSpPr>
+        <p:spPr>
+          <a:xfrm>
+            <a:off x="571500" y="286207"/>
+            <a:ext cx="11048695" cy="666598"/>
+          </a:xfrm>
+          <a:prstGeom prst="roundRect">
+            <a:avLst>
+              <a:gd name="adj" fmla="val 15677"/>
+            </a:avLst>
+          </a:prstGeom>
+          <a:solidFill>
+            <a:srgbClr val="FFFFFF">
+              <a:alpha val="95000"/>
+            </a:srgbClr>
+          </a:solidFill>
+          <a:ln/>
+          <a:effectLst>
+            <a:outerShdw blurRad="63500" dist="38100" dir="5400000" algn="bl" rotWithShape="0">
+              <a:srgbClr val="000000">
+                <a:alpha val="10000"/>
+              </a:srgbClr>
+            </a:outerShdw>
+          </a:effectLst>
+        </p:spPr>
+        <p:txBody>
+          <a:bodyPr/>
+          <a:lstStyle/>
+          <a:p>
+            <a:endParaRPr lang="en-IN"/>
+          </a:p>
+        </p:txBody>
+      </p:sp>
+      <p:pic>
+        <p:nvPicPr>
+          <p:cNvPr id="5" name="Image 1" descr="preencoded.png"/>
+          <p:cNvPicPr>
+            <a:picLocks noChangeAspect="1"/>
+          </p:cNvPicPr>
+          <p:nvPr/>
+        </p:nvPicPr>
+        <p:blipFill>
+          <a:blip r:embed="rId4"/>
+          <a:srcRect t="10" b="10"/>
+          <a:stretch/>
+        </p:blipFill>
+        <p:spPr>
+          <a:xfrm>
+            <a:off x="857707" y="381305"/>
+            <a:ext cx="1266444" cy="476402"/>
+          </a:xfrm>
+          <a:prstGeom prst="rect">
+            <a:avLst/>
+          </a:prstGeom>
+        </p:spPr>
+      </p:pic>
+      <p:pic>
+        <p:nvPicPr>
+          <p:cNvPr id="6" name="Image 2" descr="preencoded.png"/>
+          <p:cNvPicPr>
+            <a:picLocks noChangeAspect="1"/>
+          </p:cNvPicPr>
+          <p:nvPr/>
+        </p:nvPicPr>
+        <p:blipFill>
+          <a:blip r:embed="rId5"/>
+          <a:srcRect/>
+          <a:stretch/>
+        </p:blipFill>
+        <p:spPr>
+          <a:xfrm>
+            <a:off x="10858500" y="381305"/>
+            <a:ext cx="476402" cy="476402"/>
+          </a:xfrm>
+          <a:prstGeom prst="rect">
+            <a:avLst/>
+          </a:prstGeom>
+        </p:spPr>
+      </p:pic>
+      <p:sp>
+        <p:nvSpPr>
+          <p:cNvPr id="7" name="Shape 2"/>
+          <p:cNvSpPr/>
+          <p:nvPr/>
+        </p:nvSpPr>
+        <p:spPr>
+          <a:xfrm>
+            <a:off x="571500" y="1333195"/>
+            <a:ext cx="75895" cy="409651"/>
+          </a:xfrm>
+          <a:prstGeom prst="rect">
+            <a:avLst/>
+          </a:prstGeom>
+          <a:solidFill>
+            <a:srgbClr val="88E555"/>
+          </a:solidFill>
+          <a:ln/>
+        </p:spPr>
+        <p:txBody>
+          <a:bodyPr/>
+          <a:lstStyle/>
+          <a:p>
+            <a:endParaRPr lang="en-IN"/>
+          </a:p>
+        </p:txBody>
+      </p:sp>
+      <p:sp>
+        <p:nvSpPr>
+          <p:cNvPr id="8" name="Text 3"/>
+          <p:cNvSpPr txBox="1"/>
+          <p:nvPr/>
+        </p:nvSpPr>
+        <p:spPr>
+          <a:xfrm>
+            <a:off x="838505" y="1295705"/>
+            <a:ext cx="10296144" cy="467258"/>
+          </a:xfrm>
+          <a:prstGeom prst="rect">
+            <a:avLst/>
+          </a:prstGeom>
+          <a:noFill/>
+          <a:ln/>
+        </p:spPr>
+        <p:txBody>
+          <a:bodyPr wrap="square" lIns="0" tIns="0" rIns="0" bIns="0" rtlCol="0" anchor="ctr"/>
+          <a:lstStyle/>
+          <a:p>
+            <a:r>
+              <a:rPr lang="en-US" sz="2600" b="1" dirty="0">
+                <a:solidFill>
+                  <a:srgbClr val="FFFFFF"/>
+                </a:solidFill>
+                <a:latin typeface="Poppins" pitchFamily="34" charset="0"/>
+                <a:ea typeface="Poppins" pitchFamily="34" charset="-122"/>
+                <a:cs typeface="Poppins" pitchFamily="34" charset="-120"/>
+              </a:rPr>
+              <a:t>Proposed Solution -</a:t>
+            </a:r>
+            <a:r>
+              <a:rPr lang="en-US" sz="2400" b="1" dirty="0">
+                <a:solidFill>
+                  <a:schemeClr val="tx2"/>
+                </a:solidFill>
+                <a:latin typeface="Poppins" panose="00000500000000000000" pitchFamily="2" charset="0"/>
+                <a:cs typeface="Poppins" panose="00000500000000000000" pitchFamily="2" charset="0"/>
+              </a:rPr>
+              <a:t> The localisation pipeline</a:t>
+            </a:r>
+            <a:r>
+              <a:rPr lang="en-US" sz="2400" b="1" u="sng" dirty="0">
+                <a:solidFill>
+                  <a:schemeClr val="tx2"/>
+                </a:solidFill>
+                <a:latin typeface="Poppins" panose="00000500000000000000" pitchFamily="2" charset="0"/>
+                <a:cs typeface="Poppins" panose="00000500000000000000" pitchFamily="2" charset="0"/>
+              </a:rPr>
+              <a:t/>
+            </a:r>
+            <a:r>
+              <a:rPr lang="en-US" sz="2400" b="1" dirty="0">
+                <a:solidFill>
+                  <a:schemeClr val="tx2"/>
+                </a:solidFill>
+                <a:latin typeface="Poppins" panose="00000500000000000000" pitchFamily="2" charset="0"/>
+                <a:cs typeface="Poppins" panose="00000500000000000000" pitchFamily="2" charset="0"/>
+              </a:rPr>
+              <a:t/>
+            </a:r>
+            <a:endParaRPr lang="en-US" sz="2600" dirty="0"/>
+          </a:p>
+        </p:txBody>
+      </p:sp>
+      <p:sp>
+        <p:nvSpPr>
+          <p:cNvPr id="9" name="Shape 4"/>
+          <p:cNvSpPr/>
+          <p:nvPr/>
+        </p:nvSpPr>
+        <p:spPr>
+          <a:xfrm>
+            <a:off x="571500" y="2021737"/>
+            <a:ext cx="11048695" cy="4693463"/>
+          </a:xfrm>
+          <a:prstGeom prst="roundRect">
+            <a:avLst>
+              <a:gd name="adj" fmla="val 672"/>
+            </a:avLst>
+          </a:prstGeom>
+          <a:solidFill>
+            <a:srgbClr val="FFFFFF">
+              <a:alpha val="5000"/>
+            </a:srgbClr>
+          </a:solidFill>
+          <a:ln w="12700">
+            <a:solidFill>
+              <a:srgbClr val="88E555">
+                <a:alpha val="30000"/>
+              </a:srgbClr>
+            </a:solidFill>
+            <a:prstDash val="solid"/>
+          </a:ln>
+        </p:spPr>
+        <p:txBody>
+          <a:bodyPr/>
+          <a:lstStyle/>
+          <a:p>
+            <a:endParaRPr lang="en-IN"/>
+          </a:p>
+        </p:txBody>
+      </p:sp>
+      <p:sp>
+        <p:nvSpPr>
+          <p:cNvPr id="10" name="Shape 5"/>
+          <p:cNvSpPr/>
+          <p:nvPr/>
+        </p:nvSpPr>
+        <p:spPr>
+          <a:xfrm>
+            <a:off x="571500" y="2021738"/>
+            <a:ext cx="190195" cy="190195"/>
+          </a:xfrm>
+          <a:prstGeom prst="roundRect">
+            <a:avLst>
+              <a:gd name="adj" fmla="val 192308"/>
+            </a:avLst>
+          </a:prstGeom>
+          <a:noFill/>
+          <a:ln w="38100">
+            <a:solidFill>
+              <a:srgbClr val="88E555"/>
+            </a:solidFill>
+            <a:prstDash val="solid"/>
+          </a:ln>
+        </p:spPr>
+        <p:txBody>
+          <a:bodyPr/>
+          <a:lstStyle/>
+          <a:p>
+            <a:endParaRPr lang="en-IN"/>
+          </a:p>
+        </p:txBody>
+      </p:sp>
+      <p:sp>
+        <p:nvSpPr>
+          <p:cNvPr id="11" name="Shape 6"/>
+          <p:cNvSpPr/>
+          <p:nvPr/>
+        </p:nvSpPr>
+        <p:spPr>
+          <a:xfrm>
+            <a:off x="11430000" y="2021738"/>
+            <a:ext cx="190195" cy="190195"/>
+          </a:xfrm>
+          <a:prstGeom prst="rect">
+            <a:avLst/>
+          </a:prstGeom>
+          <a:noFill/>
+          <a:ln w="38100">
+            <a:solidFill>
+              <a:srgbClr val="88E555"/>
+            </a:solidFill>
+            <a:prstDash val="solid"/>
+          </a:ln>
+        </p:spPr>
+        <p:txBody>
+          <a:bodyPr/>
+          <a:lstStyle/>
+          <a:p>
+            <a:endParaRPr lang="en-IN"/>
+          </a:p>
+        </p:txBody>
+      </p:sp>
+      <p:sp>
+        <p:nvSpPr>
+          <p:cNvPr id="12" name="Shape 7"/>
+          <p:cNvSpPr/>
+          <p:nvPr/>
+        </p:nvSpPr>
+        <p:spPr>
+          <a:xfrm>
+            <a:off x="571500" y="6381598"/>
+            <a:ext cx="190195" cy="190195"/>
+          </a:xfrm>
+          <a:prstGeom prst="rect">
+            <a:avLst/>
+          </a:prstGeom>
+          <a:noFill/>
+          <a:ln w="38100">
+            <a:solidFill>
+              <a:srgbClr val="88E555"/>
+            </a:solidFill>
+            <a:prstDash val="solid"/>
+          </a:ln>
+        </p:spPr>
+        <p:txBody>
+          <a:bodyPr/>
+          <a:lstStyle/>
+          <a:p>
+            <a:endParaRPr lang="en-IN"/>
+          </a:p>
+        </p:txBody>
+      </p:sp>
+      <p:sp>
+        <p:nvSpPr>
+          <p:cNvPr id="13" name="Shape 8"/>
+          <p:cNvSpPr/>
+          <p:nvPr/>
+        </p:nvSpPr>
+        <p:spPr>
+          <a:xfrm>
+            <a:off x="11430000" y="6381598"/>
+            <a:ext cx="190195" cy="190195"/>
+          </a:xfrm>
+          <a:prstGeom prst="rect">
+            <a:avLst/>
+          </a:prstGeom>
+          <a:noFill/>
+          <a:ln w="38100">
+            <a:solidFill>
+              <a:srgbClr val="88E555"/>
+            </a:solidFill>
+            <a:prstDash val="solid"/>
+          </a:ln>
+        </p:spPr>
+        <p:txBody>
+          <a:bodyPr/>
+          <a:lstStyle/>
+          <a:p>
+            <a:endParaRPr lang="en-IN"/>
+          </a:p>
+        </p:txBody>
+      </p:sp>
+      <p:sp>
+        <p:nvSpPr>
+          <p:cNvPr id="14" name="Shape 9"/>
+          <p:cNvSpPr/>
+          <p:nvPr/>
+        </p:nvSpPr>
+        <p:spPr>
+          <a:xfrm>
+            <a:off x="961949" y="2412187"/>
+            <a:ext cx="571500" cy="571500"/>
+          </a:xfrm>
+          <a:prstGeom prst="ellipse">
+            <a:avLst/>
+          </a:prstGeom>
+          <a:solidFill>
+            <a:srgbClr val="273383">
+              <a:alpha val="50000"/>
+            </a:srgbClr>
+          </a:solidFill>
+          <a:ln w="25400">
+            <a:solidFill>
+              <a:srgbClr val="AEFF82"/>
+            </a:solidFill>
+            <a:prstDash val="solid"/>
+          </a:ln>
+        </p:spPr>
+        <p:txBody>
+          <a:bodyPr/>
+          <a:lstStyle/>
+          <a:p>
+            <a:endParaRPr lang="en-IN"/>
+          </a:p>
+        </p:txBody>
+      </p:sp>
+      <p:pic>
+        <p:nvPicPr>
+          <p:cNvPr id="15" name="Image 3" descr="preencoded.png"/>
+          <p:cNvPicPr>
+            <a:picLocks noChangeAspect="1"/>
+          </p:cNvPicPr>
+          <p:nvPr/>
+        </p:nvPicPr>
+        <p:blipFill>
+          <a:blip r:embed="rId6"/>
+          <a:srcRect l="-80" r="-80"/>
+          <a:stretch/>
+        </p:blipFill>
+        <p:spPr>
+          <a:xfrm>
+            <a:off x="1104595" y="2583180"/>
+            <a:ext cx="286207" cy="228600"/>
+          </a:xfrm>
+          <a:prstGeom prst="rect">
+            <a:avLst/>
+          </a:prstGeom>
+        </p:spPr>
+      </p:pic>
+      <p:sp>
+        <p:nvSpPr>
+          <p:cNvPr id="16" name="Text 10"/>
+          <p:cNvSpPr txBox="1"/>
+          <p:nvPr/>
+        </p:nvSpPr>
+        <p:spPr>
+          <a:xfrm>
+            <a:off x="961949" y="3193085"/>
+            <a:ext cx="10172700" cy="685800"/>
+          </a:xfrm>
+          <a:prstGeom prst="rect">
+            <a:avLst/>
+          </a:prstGeom>
+          <a:noFill/>
+          <a:ln/>
+        </p:spPr>
+        <p:txBody>
+          <a:bodyPr wrap="square" lIns="0" tIns="0" rIns="0" bIns="0" rtlCol="0" anchor="ctr"/>
+          <a:lstStyle/>
+          <a:p>
+            <a:pPr marL="0" indent="0" algn="l">
+              <a:buNone/>
+            </a:pPr>
+            <a:r>
+              <a:rPr lang="en-US" sz="1800" dirty="0">
+                <a:solidFill>
+                  <a:srgbClr val="AEFF82">
+                    <a:alpha val="80000"/>
+                  </a:srgbClr>
+                </a:solidFill>
+                <a:latin typeface="Poppins" pitchFamily="34" charset="0"/>
+                <a:ea typeface="Poppins" pitchFamily="34" charset="-122"/>
+                <a:cs typeface="Poppins" pitchFamily="34" charset="-120"/>
+              </a:rPr>
+              <a:t>Describe your idea in detail. Include the methodology, technologies involved, and how it addresses the chosen problem statement.</a:t>
+            </a:r>
+            <a:endParaRPr lang="en-US" sz="1800" dirty="0"/>
+          </a:p>
+        </p:txBody>
+      </p:sp>
+      <p:sp>
+        <p:nvSpPr>
+          <p:cNvPr id="17" name="Shape 11"/>
+          <p:cNvSpPr/>
+          <p:nvPr/>
+        </p:nvSpPr>
+        <p:spPr>
+          <a:xfrm>
+            <a:off x="1033576" y="3800404"/>
+            <a:ext cx="10029444" cy="2829886"/>
+          </a:xfrm>
+          <a:prstGeom prst="roundRect">
+            <a:avLst>
+              <a:gd name="adj" fmla="val 4277"/>
+            </a:avLst>
+          </a:prstGeom>
+          <a:solidFill>
+            <a:srgbClr val="1E3A8A">
+              <a:alpha val="40000"/>
+            </a:srgbClr>
+          </a:solidFill>
+          <a:ln w="12700">
+            <a:solidFill>
+              <a:srgbClr val="1D4ED8"/>
+            </a:solidFill>
+            <a:prstDash val="solid"/>
+          </a:ln>
+        </p:spPr>
+        <p:txBody>
+          <a:bodyPr/>
+          <a:lstStyle/>
+          <a:p>
+            <a:endParaRPr lang="en-IN"/>
+          </a:p>
+        </p:txBody>
+      </p:sp>
+      <p:sp>
+        <p:nvSpPr>
+          <p:cNvPr id="18" name="Text 12"/>
+          <p:cNvSpPr txBox="1"/>
+          <p:nvPr/>
+        </p:nvSpPr>
+        <p:spPr>
+          <a:xfrm>
+            <a:off x="1200607" y="4050000"/>
+            <a:ext cx="1367028" cy="191110"/>
+          </a:xfrm>
+          <a:prstGeom prst="rect">
+            <a:avLst/>
+          </a:prstGeom>
+          <a:noFill/>
+          <a:ln/>
+        </p:spPr>
+        <p:txBody>
+          <a:bodyPr wrap="square" lIns="0" tIns="0" rIns="0" bIns="0" rtlCol="0" anchor="ctr"/>
+          <a:lstStyle/>
+          <a:p>
+            <a:pPr marL="0" indent="0" algn="l">
+              <a:buNone/>
+            </a:pPr>
+            <a:r>
+              <a:rPr lang="en-US" sz="1000" b="1" dirty="0">
+                <a:solidFill>
+                  <a:srgbClr val="9CA3AF"/>
+                </a:solidFill>
+                <a:latin typeface="Poppins" pitchFamily="34" charset="0"/>
+                <a:ea typeface="Poppins" pitchFamily="34" charset="-122"/>
+                <a:cs typeface="Poppins" pitchFamily="34" charset="-120"/>
+              </a:rPr>
+              <a:t>PIPELINE</a:t>
+            </a:r>
+            <a:endParaRPr lang="en-US" sz="1000" dirty="0"/>
+          </a:p>
+        </p:txBody>
+      </p:sp>
+      <p:sp>
+        <p:nvSpPr>
+          <p:cNvPr id="19" name="Text 13"/>
+          <p:cNvSpPr txBox="1"/>
+          <p:nvPr/>
+        </p:nvSpPr>
+        <p:spPr>
+          <a:xfrm>
+            <a:off x="1200607" y="4648810"/>
+            <a:ext cx="8996782" cy="505663"/>
+          </a:xfrm>
+          <a:prstGeom prst="rect">
+            <a:avLst/>
+          </a:prstGeom>
+          <a:noFill/>
+          <a:ln/>
+        </p:spPr>
+        <p:txBody>
+          <a:bodyPr wrap="square" lIns="0" tIns="0" rIns="0" bIns="0" rtlCol="0" anchor="ctr"/>
+          <a:lstStyle/>
+          <a:p>
+            <a:pPr marL="0" indent="0" algn="l">
+              <a:buNone/>
+            </a:pPr>
+            <a:endParaRPr lang="en-US" sz="1200" i="1" dirty="0">
+              <a:solidFill>
+                <a:srgbClr val="FFFFFF">
+                  <a:alpha val="70000"/>
+                </a:srgbClr>
+              </a:solidFill>
+              <a:latin typeface="Poppins" pitchFamily="34" charset="0"/>
+              <a:ea typeface="Poppins" pitchFamily="34" charset="-122"/>
+              <a:cs typeface="Poppins" pitchFamily="34" charset="-120"/>
+            </a:endParaRPr>
+          </a:p>
+          <a:p>
+            <a:pPr marL="0" indent="0" algn="l">
+              <a:buNone/>
+            </a:pPr>
+            <a:endParaRPr lang="en-US" sz="1200" i="1" dirty="0">
+              <a:solidFill>
+                <a:srgbClr val="FFFFFF">
+                  <a:alpha val="70000"/>
+                </a:srgbClr>
+              </a:solidFill>
+              <a:latin typeface="Poppins" pitchFamily="34" charset="0"/>
+              <a:ea typeface="Poppins" pitchFamily="34" charset="-122"/>
+              <a:cs typeface="Poppins" pitchFamily="34" charset="-120"/>
+            </a:endParaRPr>
+          </a:p>
+          <a:p>
+            <a:pPr marL="0" indent="0" algn="l">
+              <a:buNone/>
+            </a:pPr>
+            <a:endParaRPr lang="en-US" sz="1200" i="1" dirty="0">
+              <a:solidFill>
+                <a:srgbClr val="FFFFFF">
+                  <a:alpha val="70000"/>
+                </a:srgbClr>
+              </a:solidFill>
+              <a:latin typeface="Poppins" pitchFamily="34" charset="0"/>
+              <a:ea typeface="Poppins" pitchFamily="34" charset="-122"/>
+              <a:cs typeface="Poppins" pitchFamily="34" charset="-120"/>
+            </a:endParaRPr>
+          </a:p>
+          <a:p>
+            <a:pPr marL="0" indent="0" algn="l">
+              <a:buNone/>
+            </a:pPr>
+            <a:endParaRPr lang="en-US" sz="1200" i="1" dirty="0">
+              <a:solidFill>
+                <a:srgbClr val="FFFFFF">
+                  <a:alpha val="70000"/>
+                </a:srgbClr>
+              </a:solidFill>
+              <a:latin typeface="Poppins" pitchFamily="34" charset="0"/>
+              <a:ea typeface="Poppins" pitchFamily="34" charset="-122"/>
+              <a:cs typeface="Poppins" pitchFamily="34" charset="-120"/>
+            </a:endParaRPr>
+          </a:p>
+          <a:p>
+            <a:pPr marL="0" indent="0" algn="l">
+              <a:buNone/>
+            </a:pPr>
+            <a:endParaRPr lang="en-US" sz="1200" i="1" dirty="0">
+              <a:solidFill>
+                <a:srgbClr val="FFFFFF">
+                  <a:alpha val="70000"/>
+                </a:srgbClr>
+              </a:solidFill>
+              <a:latin typeface="Poppins" pitchFamily="34" charset="0"/>
+              <a:ea typeface="Poppins" pitchFamily="34" charset="-122"/>
+              <a:cs typeface="Poppins" pitchFamily="34" charset="-120"/>
+            </a:endParaRPr>
+          </a:p>
+          <a:p>
+            <a:pPr marL="0" indent="0" algn="l">
+              <a:buNone/>
+            </a:pPr>
+            <a:endParaRPr lang="en-US" sz="900" dirty="0"/>
+          </a:p>
+          <a:p>
+            <a:pPr marL="0" indent="0" algn="l">
+              <a:buNone/>
+            </a:pPr>
+            <a:r>
+              <a:rPr lang="en-US" sz="1200" i="1" dirty="0">
+                <a:solidFill>
+                  <a:srgbClr val="FFFFFF">
+                    <a:alpha val="70000"/>
+                  </a:srgbClr>
+                </a:solidFill>
+                <a:latin typeface="Poppins" pitchFamily="34" charset="0"/>
+                <a:ea typeface="Poppins" pitchFamily="34" charset="-122"/>
+                <a:cs typeface="Poppins" pitchFamily="34" charset="-120"/>
+              </a:rPr>
+              <a:t>PIPELINE — denoise, then coarse-to-fine NCC over scale (±12 %) and rotation (±2°).</a:t>
+            </a:r>
+            <a:endParaRPr lang="en-US" sz="1200" dirty="0"/>
+          </a:p>
+          <a:p>
+            <a:pPr marL="0" indent="0" algn="l">
+              <a:buNone/>
+            </a:pPr>
+            <a:r>
+              <a:rPr lang="en-US" sz="1200" i="1" dirty="0">
+                <a:solidFill>
+                  <a:srgbClr val="FFFFFF">
+                    <a:alpha val="70000"/>
+                  </a:srgbClr>
+                </a:solidFill>
+                <a:latin typeface="Poppins" pitchFamily="34" charset="0"/>
+                <a:ea typeface="Poppins" pitchFamily="34" charset="-122"/>
+                <a:cs typeface="Poppins" pitchFamily="34" charset="-120"/>
+              </a:rPr>
+              <a:t>Denoise first: mild Gaussian blur kills independent sensor noise, keeps layout structure.</a:t>
+            </a:r>
+            <a:endParaRPr lang="en-US" sz="1200" dirty="0"/>
+          </a:p>
+          <a:p>
+            <a:pPr marL="0" indent="0" algn="l">
+              <a:buNone/>
+            </a:pPr>
+            <a:r>
+              <a:rPr lang="en-US" sz="1200" i="1" dirty="0">
+                <a:solidFill>
+                  <a:srgbClr val="FFFFFF">
+                    <a:alpha val="70000"/>
+                  </a:srgbClr>
+                </a:solidFill>
+                <a:latin typeface="Poppins" pitchFamily="34" charset="0"/>
+                <a:ea typeface="Poppins" pitchFamily="34" charset="-122"/>
+                <a:cs typeface="Poppins" pitchFamily="34" charset="-120"/>
+              </a:rPr>
+              <a:t>Scale ratio 10× for a 1-channel SEM pair, 3× for 3-channel optical — read from channel count.</a:t>
+            </a:r>
+            <a:endParaRPr lang="en-US" sz="1200" dirty="0"/>
+          </a:p>
+          <a:p>
+            <a:pPr marL="0" indent="0" algn="l">
+              <a:buNone/>
+            </a:pPr>
+            <a:r>
+              <a:rPr lang="en-US" sz="1200" i="1" dirty="0">
+                <a:solidFill>
+                  <a:srgbClr val="FFFFFF">
+                    <a:alpha val="70000"/>
+                  </a:srgbClr>
+                </a:solidFill>
+                <a:latin typeface="Poppins" pitchFamily="34" charset="0"/>
+                <a:ea typeface="Poppins" pitchFamily="34" charset="-122"/>
+                <a:cs typeface="Poppins" pitchFamily="34" charset="-120"/>
+              </a:rPr>
+              <a:t>Extract ALL near-equal peaks: in a periodic array, multi-peak ambiguity is the normal case.</a:t>
+            </a:r>
+            <a:endParaRPr lang="en-US" sz="1200" dirty="0"/>
+          </a:p>
+          <a:p>
+            <a:pPr marL="0" indent="0" algn="l">
+              <a:buNone/>
+            </a:pPr>
+            <a:r>
+              <a:rPr lang="en-US" sz="1200" i="1" dirty="0">
+                <a:solidFill>
+                  <a:srgbClr val="FFFFFF">
+                    <a:alpha val="70000"/>
+                  </a:srgbClr>
+                </a:solidFill>
+                <a:latin typeface="Poppins" pitchFamily="34" charset="0"/>
+                <a:ea typeface="Poppins" pitchFamily="34" charset="-122"/>
+                <a:cs typeface="Poppins" pitchFamily="34" charset="-120"/>
+              </a:rPr>
+              <a:t>Low-pass below array pitch to isolate the process-variation fingerprint; re-score candidates.</a:t>
+            </a:r>
+            <a:endParaRPr lang="en-US" sz="1200" dirty="0"/>
+          </a:p>
+          <a:p>
+            <a:pPr marL="0" indent="0" algn="l">
+              <a:buNone/>
+            </a:pPr>
+            <a:r>
+              <a:rPr lang="en-US" sz="1200" i="1" dirty="0">
+                <a:solidFill>
+                  <a:srgbClr val="FFFFFF">
+                    <a:alpha val="70000"/>
+                  </a:srgbClr>
+                </a:solidFill>
+                <a:latin typeface="Poppins" pitchFamily="34" charset="0"/>
+                <a:ea typeface="Poppins" pitchFamily="34" charset="-122"/>
+                <a:cs typeface="Poppins" pitchFamily="34" charset="-120"/>
+              </a:rPr>
+              <a:t>Colour pairs correlate all three channels jointly — in optical the fingerprint lives in hue.</a:t>
+            </a:r>
+            <a:endParaRPr lang="en-US" sz="1200" dirty="0"/>
+          </a:p>
+          <a:p>
+            <a:pPr marL="0" indent="0" algn="l">
+              <a:buNone/>
+            </a:pPr>
+            <a:r>
+              <a:rPr lang="en-US" sz="1200" i="1" dirty="0">
+                <a:solidFill>
+                  <a:srgbClr val="FFFFFF">
+                    <a:alpha val="70000"/>
+                  </a:srgbClr>
+                </a:solidFill>
+                <a:latin typeface="Poppins" pitchFamily="34" charset="0"/>
+                <a:ea typeface="Poppins" pitchFamily="34" charset="-122"/>
+                <a:cs typeface="Poppins" pitchFamily="34" charset="-120"/>
+              </a:rPr>
+              <a:t>Fingerprint overrides the lattice winner only on strong evidence — a confident lattice win is never demoted.</a:t>
+            </a:r>
+            <a:endParaRPr lang="en-US" sz="1200" dirty="0"/>
+          </a:p>
+          <a:p>
+            <a:pPr marL="0" indent="0" algn="l">
+              <a:buNone/>
+            </a:pPr>
+            <a:r>
+              <a:rPr lang="en-US" sz="1200" i="1" dirty="0">
+                <a:solidFill>
+                  <a:srgbClr val="FFFFFF">
+                    <a:alpha val="70000"/>
+                  </a:srgbClr>
+                </a:solidFill>
+                <a:latin typeface="Poppins" pitchFamily="34" charset="0"/>
+                <a:ea typeface="Poppins" pitchFamily="34" charset="-122"/>
+                <a:cs typeface="Poppins" pitchFamily="34" charset="-120"/>
+              </a:rPr>
+              <a:t>Nearest-to-centre rule for true ties, then parabolic sub-pixel fit → (x, y).</a:t>
+            </a:r>
+            <a:endParaRPr lang="en-US" sz="1200" dirty="0"/>
+          </a:p>
+        </p:txBody>
+      </p:sp>
+      <p:pic>
+        <p:nvPicPr>
+          <p:cNvPr id="20" name="Picture 19">
+            <a:extLst>
+              <a:ext uri="{FF2B5EF4-FFF2-40B4-BE49-F238E27FC236}">
+                <a16:creationId xmlns:a16="http://schemas.microsoft.com/office/drawing/2014/main" id="{667D8EB9-0510-8E20-AE50-3B9EC8704685}"/>
+              </a:ext>
+            </a:extLst>
+          </p:cNvPr>
+          <p:cNvPicPr>
+            <a:picLocks noChangeAspect="1"/>
+          </p:cNvPicPr>
+          <p:nvPr/>
+        </p:nvPicPr>
+        <p:blipFill>
+          <a:blip r:embed="rId7"/>
+          <a:stretch>
+            <a:fillRect/>
+          </a:stretch>
+        </p:blipFill>
+        <p:spPr>
+          <a:xfrm>
+            <a:off x="5292164" y="227710"/>
+            <a:ext cx="1607366" cy="783591"/>
+          </a:xfrm>
+          <a:prstGeom prst="rect">
+            <a:avLst/>
+          </a:prstGeom>
+        </p:spPr>
+      </p:pic>
+      <p:sp>
+        <p:nvSpPr>
+          <p:cNvPr id="22" name="Shape 1">
+            <a:extLst>
+              <a:ext uri="{FF2B5EF4-FFF2-40B4-BE49-F238E27FC236}">
+                <a16:creationId xmlns:a16="http://schemas.microsoft.com/office/drawing/2014/main" id="{50164B49-38DE-6195-0A8B-DC6EC6DA2457}"/>
+              </a:ext>
+            </a:extLst>
+          </p:cNvPr>
+          <p:cNvSpPr/>
+          <p:nvPr/>
+        </p:nvSpPr>
+        <p:spPr>
+          <a:xfrm>
+            <a:off x="571500" y="142799"/>
+            <a:ext cx="11048695" cy="857707"/>
+          </a:xfrm>
+          <a:prstGeom prst="roundRect">
+            <a:avLst>
+              <a:gd name="adj" fmla="val 9476"/>
+            </a:avLst>
+          </a:prstGeom>
+          <a:solidFill>
+            <a:srgbClr val="FFFFFF">
+              <a:alpha val="95000"/>
+            </a:srgbClr>
+          </a:solidFill>
+          <a:ln/>
+          <a:effectLst>
+            <a:outerShdw blurRad="63500" dist="38100" dir="5400000" algn="bl" rotWithShape="0">
+              <a:srgbClr val="000000">
+                <a:alpha val="10000"/>
+              </a:srgbClr>
+            </a:outerShdw>
+          </a:effectLst>
+        </p:spPr>
+        <p:txBody>
+          <a:bodyPr/>
+          <a:lstStyle/>
+          <a:p>
+            <a:endParaRPr lang="en-IN"/>
+          </a:p>
+        </p:txBody>
+      </p:sp>
+      <p:pic>
+        <p:nvPicPr>
+          <p:cNvPr id="23" name="Picture 22">
+            <a:extLst>
+              <a:ext uri="{FF2B5EF4-FFF2-40B4-BE49-F238E27FC236}">
+                <a16:creationId xmlns:a16="http://schemas.microsoft.com/office/drawing/2014/main" id="{18A68BD0-3127-AC0B-80B4-CA2643B37A26}"/>
+              </a:ext>
+            </a:extLst>
+          </p:cNvPr>
+          <p:cNvPicPr>
+            <a:picLocks noChangeAspect="1"/>
+          </p:cNvPicPr>
+          <p:nvPr/>
+        </p:nvPicPr>
+        <p:blipFill>
+          <a:blip r:embed="rId8">
+            <a:extLst>
+              <a:ext uri="{28A0092B-C50C-407E-A947-70E740481C1C}">
+                <a14:useLocalDpi xmlns:a14="http://schemas.microsoft.com/office/drawing/2010/main" val="0"/>
+              </a:ext>
+            </a:extLst>
+          </a:blip>
+          <a:stretch>
+            <a:fillRect/>
+          </a:stretch>
+        </p:blipFill>
+        <p:spPr>
+          <a:xfrm>
+            <a:off x="1466553" y="276669"/>
+            <a:ext cx="9163491" cy="586435"/>
+          </a:xfrm>
+          <a:prstGeom prst="rect">
+            <a:avLst/>
+          </a:prstGeom>
+        </p:spPr>
+      </p:pic>
+    </p:spTree>
+  </p:cSld>
+  <p:clrMapOvr>
+    <a:masterClrMapping/>
+  </p:clrMapOvr>
+</p:sld>
+</file>
+
+<file path=ppt/slides/slide6.xml><?xml version="1.0" encoding="utf-8"?>
+<p:sld xmlns:a="http://schemas.openxmlformats.org/drawingml/2006/main" xmlns:r="http://schemas.openxmlformats.org/officeDocument/2006/relationships" xmlns:p="http://schemas.openxmlformats.org/presentationml/2006/main">
   <p:cSld name="Slide 6">
     <p:spTree>
       <p:nvGrpSpPr>
@@ -11431,7 +12275,7 @@
                 <a:ea typeface="Poppins" pitchFamily="34" charset="-122"/>
                 <a:cs typeface="Poppins" pitchFamily="34" charset="-120"/>
               </a:rPr>
-              <a:t>Sub-pixel accuracy (0.10 px median) at ~2.3 s per pair.</a:t>
+              <a:t>Sub-pixel accuracy (0.09 px median) at ~2.3 s per pair.</a:t>
             </a:r>
             <a:endParaRPr lang="en-US" sz="1200" dirty="0"/>
           </a:p>
@@ -11555,7 +12399,1064 @@
 </p:sld>
 </file>
 
-<file path=ppt/slides/slide6.xml><?xml version="1.0" encoding="utf-8"?>
+<file path=ppt/slides/slide7.xml><?xml version="1.0" encoding="utf-8"?>
+<p:sld xmlns:a="http://schemas.openxmlformats.org/drawingml/2006/main" xmlns:r="http://schemas.openxmlformats.org/officeDocument/2006/relationships" xmlns:p="http://schemas.openxmlformats.org/presentationml/2006/main">
+  <p:cSld name="Slide 6">
+    <p:spTree>
+      <p:nvGrpSpPr>
+        <p:cNvPr id="1" name=""/>
+        <p:cNvGrpSpPr/>
+        <p:nvPr/>
+      </p:nvGrpSpPr>
+      <p:grpSpPr>
+        <a:xfrm>
+          <a:off x="0" y="0"/>
+          <a:ext cx="0" cy="0"/>
+          <a:chOff x="0" y="0"/>
+          <a:chExt cx="0" cy="0"/>
+        </a:xfrm>
+      </p:grpSpPr>
+      <p:sp>
+        <p:nvSpPr>
+          <p:cNvPr id="2" name="Shape 0"/>
+          <p:cNvSpPr/>
+          <p:nvPr/>
+        </p:nvSpPr>
+        <p:spPr>
+          <a:xfrm>
+            <a:off x="0" y="0"/>
+            <a:ext cx="12191695" cy="6858000"/>
+          </a:xfrm>
+          <a:prstGeom prst="rect">
+            <a:avLst/>
+          </a:prstGeom>
+          <a:solidFill>
+            <a:srgbClr val="000036"/>
+          </a:solidFill>
+          <a:ln/>
+        </p:spPr>
+        <p:txBody>
+          <a:bodyPr/>
+          <a:lstStyle/>
+          <a:p>
+            <a:endParaRPr lang="en-IN"/>
+          </a:p>
+        </p:txBody>
+      </p:sp>
+      <p:pic>
+        <p:nvPicPr>
+          <p:cNvPr id="3" name="Image 0" descr="preencoded.png"/>
+          <p:cNvPicPr>
+            <a:picLocks noChangeAspect="1"/>
+          </p:cNvPicPr>
+          <p:nvPr/>
+        </p:nvPicPr>
+        <p:blipFill>
+          <a:blip r:embed="rId3">
+            <a:alphaModFix amt="10000"/>
+          </a:blip>
+          <a:srcRect l="12327" r="12327"/>
+          <a:stretch/>
+        </p:blipFill>
+        <p:spPr>
+          <a:xfrm>
+            <a:off x="0" y="0"/>
+            <a:ext cx="12191695" cy="6858000"/>
+          </a:xfrm>
+          <a:prstGeom prst="rect">
+            <a:avLst/>
+          </a:prstGeom>
+        </p:spPr>
+      </p:pic>
+      <p:sp>
+        <p:nvSpPr>
+          <p:cNvPr id="4" name="Shape 1"/>
+          <p:cNvSpPr/>
+          <p:nvPr/>
+        </p:nvSpPr>
+        <p:spPr>
+          <a:xfrm>
+            <a:off x="571500" y="286207"/>
+            <a:ext cx="11048695" cy="666598"/>
+          </a:xfrm>
+          <a:prstGeom prst="roundRect">
+            <a:avLst>
+              <a:gd name="adj" fmla="val 15677"/>
+            </a:avLst>
+          </a:prstGeom>
+          <a:solidFill>
+            <a:srgbClr val="FFFFFF">
+              <a:alpha val="95000"/>
+            </a:srgbClr>
+          </a:solidFill>
+          <a:ln/>
+          <a:effectLst>
+            <a:outerShdw blurRad="63500" dist="38100" dir="5400000" algn="bl" rotWithShape="0">
+              <a:srgbClr val="000000">
+                <a:alpha val="10000"/>
+              </a:srgbClr>
+            </a:outerShdw>
+          </a:effectLst>
+        </p:spPr>
+        <p:txBody>
+          <a:bodyPr/>
+          <a:lstStyle/>
+          <a:p>
+            <a:endParaRPr lang="en-IN"/>
+          </a:p>
+        </p:txBody>
+      </p:sp>
+      <p:pic>
+        <p:nvPicPr>
+          <p:cNvPr id="5" name="Image 1" descr="preencoded.png"/>
+          <p:cNvPicPr>
+            <a:picLocks noChangeAspect="1"/>
+          </p:cNvPicPr>
+          <p:nvPr/>
+        </p:nvPicPr>
+        <p:blipFill>
+          <a:blip r:embed="rId4"/>
+          <a:srcRect t="10" b="10"/>
+          <a:stretch/>
+        </p:blipFill>
+        <p:spPr>
+          <a:xfrm>
+            <a:off x="857707" y="381305"/>
+            <a:ext cx="1266444" cy="476402"/>
+          </a:xfrm>
+          <a:prstGeom prst="rect">
+            <a:avLst/>
+          </a:prstGeom>
+        </p:spPr>
+      </p:pic>
+      <p:pic>
+        <p:nvPicPr>
+          <p:cNvPr id="6" name="Image 2" descr="preencoded.png"/>
+          <p:cNvPicPr>
+            <a:picLocks noChangeAspect="1"/>
+          </p:cNvPicPr>
+          <p:nvPr/>
+        </p:nvPicPr>
+        <p:blipFill>
+          <a:blip r:embed="rId5"/>
+          <a:srcRect/>
+          <a:stretch/>
+        </p:blipFill>
+        <p:spPr>
+          <a:xfrm>
+            <a:off x="10858500" y="381305"/>
+            <a:ext cx="476402" cy="476402"/>
+          </a:xfrm>
+          <a:prstGeom prst="rect">
+            <a:avLst/>
+          </a:prstGeom>
+        </p:spPr>
+      </p:pic>
+      <p:sp>
+        <p:nvSpPr>
+          <p:cNvPr id="7" name="Shape 2"/>
+          <p:cNvSpPr/>
+          <p:nvPr/>
+        </p:nvSpPr>
+        <p:spPr>
+          <a:xfrm>
+            <a:off x="571500" y="1333195"/>
+            <a:ext cx="75895" cy="409651"/>
+          </a:xfrm>
+          <a:prstGeom prst="rect">
+            <a:avLst/>
+          </a:prstGeom>
+          <a:solidFill>
+            <a:srgbClr val="88E555"/>
+          </a:solidFill>
+          <a:ln/>
+        </p:spPr>
+        <p:txBody>
+          <a:bodyPr/>
+          <a:lstStyle/>
+          <a:p>
+            <a:endParaRPr lang="en-IN"/>
+          </a:p>
+        </p:txBody>
+      </p:sp>
+      <p:sp>
+        <p:nvSpPr>
+          <p:cNvPr id="8" name="Text 3"/>
+          <p:cNvSpPr txBox="1"/>
+          <p:nvPr/>
+        </p:nvSpPr>
+        <p:spPr>
+          <a:xfrm>
+            <a:off x="838505" y="1295705"/>
+            <a:ext cx="4986223" cy="467258"/>
+          </a:xfrm>
+          <a:prstGeom prst="rect">
+            <a:avLst/>
+          </a:prstGeom>
+          <a:noFill/>
+          <a:ln/>
+        </p:spPr>
+        <p:txBody>
+          <a:bodyPr wrap="square" lIns="0" tIns="0" rIns="0" bIns="0" rtlCol="0" anchor="ctr"/>
+          <a:lstStyle/>
+          <a:p>
+            <a:pPr marL="0" indent="0" algn="l">
+              <a:buNone/>
+            </a:pPr>
+            <a:r>
+              <a:rPr lang="en-US" sz="2600" b="1" dirty="0">
+                <a:solidFill>
+                  <a:srgbClr val="FFFFFF"/>
+                </a:solidFill>
+                <a:latin typeface="Poppins" pitchFamily="34" charset="0"/>
+                <a:ea typeface="Poppins" pitchFamily="34" charset="-122"/>
+                <a:cs typeface="Poppins" pitchFamily="34" charset="-120"/>
+              </a:rPr>
+              <a:t>Measurement and Validation</a:t>
+            </a:r>
+            <a:endParaRPr lang="en-US" sz="2600" dirty="0"/>
+          </a:p>
+        </p:txBody>
+      </p:sp>
+      <p:sp>
+        <p:nvSpPr>
+          <p:cNvPr id="9" name="Shape 4"/>
+          <p:cNvSpPr/>
+          <p:nvPr/>
+        </p:nvSpPr>
+        <p:spPr>
+          <a:xfrm>
+            <a:off x="571500" y="2021738"/>
+            <a:ext cx="11048695" cy="4552798"/>
+          </a:xfrm>
+          <a:prstGeom prst="roundRect">
+            <a:avLst>
+              <a:gd name="adj" fmla="val 672"/>
+            </a:avLst>
+          </a:prstGeom>
+          <a:solidFill>
+            <a:srgbClr val="FFFFFF">
+              <a:alpha val="5000"/>
+            </a:srgbClr>
+          </a:solidFill>
+          <a:ln w="12700">
+            <a:solidFill>
+              <a:srgbClr val="88E555">
+                <a:alpha val="30000"/>
+              </a:srgbClr>
+            </a:solidFill>
+            <a:prstDash val="solid"/>
+          </a:ln>
+        </p:spPr>
+        <p:txBody>
+          <a:bodyPr/>
+          <a:lstStyle/>
+          <a:p>
+            <a:endParaRPr lang="en-IN"/>
+          </a:p>
+        </p:txBody>
+      </p:sp>
+      <p:sp>
+        <p:nvSpPr>
+          <p:cNvPr id="10" name="Shape 5"/>
+          <p:cNvSpPr/>
+          <p:nvPr/>
+        </p:nvSpPr>
+        <p:spPr>
+          <a:xfrm>
+            <a:off x="571500" y="2021738"/>
+            <a:ext cx="190195" cy="190195"/>
+          </a:xfrm>
+          <a:prstGeom prst="roundRect">
+            <a:avLst>
+              <a:gd name="adj" fmla="val 192308"/>
+            </a:avLst>
+          </a:prstGeom>
+          <a:noFill/>
+          <a:ln w="38100">
+            <a:solidFill>
+              <a:srgbClr val="88E555"/>
+            </a:solidFill>
+            <a:prstDash val="solid"/>
+          </a:ln>
+        </p:spPr>
+        <p:txBody>
+          <a:bodyPr/>
+          <a:lstStyle/>
+          <a:p>
+            <a:endParaRPr lang="en-IN"/>
+          </a:p>
+        </p:txBody>
+      </p:sp>
+      <p:sp>
+        <p:nvSpPr>
+          <p:cNvPr id="11" name="Shape 6"/>
+          <p:cNvSpPr/>
+          <p:nvPr/>
+        </p:nvSpPr>
+        <p:spPr>
+          <a:xfrm>
+            <a:off x="11430000" y="2021738"/>
+            <a:ext cx="190195" cy="190195"/>
+          </a:xfrm>
+          <a:prstGeom prst="rect">
+            <a:avLst/>
+          </a:prstGeom>
+          <a:noFill/>
+          <a:ln w="38100">
+            <a:solidFill>
+              <a:srgbClr val="88E555"/>
+            </a:solidFill>
+            <a:prstDash val="solid"/>
+          </a:ln>
+        </p:spPr>
+        <p:txBody>
+          <a:bodyPr/>
+          <a:lstStyle/>
+          <a:p>
+            <a:endParaRPr lang="en-IN"/>
+          </a:p>
+        </p:txBody>
+      </p:sp>
+      <p:sp>
+        <p:nvSpPr>
+          <p:cNvPr id="12" name="Shape 7"/>
+          <p:cNvSpPr/>
+          <p:nvPr/>
+        </p:nvSpPr>
+        <p:spPr>
+          <a:xfrm>
+            <a:off x="571500" y="6381598"/>
+            <a:ext cx="190195" cy="190195"/>
+          </a:xfrm>
+          <a:prstGeom prst="rect">
+            <a:avLst/>
+          </a:prstGeom>
+          <a:noFill/>
+          <a:ln w="38100">
+            <a:solidFill>
+              <a:srgbClr val="88E555"/>
+            </a:solidFill>
+            <a:prstDash val="solid"/>
+          </a:ln>
+        </p:spPr>
+        <p:txBody>
+          <a:bodyPr/>
+          <a:lstStyle/>
+          <a:p>
+            <a:endParaRPr lang="en-IN"/>
+          </a:p>
+        </p:txBody>
+      </p:sp>
+      <p:sp>
+        <p:nvSpPr>
+          <p:cNvPr id="13" name="Shape 8"/>
+          <p:cNvSpPr/>
+          <p:nvPr/>
+        </p:nvSpPr>
+        <p:spPr>
+          <a:xfrm>
+            <a:off x="11430000" y="6381598"/>
+            <a:ext cx="190195" cy="190195"/>
+          </a:xfrm>
+          <a:prstGeom prst="rect">
+            <a:avLst/>
+          </a:prstGeom>
+          <a:noFill/>
+          <a:ln w="38100">
+            <a:solidFill>
+              <a:srgbClr val="88E555"/>
+            </a:solidFill>
+            <a:prstDash val="solid"/>
+          </a:ln>
+        </p:spPr>
+        <p:txBody>
+          <a:bodyPr/>
+          <a:lstStyle/>
+          <a:p>
+            <a:endParaRPr lang="en-IN"/>
+          </a:p>
+        </p:txBody>
+      </p:sp>
+      <p:sp>
+        <p:nvSpPr>
+          <p:cNvPr id="14" name="Shape 9"/>
+          <p:cNvSpPr/>
+          <p:nvPr/>
+        </p:nvSpPr>
+        <p:spPr>
+          <a:xfrm>
+            <a:off x="961949" y="2412187"/>
+            <a:ext cx="571500" cy="571500"/>
+          </a:xfrm>
+          <a:prstGeom prst="ellipse">
+            <a:avLst/>
+          </a:prstGeom>
+          <a:solidFill>
+            <a:srgbClr val="273383">
+              <a:alpha val="50000"/>
+            </a:srgbClr>
+          </a:solidFill>
+          <a:ln w="25400">
+            <a:solidFill>
+              <a:srgbClr val="AEFF82"/>
+            </a:solidFill>
+            <a:prstDash val="solid"/>
+          </a:ln>
+        </p:spPr>
+        <p:txBody>
+          <a:bodyPr/>
+          <a:lstStyle/>
+          <a:p>
+            <a:endParaRPr lang="en-IN"/>
+          </a:p>
+        </p:txBody>
+      </p:sp>
+      <p:pic>
+        <p:nvPicPr>
+          <p:cNvPr id="15" name="Image 3" descr="preencoded.png"/>
+          <p:cNvPicPr>
+            <a:picLocks noChangeAspect="1"/>
+          </p:cNvPicPr>
+          <p:nvPr/>
+        </p:nvPicPr>
+        <p:blipFill>
+          <a:blip r:embed="rId6"/>
+          <a:srcRect l="-133" r="-133"/>
+          <a:stretch/>
+        </p:blipFill>
+        <p:spPr>
+          <a:xfrm>
+            <a:off x="1162202" y="2583180"/>
+            <a:ext cx="171907" cy="228600"/>
+          </a:xfrm>
+          <a:prstGeom prst="rect">
+            <a:avLst/>
+          </a:prstGeom>
+        </p:spPr>
+      </p:pic>
+      <p:sp>
+        <p:nvSpPr>
+          <p:cNvPr id="16" name="Text 10"/>
+          <p:cNvSpPr txBox="1"/>
+          <p:nvPr/>
+        </p:nvSpPr>
+        <p:spPr>
+          <a:xfrm>
+            <a:off x="961949" y="3193085"/>
+            <a:ext cx="9801454" cy="314554"/>
+          </a:xfrm>
+          <a:prstGeom prst="rect">
+            <a:avLst/>
+          </a:prstGeom>
+          <a:noFill/>
+          <a:ln/>
+        </p:spPr>
+        <p:txBody>
+          <a:bodyPr wrap="square" lIns="0" tIns="0" rIns="0" bIns="0" rtlCol="0" anchor="ctr"/>
+          <a:lstStyle/>
+          <a:p>
+            <a:pPr marL="0" indent="0" algn="l">
+              <a:buNone/>
+            </a:pPr>
+            <a:r>
+              <a:rPr lang="en-US" sz="1800" dirty="0">
+                <a:solidFill>
+                  <a:srgbClr val="AEFF82">
+                    <a:alpha val="80000"/>
+                  </a:srgbClr>
+                </a:solidFill>
+                <a:latin typeface="Poppins" pitchFamily="34" charset="0"/>
+                <a:ea typeface="Poppins" pitchFamily="34" charset="-122"/>
+                <a:cs typeface="Poppins" pitchFamily="34" charset="-120"/>
+              </a:rPr>
+              <a:t>How we know the numbers hold: per-layer ablations, a shipped honesty flag, and a contract test suite.</a:t>
+            </a:r>
+            <a:endParaRPr lang="en-US" sz="1800" dirty="0"/>
+          </a:p>
+        </p:txBody>
+      </p:sp>
+      <p:sp>
+        <p:nvSpPr>
+          <p:cNvPr id="17" name="Shape 11"/>
+          <p:cNvSpPr/>
+          <p:nvPr/>
+        </p:nvSpPr>
+        <p:spPr>
+          <a:xfrm>
+            <a:off x="961949" y="3845052"/>
+            <a:ext cx="5020056" cy="2536546"/>
+          </a:xfrm>
+          <a:prstGeom prst="roundRect">
+            <a:avLst>
+              <a:gd name="adj" fmla="val 3412"/>
+            </a:avLst>
+          </a:prstGeom>
+          <a:solidFill>
+            <a:srgbClr val="1E3A8A">
+              <a:alpha val="40000"/>
+            </a:srgbClr>
+          </a:solidFill>
+          <a:ln w="12700">
+            <a:solidFill>
+              <a:srgbClr val="1D4ED8"/>
+            </a:solidFill>
+            <a:prstDash val="solid"/>
+          </a:ln>
+        </p:spPr>
+        <p:txBody>
+          <a:bodyPr/>
+          <a:lstStyle/>
+          <a:p>
+            <a:endParaRPr lang="en-IN"/>
+          </a:p>
+        </p:txBody>
+      </p:sp>
+      <p:sp>
+        <p:nvSpPr>
+          <p:cNvPr id="18" name="Text 12"/>
+          <p:cNvSpPr txBox="1"/>
+          <p:nvPr/>
+        </p:nvSpPr>
+        <p:spPr>
+          <a:xfrm>
+            <a:off x="1200607" y="4030000"/>
+            <a:ext cx="1271930" cy="191110"/>
+          </a:xfrm>
+          <a:prstGeom prst="rect">
+            <a:avLst/>
+          </a:prstGeom>
+          <a:noFill/>
+          <a:ln/>
+        </p:spPr>
+        <p:txBody>
+          <a:bodyPr wrap="square" lIns="0" tIns="0" rIns="0" bIns="0" rtlCol="0" anchor="ctr"/>
+          <a:lstStyle/>
+          <a:p>
+            <a:pPr marL="0" indent="0" algn="l">
+              <a:buNone/>
+            </a:pPr>
+            <a:r>
+              <a:rPr lang="en-US" sz="1000" b="1" dirty="0">
+                <a:solidFill>
+                  <a:srgbClr val="9CA3AF"/>
+                </a:solidFill>
+                <a:latin typeface="Poppins" pitchFamily="34" charset="0"/>
+                <a:ea typeface="Poppins" pitchFamily="34" charset="-122"/>
+                <a:cs typeface="Poppins" pitchFamily="34" charset="-120"/>
+              </a:rPr>
+              <a:t>PER-LAYER ABLATIONS</a:t>
+            </a:r>
+            <a:endParaRPr lang="en-US" sz="1000" dirty="0"/>
+          </a:p>
+        </p:txBody>
+      </p:sp>
+      <p:sp>
+        <p:nvSpPr>
+          <p:cNvPr id="19" name="Text 13"/>
+          <p:cNvSpPr txBox="1"/>
+          <p:nvPr/>
+        </p:nvSpPr>
+        <p:spPr>
+          <a:xfrm>
+            <a:off x="1200607" y="4349801"/>
+            <a:ext cx="4429354" cy="448056"/>
+          </a:xfrm>
+          <a:prstGeom prst="rect">
+            <a:avLst/>
+          </a:prstGeom>
+          <a:noFill/>
+          <a:ln/>
+        </p:spPr>
+        <p:txBody>
+          <a:bodyPr wrap="square" lIns="0" tIns="0" rIns="0" bIns="0" rtlCol="0" anchor="ctr"/>
+          <a:lstStyle/>
+          <a:p>
+            <a:pPr marL="0" indent="0" algn="l">
+              <a:buNone/>
+            </a:pPr>
+            <a:endParaRPr lang="en-US" sz="1050" i="1" dirty="0">
+              <a:solidFill>
+                <a:srgbClr val="FFFFFF">
+                  <a:alpha val="70000"/>
+                </a:srgbClr>
+              </a:solidFill>
+              <a:latin typeface="Poppins" pitchFamily="34" charset="0"/>
+              <a:ea typeface="Poppins" pitchFamily="34" charset="-122"/>
+              <a:cs typeface="Poppins" pitchFamily="34" charset="-120"/>
+            </a:endParaRPr>
+          </a:p>
+          <a:p>
+            <a:pPr marL="0" indent="0" algn="l">
+              <a:buNone/>
+            </a:pPr>
+            <a:endParaRPr lang="en-US" sz="1050" i="1" dirty="0">
+              <a:solidFill>
+                <a:srgbClr val="FFFFFF">
+                  <a:alpha val="70000"/>
+                </a:srgbClr>
+              </a:solidFill>
+              <a:latin typeface="Poppins" pitchFamily="34" charset="0"/>
+              <a:ea typeface="Poppins" pitchFamily="34" charset="-122"/>
+              <a:cs typeface="Poppins" pitchFamily="34" charset="-120"/>
+            </a:endParaRPr>
+          </a:p>
+          <a:p>
+            <a:pPr marL="0" indent="0" algn="l">
+              <a:buNone/>
+            </a:pPr>
+            <a:endParaRPr lang="en-US" sz="1050" i="1" dirty="0">
+              <a:solidFill>
+                <a:srgbClr val="FFFFFF">
+                  <a:alpha val="70000"/>
+                </a:srgbClr>
+              </a:solidFill>
+              <a:latin typeface="Poppins" pitchFamily="34" charset="0"/>
+              <a:ea typeface="Poppins" pitchFamily="34" charset="-122"/>
+              <a:cs typeface="Poppins" pitchFamily="34" charset="-120"/>
+            </a:endParaRPr>
+          </a:p>
+          <a:p>
+            <a:pPr marL="0" indent="0" algn="l">
+              <a:buNone/>
+            </a:pPr>
+            <a:endParaRPr lang="en-US" sz="1050" i="1" dirty="0">
+              <a:solidFill>
+                <a:srgbClr val="FFFFFF">
+                  <a:alpha val="70000"/>
+                </a:srgbClr>
+              </a:solidFill>
+              <a:latin typeface="Poppins" pitchFamily="34" charset="0"/>
+              <a:ea typeface="Poppins" pitchFamily="34" charset="-122"/>
+              <a:cs typeface="Poppins" pitchFamily="34" charset="-120"/>
+            </a:endParaRPr>
+          </a:p>
+          <a:p>
+            <a:pPr marL="0" indent="0" algn="l">
+              <a:buNone/>
+            </a:pPr>
+            <a:endParaRPr lang="en-US" sz="1050" i="1" dirty="0">
+              <a:solidFill>
+                <a:srgbClr val="FFFFFF">
+                  <a:alpha val="70000"/>
+                </a:srgbClr>
+              </a:solidFill>
+              <a:latin typeface="Poppins" pitchFamily="34" charset="0"/>
+              <a:ea typeface="Poppins" pitchFamily="34" charset="-122"/>
+              <a:cs typeface="Poppins" pitchFamily="34" charset="-120"/>
+            </a:endParaRPr>
+          </a:p>
+          <a:p>
+            <a:pPr marL="0" indent="0" algn="l">
+              <a:buNone/>
+            </a:pPr>
+            <a:endParaRPr lang="en-US" sz="1050" i="1" dirty="0">
+              <a:solidFill>
+                <a:srgbClr val="FFFFFF">
+                  <a:alpha val="70000"/>
+                </a:srgbClr>
+              </a:solidFill>
+              <a:latin typeface="Poppins" pitchFamily="34" charset="0"/>
+              <a:ea typeface="Poppins" pitchFamily="34" charset="-122"/>
+              <a:cs typeface="Poppins" pitchFamily="34" charset="-120"/>
+            </a:endParaRPr>
+          </a:p>
+          <a:p>
+            <a:pPr marL="0" indent="0" algn="l">
+              <a:buNone/>
+            </a:pPr>
+            <a:endParaRPr lang="en-US" sz="1050" i="1" dirty="0">
+              <a:solidFill>
+                <a:srgbClr val="FFFFFF">
+                  <a:alpha val="70000"/>
+                </a:srgbClr>
+              </a:solidFill>
+              <a:latin typeface="Poppins" pitchFamily="34" charset="0"/>
+              <a:ea typeface="Poppins" pitchFamily="34" charset="-122"/>
+              <a:cs typeface="Poppins" pitchFamily="34" charset="-120"/>
+            </a:endParaRPr>
+          </a:p>
+          <a:p>
+            <a:pPr marL="0" indent="0" algn="l">
+              <a:buNone/>
+            </a:pPr>
+            <a:endParaRPr lang="en-US" sz="1050" i="1" dirty="0">
+              <a:solidFill>
+                <a:srgbClr val="FFFFFF">
+                  <a:alpha val="70000"/>
+                </a:srgbClr>
+              </a:solidFill>
+              <a:latin typeface="Poppins" pitchFamily="34" charset="0"/>
+              <a:ea typeface="Poppins" pitchFamily="34" charset="-122"/>
+              <a:cs typeface="Poppins" pitchFamily="34" charset="-120"/>
+            </a:endParaRPr>
+          </a:p>
+          <a:p>
+            <a:pPr marL="0" indent="0" algn="l">
+              <a:buNone/>
+            </a:pPr>
+            <a:r>
+              <a:rPr lang="en-US" sz="1050" i="1" dirty="0">
+                <a:solidFill>
+                  <a:srgbClr val="FFFFFF">
+                    <a:alpha val="70000"/>
+                  </a:srgbClr>
+                </a:solidFill>
+                <a:latin typeface="Poppins" pitchFamily="34" charset="0"/>
+                <a:ea typeface="Poppins" pitchFamily="34" charset="-122"/>
+                <a:cs typeface="Poppins" pitchFamily="34" charset="-120"/>
+              </a:rPr>
+              <a:t>Layered die realism, each layer measured: one uniform array 40 % under fingerprint ablation; mats + strips 90 %; micron landmarks 95 %.</a:t>
+            </a:r>
+            <a:endParaRPr lang="en-US" sz="1050" dirty="0"/>
+          </a:p>
+          <a:p>
+            <a:pPr marL="0" indent="0" algn="l">
+              <a:buNone/>
+            </a:pPr>
+            <a:r>
+              <a:rPr lang="en-US" sz="1050" i="1" dirty="0">
+                <a:solidFill>
+                  <a:srgbClr val="FFFFFF">
+                    <a:alpha val="70000"/>
+                  </a:srgbClr>
+                </a:solidFill>
+                <a:latin typeface="Poppins" pitchFamily="34" charset="0"/>
+                <a:ea typeface="Poppins" pitchFamily="34" charset="-122"/>
+                <a:cs typeface="Poppins" pitchFamily="34" charset="-120"/>
+              </a:rPr>
+              <a:t>Honest ablation shipped: the --visual-clarity flag makes cleaner images by disabling both cues — it costs 24 points (71.2 %), off by default.</a:t>
+            </a:r>
+            <a:endParaRPr lang="en-US" sz="1050" dirty="0"/>
+          </a:p>
+          <a:p>
+            <a:pPr marL="0" indent="0" algn="l">
+              <a:buNone/>
+            </a:pPr>
+            <a:r>
+              <a:rPr lang="en-US" sz="1050" i="1" dirty="0">
+                <a:solidFill>
+                  <a:srgbClr val="FFFFFF">
+                    <a:alpha val="70000"/>
+                  </a:srgbClr>
+                </a:solidFill>
+                <a:latin typeface="Poppins" pitchFamily="34" charset="0"/>
+                <a:ea typeface="Poppins" pitchFamily="34" charset="-122"/>
+                <a:cs typeface="Poppins" pitchFamily="34" charset="-120"/>
+              </a:rPr>
+              <a:t>Fingerprint fully disabled (--pv-amplitude 0.0, seed 404): still 19/20, median 0.10 px — the non-periodic micron landmarks carry it alone.</a:t>
+            </a:r>
+            <a:endParaRPr lang="en-US" sz="1050" dirty="0"/>
+          </a:p>
+          <a:p>
+            <a:pPr marL="0" indent="0" algn="l">
+              <a:buNone/>
+            </a:pPr>
+            <a:r>
+              <a:rPr lang="en-US" sz="1050" i="1" dirty="0">
+                <a:solidFill>
+                  <a:srgbClr val="FFFFFF">
+                    <a:alpha val="70000"/>
+                  </a:srgbClr>
+                </a:solidFill>
+                <a:latin typeface="Poppins" pitchFamily="34" charset="0"/>
+                <a:ea typeface="Poppins" pitchFamily="34" charset="-122"/>
+                <a:cs typeface="Poppins" pitchFamily="34" charset="-120"/>
+              </a:rPr>
+              <a:t>Scale and rotation edges also hold: 9:1 and 11:1 magnification ratio both 100% (20/20); 2° rotation edge 100% (20/20) — no measurable cost outside the nominal 10:1 / 1.5° defaults.</a:t>
+            </a:r>
+            <a:endParaRPr lang="en-US" sz="1050" dirty="0"/>
+          </a:p>
+        </p:txBody>
+      </p:sp>
+      <p:sp>
+        <p:nvSpPr>
+          <p:cNvPr id="20" name="Shape 14"/>
+          <p:cNvSpPr/>
+          <p:nvPr/>
+        </p:nvSpPr>
+        <p:spPr>
+          <a:xfrm>
+            <a:off x="6210605" y="3845052"/>
+            <a:ext cx="5020056" cy="2439207"/>
+          </a:xfrm>
+          <a:prstGeom prst="roundRect">
+            <a:avLst>
+              <a:gd name="adj" fmla="val 3412"/>
+            </a:avLst>
+          </a:prstGeom>
+          <a:solidFill>
+            <a:srgbClr val="1E3A8A">
+              <a:alpha val="40000"/>
+            </a:srgbClr>
+          </a:solidFill>
+          <a:ln w="12700">
+            <a:solidFill>
+              <a:srgbClr val="1D4ED8"/>
+            </a:solidFill>
+            <a:prstDash val="solid"/>
+          </a:ln>
+        </p:spPr>
+        <p:txBody>
+          <a:bodyPr/>
+          <a:lstStyle/>
+          <a:p>
+            <a:endParaRPr lang="en-IN"/>
+          </a:p>
+        </p:txBody>
+      </p:sp>
+      <p:sp>
+        <p:nvSpPr>
+          <p:cNvPr id="21" name="Text 15"/>
+          <p:cNvSpPr txBox="1"/>
+          <p:nvPr/>
+        </p:nvSpPr>
+        <p:spPr>
+          <a:xfrm>
+            <a:off x="6448349" y="4082796"/>
+            <a:ext cx="1901038" cy="191110"/>
+          </a:xfrm>
+          <a:prstGeom prst="rect">
+            <a:avLst/>
+          </a:prstGeom>
+          <a:noFill/>
+          <a:ln/>
+        </p:spPr>
+        <p:txBody>
+          <a:bodyPr wrap="square" lIns="0" tIns="0" rIns="0" bIns="0" rtlCol="0" anchor="ctr"/>
+          <a:lstStyle/>
+          <a:p>
+            <a:pPr marL="0" indent="0" algn="l">
+              <a:buNone/>
+            </a:pPr>
+            <a:r>
+              <a:rPr lang="en-US" sz="1000" b="1" dirty="0">
+                <a:solidFill>
+                  <a:srgbClr val="9CA3AF"/>
+                </a:solidFill>
+                <a:latin typeface="Poppins" pitchFamily="34" charset="0"/>
+                <a:ea typeface="Poppins" pitchFamily="34" charset="-122"/>
+                <a:cs typeface="Poppins" pitchFamily="34" charset="-120"/>
+              </a:rPr>
+              <a:t>COVERAGE AND GUARDRAILS</a:t>
+            </a:r>
+            <a:endParaRPr lang="en-US" sz="1000" dirty="0"/>
+          </a:p>
+        </p:txBody>
+      </p:sp>
+      <p:sp>
+        <p:nvSpPr>
+          <p:cNvPr id="22" name="Text 16"/>
+          <p:cNvSpPr txBox="1"/>
+          <p:nvPr/>
+        </p:nvSpPr>
+        <p:spPr>
+          <a:xfrm>
+            <a:off x="6448349" y="4349800"/>
+            <a:ext cx="4239158" cy="1429207"/>
+          </a:xfrm>
+          <a:prstGeom prst="rect">
+            <a:avLst/>
+          </a:prstGeom>
+          <a:noFill/>
+          <a:ln/>
+        </p:spPr>
+        <p:txBody>
+          <a:bodyPr wrap="square" lIns="0" tIns="0" rIns="0" bIns="0" rtlCol="0" anchor="ctr"/>
+          <a:lstStyle/>
+          <a:p>
+            <a:pPr marL="0" indent="0" algn="l">
+              <a:buNone/>
+            </a:pPr>
+            <a:endParaRPr lang="en-US" sz="1200" i="1" dirty="0">
+              <a:solidFill>
+                <a:srgbClr val="FFFFFF">
+                  <a:alpha val="70000"/>
+                </a:srgbClr>
+              </a:solidFill>
+              <a:latin typeface="Poppins" pitchFamily="34" charset="0"/>
+              <a:ea typeface="Poppins" pitchFamily="34" charset="-122"/>
+              <a:cs typeface="Poppins" pitchFamily="34" charset="-120"/>
+            </a:endParaRPr>
+          </a:p>
+          <a:p>
+            <a:pPr marL="0" indent="0" algn="l">
+              <a:buNone/>
+            </a:pPr>
+            <a:r>
+              <a:rPr lang="en-US" sz="1200" i="1" dirty="0">
+                <a:solidFill>
+                  <a:srgbClr val="FFFFFF">
+                    <a:alpha val="70000"/>
+                  </a:srgbClr>
+                </a:solidFill>
+                <a:latin typeface="Poppins" pitchFamily="34" charset="0"/>
+                <a:ea typeface="Poppins" pitchFamily="34" charset="-122"/>
+                <a:cs typeface="Poppins" pitchFamily="34" charset="-120"/>
+              </a:rPr>
+              <a:t>One pipeline covers DRAM and FinFET with no per-architecture retuning.</a:t>
+            </a:r>
+            <a:endParaRPr lang="en-US" sz="1200" dirty="0"/>
+          </a:p>
+          <a:p>
+            <a:pPr marL="0" indent="0" algn="l">
+              <a:buNone/>
+            </a:pPr>
+            <a:r>
+              <a:rPr lang="en-US" sz="1200" i="1" dirty="0">
+                <a:solidFill>
+                  <a:srgbClr val="FFFFFF">
+                    <a:alpha val="70000"/>
+                  </a:srgbClr>
+                </a:solidFill>
+                <a:latin typeface="Poppins" pitchFamily="34" charset="0"/>
+                <a:ea typeface="Poppins" pitchFamily="34" charset="-122"/>
+                <a:cs typeface="Poppins" pitchFamily="34" charset="-120"/>
+              </a:rPr>
+              <a:t>Also covers SEM and 3-channel optical capture: the localiser reads the channel count and adapts.</a:t>
+            </a:r>
+            <a:endParaRPr lang="en-US" sz="1200" dirty="0"/>
+          </a:p>
+          <a:p>
+            <a:pPr marL="0" indent="0" algn="l">
+              <a:buNone/>
+            </a:pPr>
+            <a:r>
+              <a:rPr lang="en-US" sz="1200" i="1" dirty="0">
+                <a:solidFill>
+                  <a:srgbClr val="FFFFFF">
+                    <a:alpha val="70000"/>
+                  </a:srgbClr>
+                </a:solidFill>
+                <a:latin typeface="Poppins" pitchFamily="34" charset="0"/>
+                <a:ea typeface="Poppins" pitchFamily="34" charset="-122"/>
+                <a:cs typeface="Poppins" pitchFamily="34" charset="-120"/>
+              </a:rPr>
+              <a:t>28 contract tests, including one that fails loudly if the optical path degenerates into applyColorMap.</a:t>
+            </a:r>
+            <a:endParaRPr lang="en-US" sz="1200" dirty="0"/>
+          </a:p>
+        </p:txBody>
+      </p:sp>
+      <p:pic>
+        <p:nvPicPr>
+          <p:cNvPr id="23" name="Picture 22">
+            <a:extLst>
+              <a:ext uri="{FF2B5EF4-FFF2-40B4-BE49-F238E27FC236}">
+                <a16:creationId xmlns:a16="http://schemas.microsoft.com/office/drawing/2014/main" id="{48B85B4A-4413-5424-84AE-2AF429F27FBC}"/>
+              </a:ext>
+            </a:extLst>
+          </p:cNvPr>
+          <p:cNvPicPr>
+            <a:picLocks noChangeAspect="1"/>
+          </p:cNvPicPr>
+          <p:nvPr/>
+        </p:nvPicPr>
+        <p:blipFill>
+          <a:blip r:embed="rId7"/>
+          <a:stretch>
+            <a:fillRect/>
+          </a:stretch>
+        </p:blipFill>
+        <p:spPr>
+          <a:xfrm>
+            <a:off x="5178322" y="228650"/>
+            <a:ext cx="1607366" cy="783591"/>
+          </a:xfrm>
+          <a:prstGeom prst="rect">
+            <a:avLst/>
+          </a:prstGeom>
+        </p:spPr>
+      </p:pic>
+      <p:sp>
+        <p:nvSpPr>
+          <p:cNvPr id="25" name="Shape 1">
+            <a:extLst>
+              <a:ext uri="{FF2B5EF4-FFF2-40B4-BE49-F238E27FC236}">
+                <a16:creationId xmlns:a16="http://schemas.microsoft.com/office/drawing/2014/main" id="{BB3A3471-21A6-8A80-8399-32E98C63F186}"/>
+              </a:ext>
+            </a:extLst>
+          </p:cNvPr>
+          <p:cNvSpPr/>
+          <p:nvPr/>
+        </p:nvSpPr>
+        <p:spPr>
+          <a:xfrm>
+            <a:off x="571500" y="258065"/>
+            <a:ext cx="11048695" cy="857707"/>
+          </a:xfrm>
+          <a:prstGeom prst="roundRect">
+            <a:avLst>
+              <a:gd name="adj" fmla="val 9476"/>
+            </a:avLst>
+          </a:prstGeom>
+          <a:solidFill>
+            <a:srgbClr val="FFFFFF">
+              <a:alpha val="95000"/>
+            </a:srgbClr>
+          </a:solidFill>
+          <a:ln/>
+          <a:effectLst>
+            <a:outerShdw blurRad="63500" dist="38100" dir="5400000" algn="bl" rotWithShape="0">
+              <a:srgbClr val="000000">
+                <a:alpha val="10000"/>
+              </a:srgbClr>
+            </a:outerShdw>
+          </a:effectLst>
+        </p:spPr>
+        <p:txBody>
+          <a:bodyPr/>
+          <a:lstStyle/>
+          <a:p>
+            <a:endParaRPr lang="en-IN"/>
+          </a:p>
+        </p:txBody>
+      </p:sp>
+      <p:pic>
+        <p:nvPicPr>
+          <p:cNvPr id="26" name="Picture 25">
+            <a:extLst>
+              <a:ext uri="{FF2B5EF4-FFF2-40B4-BE49-F238E27FC236}">
+                <a16:creationId xmlns:a16="http://schemas.microsoft.com/office/drawing/2014/main" id="{1ADA517E-8996-A444-E540-A2F9B8F98D2B}"/>
+              </a:ext>
+            </a:extLst>
+          </p:cNvPr>
+          <p:cNvPicPr>
+            <a:picLocks noChangeAspect="1"/>
+          </p:cNvPicPr>
+          <p:nvPr/>
+        </p:nvPicPr>
+        <p:blipFill>
+          <a:blip r:embed="rId8">
+            <a:extLst>
+              <a:ext uri="{28A0092B-C50C-407E-A947-70E740481C1C}">
+                <a14:useLocalDpi xmlns:a14="http://schemas.microsoft.com/office/drawing/2010/main" val="0"/>
+              </a:ext>
+            </a:extLst>
+          </a:blip>
+          <a:stretch>
+            <a:fillRect/>
+          </a:stretch>
+        </p:blipFill>
+        <p:spPr>
+          <a:xfrm>
+            <a:off x="1490929" y="393700"/>
+            <a:ext cx="9163491" cy="586435"/>
+          </a:xfrm>
+          <a:prstGeom prst="rect">
+            <a:avLst/>
+          </a:prstGeom>
+        </p:spPr>
+      </p:pic>
+    </p:spTree>
+  </p:cSld>
+  <p:clrMapOvr>
+    <a:masterClrMapping/>
+  </p:clrMapOvr>
+</p:sld>
+</file>
+
+<file path=ppt/slides/slide8.xml><?xml version="1.0" encoding="utf-8"?>
 <p:sld xmlns:a="http://schemas.openxmlformats.org/drawingml/2006/main" xmlns:r="http://schemas.openxmlformats.org/officeDocument/2006/relationships" xmlns:p="http://schemas.openxmlformats.org/presentationml/2006/main">
   <p:cSld name="Slide 7">
     <p:spTree>
@@ -12477,7 +14378,7 @@
                 <a:ea typeface="Poppins" pitchFamily="34" charset="-122"/>
                 <a:cs typeface="Poppins" pitchFamily="34" charset="-120"/>
               </a:rPr>
-              <a:t>Threshold-wise (75/80 pairs, four seeds): ≤5px 93.75% — ≤4px 93.75% — ≤2px 91.25% — ≤1px (sub-pixel) 90.0%.</a:t>
+              <a:t>Threshold-wise (112/120 pairs, four seeds): ≤5px 93.33% — ≤4px 93.33% — ≤2px 90.83% — ≤1px (sub-pixel) 90.0%.</a:t>
             </a:r>
             <a:endParaRPr lang="en-US" sz="1000" dirty="0"/>
           </a:p>
@@ -12494,7 +14395,7 @@
                 <a:ea typeface="Poppins" pitchFamily="34" charset="-122"/>
                 <a:cs typeface="Poppins" pitchFamily="34" charset="-120"/>
               </a:rPr>
-              <a:t>Median localization error 0.10 px — sub-pixel.</a:t>
+              <a:t>Median localization error 0.09 px — sub-pixel.</a:t>
             </a:r>
             <a:endParaRPr lang="en-US" sz="1000" dirty="0"/>
           </a:p>
@@ -12511,7 +14412,7 @@
                 <a:ea typeface="Poppins" pitchFamily="34" charset="-122"/>
                 <a:cs typeface="Poppins" pitchFamily="34" charset="-120"/>
               </a:rPr>
-              <a:t>Error stats: mean 21.4 px, worst-case 721 px — rare full lattice jumps, not near-misses.</a:t>
+              <a:t>Error stats: mean 16.1 px, worst-case 721 px — rare full lattice jumps, not near-misses.</a:t>
             </a:r>
             <a:endParaRPr lang="en-US" sz="1000" dirty="0"/>
           </a:p>
@@ -12703,7 +14604,7 @@
 </p:sld>
 </file>
 
-<file path=ppt/slides/slide7.xml><?xml version="1.0" encoding="utf-8"?>
+<file path=ppt/slides/slide9.xml><?xml version="1.0" encoding="utf-8"?>
 <p:sld xmlns:a="http://schemas.openxmlformats.org/drawingml/2006/main" xmlns:r="http://schemas.openxmlformats.org/officeDocument/2006/relationships" xmlns:p="http://schemas.openxmlformats.org/presentationml/2006/main">
   <p:cSld name="Slide 8">
     <p:spTree>
@@ -13377,7 +15278,7 @@
                 <a:ea typeface="Poppins" pitchFamily="34" charset="-122"/>
                 <a:cs typeface="Poppins" pitchFamily="34" charset="-120"/>
               </a:rPr>
-              <a:t>Reproducible: seeded RNG, pinned requirements.txt, 26-test pytest suite, README runs clone → generate → localize → evaluate.</a:t>
+              <a:t>Reproducible: seeded RNG, pinned requirements.txt, 28-test pytest suite, README runs clone → generate → localize → evaluate.</a:t>
             </a:r>
             <a:endParaRPr lang="en-US" sz="1300" dirty="0"/>
           </a:p>
@@ -13590,7 +15491,7 @@
                 <a:ea typeface="Poppins" pitchFamily="34" charset="-122"/>
                 <a:cs typeface="Poppins" pitchFamily="34" charset="-120"/>
               </a:rPr>
-              <a:t>tests/ — 26 tests</a:t>
+              <a:t>tests/ — 28 tests</a:t>
             </a:r>
             <a:endParaRPr lang="en-US" sz="800" dirty="0"/>
           </a:p>
@@ -13980,1907 +15881,6 @@
         <p:spPr>
           <a:xfrm>
             <a:off x="1514101" y="378206"/>
-            <a:ext cx="9163491" cy="586435"/>
-          </a:xfrm>
-          <a:prstGeom prst="rect">
-            <a:avLst/>
-          </a:prstGeom>
-        </p:spPr>
-      </p:pic>
-    </p:spTree>
-  </p:cSld>
-  <p:clrMapOvr>
-    <a:masterClrMapping/>
-  </p:clrMapOvr>
-</p:sld>
-</file>
-
-<file path=ppt/slides/slide8.xml><?xml version="1.0" encoding="utf-8"?>
-<p:sld xmlns:a="http://schemas.openxmlformats.org/drawingml/2006/main" xmlns:r="http://schemas.openxmlformats.org/officeDocument/2006/relationships" xmlns:p="http://schemas.openxmlformats.org/presentationml/2006/main">
-  <p:cSld>
-    <p:spTree>
-      <p:nvGrpSpPr>
-        <p:cNvPr id="1" name=""/>
-        <p:cNvGrpSpPr/>
-        <p:nvPr/>
-      </p:nvGrpSpPr>
-      <p:grpSpPr>
-        <a:xfrm>
-          <a:off x="0" y="0"/>
-          <a:ext cx="0" cy="0"/>
-          <a:chOff x="0" y="0"/>
-          <a:chExt cx="0" cy="0"/>
-        </a:xfrm>
-      </p:grpSpPr>
-      <p:sp>
-        <p:nvSpPr>
-          <p:cNvPr id="2" name="Shape 0"/>
-          <p:cNvSpPr/>
-          <p:nvPr/>
-        </p:nvSpPr>
-        <p:spPr>
-          <a:xfrm>
-            <a:off x="0" y="0"/>
-            <a:ext cx="12191695" cy="6858000"/>
-          </a:xfrm>
-          <a:prstGeom prst="rect">
-            <a:avLst/>
-          </a:prstGeom>
-          <a:solidFill>
-            <a:srgbClr val="000036"/>
-          </a:solidFill>
-          <a:ln/>
-        </p:spPr>
-        <p:txBody>
-          <a:bodyPr/>
-          <a:lstStyle/>
-          <a:p>
-            <a:endParaRPr lang="en-IN"/>
-          </a:p>
-        </p:txBody>
-      </p:sp>
-      <p:pic>
-        <p:nvPicPr>
-          <p:cNvPr id="3" name="Image 0" descr="preencoded.png"/>
-          <p:cNvPicPr>
-            <a:picLocks noChangeAspect="1"/>
-          </p:cNvPicPr>
-          <p:nvPr/>
-        </p:nvPicPr>
-        <p:blipFill>
-          <a:blip r:embed="rId3">
-            <a:alphaModFix amt="10000"/>
-          </a:blip>
-          <a:srcRect l="12327" r="12327"/>
-          <a:stretch/>
-        </p:blipFill>
-        <p:spPr>
-          <a:xfrm>
-            <a:off x="0" y="0"/>
-            <a:ext cx="12191695" cy="6858000"/>
-          </a:xfrm>
-          <a:prstGeom prst="rect">
-            <a:avLst/>
-          </a:prstGeom>
-        </p:spPr>
-      </p:pic>
-      <p:sp>
-        <p:nvSpPr>
-          <p:cNvPr id="4" name="Shape 1"/>
-          <p:cNvSpPr/>
-          <p:nvPr/>
-        </p:nvSpPr>
-        <p:spPr>
-          <a:xfrm>
-            <a:off x="571500" y="286207"/>
-            <a:ext cx="11048695" cy="666598"/>
-          </a:xfrm>
-          <a:prstGeom prst="roundRect">
-            <a:avLst>
-              <a:gd name="adj" fmla="val 15677"/>
-            </a:avLst>
-          </a:prstGeom>
-          <a:solidFill>
-            <a:srgbClr val="FFFFFF">
-              <a:alpha val="95000"/>
-            </a:srgbClr>
-          </a:solidFill>
-          <a:ln/>
-          <a:effectLst>
-            <a:outerShdw blurRad="63500" dist="38100" dir="5400000" algn="bl" rotWithShape="0">
-              <a:srgbClr val="000000">
-                <a:alpha val="10000"/>
-              </a:srgbClr>
-            </a:outerShdw>
-          </a:effectLst>
-        </p:spPr>
-        <p:txBody>
-          <a:bodyPr/>
-          <a:lstStyle/>
-          <a:p>
-            <a:endParaRPr lang="en-IN"/>
-          </a:p>
-        </p:txBody>
-      </p:sp>
-      <p:pic>
-        <p:nvPicPr>
-          <p:cNvPr id="5" name="Image 1" descr="preencoded.png"/>
-          <p:cNvPicPr>
-            <a:picLocks noChangeAspect="1"/>
-          </p:cNvPicPr>
-          <p:nvPr/>
-        </p:nvPicPr>
-        <p:blipFill>
-          <a:blip r:embed="rId4"/>
-          <a:srcRect t="10" b="10"/>
-          <a:stretch/>
-        </p:blipFill>
-        <p:spPr>
-          <a:xfrm>
-            <a:off x="857707" y="381305"/>
-            <a:ext cx="1266444" cy="476402"/>
-          </a:xfrm>
-          <a:prstGeom prst="rect">
-            <a:avLst/>
-          </a:prstGeom>
-        </p:spPr>
-      </p:pic>
-      <p:pic>
-        <p:nvPicPr>
-          <p:cNvPr id="6" name="Image 2" descr="preencoded.png"/>
-          <p:cNvPicPr>
-            <a:picLocks noChangeAspect="1"/>
-          </p:cNvPicPr>
-          <p:nvPr/>
-        </p:nvPicPr>
-        <p:blipFill>
-          <a:blip r:embed="rId5"/>
-          <a:srcRect/>
-          <a:stretch/>
-        </p:blipFill>
-        <p:spPr>
-          <a:xfrm>
-            <a:off x="10858500" y="381305"/>
-            <a:ext cx="476402" cy="476402"/>
-          </a:xfrm>
-          <a:prstGeom prst="rect">
-            <a:avLst/>
-          </a:prstGeom>
-        </p:spPr>
-      </p:pic>
-      <p:sp>
-        <p:nvSpPr>
-          <p:cNvPr id="7" name="Shape 2"/>
-          <p:cNvSpPr/>
-          <p:nvPr/>
-        </p:nvSpPr>
-        <p:spPr>
-          <a:xfrm>
-            <a:off x="571500" y="1333195"/>
-            <a:ext cx="75895" cy="409651"/>
-          </a:xfrm>
-          <a:prstGeom prst="rect">
-            <a:avLst/>
-          </a:prstGeom>
-          <a:solidFill>
-            <a:srgbClr val="88E555"/>
-          </a:solidFill>
-          <a:ln/>
-        </p:spPr>
-        <p:txBody>
-          <a:bodyPr/>
-          <a:lstStyle/>
-          <a:p>
-            <a:endParaRPr lang="en-IN"/>
-          </a:p>
-        </p:txBody>
-      </p:sp>
-      <p:sp>
-        <p:nvSpPr>
-          <p:cNvPr id="8" name="Text 3"/>
-          <p:cNvSpPr txBox="1"/>
-          <p:nvPr/>
-        </p:nvSpPr>
-        <p:spPr>
-          <a:xfrm>
-            <a:off x="838505" y="1295705"/>
-            <a:ext cx="3604565" cy="467258"/>
-          </a:xfrm>
-          <a:prstGeom prst="rect">
-            <a:avLst/>
-          </a:prstGeom>
-          <a:noFill/>
-          <a:ln/>
-        </p:spPr>
-        <p:txBody>
-          <a:bodyPr wrap="square" lIns="0" tIns="0" rIns="0" bIns="0" rtlCol="0" anchor="ctr"/>
-          <a:lstStyle/>
-          <a:p>
-            <a:pPr marL="0" indent="0" algn="l">
-              <a:buNone/>
-            </a:pPr>
-            <a:r>
-              <a:rPr lang="en-US" sz="2600" b="1" dirty="0">
-                <a:solidFill>
-                  <a:srgbClr val="FFFFFF"/>
-                </a:solidFill>
-                <a:latin typeface="Poppins" pitchFamily="34" charset="0"/>
-                <a:ea typeface="Poppins" pitchFamily="34" charset="-122"/>
-                <a:cs typeface="Poppins" pitchFamily="34" charset="-120"/>
-              </a:rPr>
-              <a:t>GitHub &amp; Video Link</a:t>
-            </a:r>
-            <a:endParaRPr lang="en-US" sz="2600" dirty="0"/>
-          </a:p>
-        </p:txBody>
-      </p:sp>
-      <p:sp>
-        <p:nvSpPr>
-          <p:cNvPr id="9" name="Shape 4"/>
-          <p:cNvSpPr/>
-          <p:nvPr/>
-        </p:nvSpPr>
-        <p:spPr>
-          <a:xfrm>
-            <a:off x="571500" y="2030703"/>
-            <a:ext cx="11048695" cy="4552798"/>
-          </a:xfrm>
-          <a:prstGeom prst="roundRect">
-            <a:avLst>
-              <a:gd name="adj" fmla="val 672"/>
-            </a:avLst>
-          </a:prstGeom>
-          <a:solidFill>
-            <a:srgbClr val="FFFFFF">
-              <a:alpha val="5000"/>
-            </a:srgbClr>
-          </a:solidFill>
-          <a:ln w="12700">
-            <a:solidFill>
-              <a:srgbClr val="88E555">
-                <a:alpha val="30000"/>
-              </a:srgbClr>
-            </a:solidFill>
-            <a:prstDash val="solid"/>
-          </a:ln>
-        </p:spPr>
-        <p:txBody>
-          <a:bodyPr/>
-          <a:lstStyle/>
-          <a:p>
-            <a:endParaRPr lang="en-IN"/>
-          </a:p>
-        </p:txBody>
-      </p:sp>
-      <p:sp>
-        <p:nvSpPr>
-          <p:cNvPr id="10" name="Shape 5"/>
-          <p:cNvSpPr/>
-          <p:nvPr/>
-        </p:nvSpPr>
-        <p:spPr>
-          <a:xfrm>
-            <a:off x="571500" y="2021738"/>
-            <a:ext cx="190195" cy="190195"/>
-          </a:xfrm>
-          <a:prstGeom prst="roundRect">
-            <a:avLst>
-              <a:gd name="adj" fmla="val 192308"/>
-            </a:avLst>
-          </a:prstGeom>
-          <a:noFill/>
-          <a:ln w="38100">
-            <a:solidFill>
-              <a:srgbClr val="88E555"/>
-            </a:solidFill>
-            <a:prstDash val="solid"/>
-          </a:ln>
-        </p:spPr>
-        <p:txBody>
-          <a:bodyPr/>
-          <a:lstStyle/>
-          <a:p>
-            <a:endParaRPr lang="en-IN"/>
-          </a:p>
-        </p:txBody>
-      </p:sp>
-      <p:sp>
-        <p:nvSpPr>
-          <p:cNvPr id="11" name="Shape 6"/>
-          <p:cNvSpPr/>
-          <p:nvPr/>
-        </p:nvSpPr>
-        <p:spPr>
-          <a:xfrm>
-            <a:off x="11430000" y="2021738"/>
-            <a:ext cx="190195" cy="190195"/>
-          </a:xfrm>
-          <a:prstGeom prst="rect">
-            <a:avLst/>
-          </a:prstGeom>
-          <a:noFill/>
-          <a:ln w="38100">
-            <a:solidFill>
-              <a:srgbClr val="88E555"/>
-            </a:solidFill>
-            <a:prstDash val="solid"/>
-          </a:ln>
-        </p:spPr>
-        <p:txBody>
-          <a:bodyPr/>
-          <a:lstStyle/>
-          <a:p>
-            <a:endParaRPr lang="en-IN"/>
-          </a:p>
-        </p:txBody>
-      </p:sp>
-      <p:sp>
-        <p:nvSpPr>
-          <p:cNvPr id="12" name="Shape 7"/>
-          <p:cNvSpPr/>
-          <p:nvPr/>
-        </p:nvSpPr>
-        <p:spPr>
-          <a:xfrm>
-            <a:off x="571500" y="6381598"/>
-            <a:ext cx="190195" cy="190195"/>
-          </a:xfrm>
-          <a:prstGeom prst="rect">
-            <a:avLst/>
-          </a:prstGeom>
-          <a:noFill/>
-          <a:ln w="38100">
-            <a:solidFill>
-              <a:srgbClr val="88E555"/>
-            </a:solidFill>
-            <a:prstDash val="solid"/>
-          </a:ln>
-        </p:spPr>
-        <p:txBody>
-          <a:bodyPr/>
-          <a:lstStyle/>
-          <a:p>
-            <a:endParaRPr lang="en-IN"/>
-          </a:p>
-        </p:txBody>
-      </p:sp>
-      <p:sp>
-        <p:nvSpPr>
-          <p:cNvPr id="13" name="Shape 8"/>
-          <p:cNvSpPr/>
-          <p:nvPr/>
-        </p:nvSpPr>
-        <p:spPr>
-          <a:xfrm>
-            <a:off x="11430000" y="6381598"/>
-            <a:ext cx="190195" cy="190195"/>
-          </a:xfrm>
-          <a:prstGeom prst="rect">
-            <a:avLst/>
-          </a:prstGeom>
-          <a:noFill/>
-          <a:ln w="38100">
-            <a:solidFill>
-              <a:srgbClr val="88E555"/>
-            </a:solidFill>
-            <a:prstDash val="solid"/>
-          </a:ln>
-        </p:spPr>
-        <p:txBody>
-          <a:bodyPr/>
-          <a:lstStyle/>
-          <a:p>
-            <a:endParaRPr lang="en-IN"/>
-          </a:p>
-        </p:txBody>
-      </p:sp>
-      <p:sp>
-        <p:nvSpPr>
-          <p:cNvPr id="14" name="Shape 9"/>
-          <p:cNvSpPr/>
-          <p:nvPr/>
-        </p:nvSpPr>
-        <p:spPr>
-          <a:xfrm>
-            <a:off x="1190549" y="2696566"/>
-            <a:ext cx="9810598" cy="1447495"/>
-          </a:xfrm>
-          <a:prstGeom prst="roundRect">
-            <a:avLst>
-              <a:gd name="adj" fmla="val 4987"/>
-            </a:avLst>
-          </a:prstGeom>
-          <a:noFill/>
-          <a:ln w="12700">
-            <a:solidFill>
-              <a:srgbClr val="88E555">
-                <a:alpha val="20000"/>
-              </a:srgbClr>
-            </a:solidFill>
-            <a:prstDash val="solid"/>
-          </a:ln>
-        </p:spPr>
-        <p:txBody>
-          <a:bodyPr/>
-          <a:lstStyle/>
-          <a:p>
-            <a:endParaRPr lang="en-IN"/>
-          </a:p>
-        </p:txBody>
-      </p:sp>
-      <p:sp>
-        <p:nvSpPr>
-          <p:cNvPr id="15" name="Shape 10"/>
-          <p:cNvSpPr/>
-          <p:nvPr/>
-        </p:nvSpPr>
-        <p:spPr>
-          <a:xfrm>
-            <a:off x="1429207" y="3087014"/>
-            <a:ext cx="666598" cy="666598"/>
-          </a:xfrm>
-          <a:prstGeom prst="ellipse">
-            <a:avLst/>
-          </a:prstGeom>
-          <a:solidFill>
-            <a:srgbClr val="273383">
-              <a:alpha val="60000"/>
-            </a:srgbClr>
-          </a:solidFill>
-          <a:ln w="25400">
-            <a:solidFill>
-              <a:srgbClr val="AEFF82"/>
-            </a:solidFill>
-            <a:prstDash val="solid"/>
-          </a:ln>
-          <a:effectLst>
-            <a:outerShdw blurRad="139700" dist="12700" dir="16200000" algn="bl" rotWithShape="0">
-              <a:srgbClr val="88E555">
-                <a:alpha val="20000"/>
-              </a:srgbClr>
-            </a:outerShdw>
-          </a:effectLst>
-        </p:spPr>
-        <p:txBody>
-          <a:bodyPr/>
-          <a:lstStyle/>
-          <a:p>
-            <a:endParaRPr lang="en-IN"/>
-          </a:p>
-        </p:txBody>
-      </p:sp>
-      <p:pic>
-        <p:nvPicPr>
-          <p:cNvPr id="16" name="Image 3" descr="preencoded.png"/>
-          <p:cNvPicPr>
-            <a:picLocks noChangeAspect="1"/>
-          </p:cNvPicPr>
-          <p:nvPr/>
-        </p:nvPicPr>
-        <p:blipFill>
-          <a:blip r:embed="rId6"/>
-          <a:srcRect l="-237" r="-237"/>
-          <a:stretch/>
-        </p:blipFill>
-        <p:spPr>
-          <a:xfrm>
-            <a:off x="1595628" y="3248863"/>
-            <a:ext cx="333756" cy="342900"/>
-          </a:xfrm>
-          <a:prstGeom prst="rect">
-            <a:avLst/>
-          </a:prstGeom>
-        </p:spPr>
-      </p:pic>
-      <p:sp>
-        <p:nvSpPr>
-          <p:cNvPr id="17" name="Text 11"/>
-          <p:cNvSpPr txBox="1"/>
-          <p:nvPr/>
-        </p:nvSpPr>
-        <p:spPr>
-          <a:xfrm>
-            <a:off x="2400300" y="2934310"/>
-            <a:ext cx="2000707" cy="267005"/>
-          </a:xfrm>
-          <a:prstGeom prst="rect">
-            <a:avLst/>
-          </a:prstGeom>
-          <a:noFill/>
-          <a:ln/>
-        </p:spPr>
-        <p:txBody>
-          <a:bodyPr wrap="square" lIns="0" tIns="0" rIns="0" bIns="0" rtlCol="0" anchor="ctr"/>
-          <a:lstStyle/>
-          <a:p>
-            <a:pPr marL="0" indent="0" algn="l">
-              <a:buNone/>
-            </a:pPr>
-            <a:r>
-              <a:rPr lang="en-US" sz="1500" b="1" dirty="0">
-                <a:solidFill>
-                  <a:srgbClr val="88E555"/>
-                </a:solidFill>
-                <a:latin typeface="Poppins" pitchFamily="34" charset="0"/>
-                <a:ea typeface="Poppins" pitchFamily="34" charset="-122"/>
-                <a:cs typeface="Poppins" pitchFamily="34" charset="-120"/>
-              </a:rPr>
-              <a:t>GitHub Repository</a:t>
-            </a:r>
-            <a:endParaRPr lang="en-US" sz="1500" dirty="0"/>
-          </a:p>
-        </p:txBody>
-      </p:sp>
-      <p:sp>
-        <p:nvSpPr>
-          <p:cNvPr id="18" name="Shape 12"/>
-          <p:cNvSpPr/>
-          <p:nvPr/>
-        </p:nvSpPr>
-        <p:spPr>
-          <a:xfrm>
-            <a:off x="2400300" y="3315614"/>
-            <a:ext cx="8363102" cy="590702"/>
-          </a:xfrm>
-          <a:prstGeom prst="roundRect">
-            <a:avLst>
-              <a:gd name="adj" fmla="val 19974"/>
-            </a:avLst>
-          </a:prstGeom>
-          <a:solidFill>
-            <a:srgbClr val="FFFFFF">
-              <a:alpha val="10000"/>
-            </a:srgbClr>
-          </a:solidFill>
-          <a:ln w="12700">
-            <a:solidFill>
-              <a:srgbClr val="4B5563"/>
-            </a:solidFill>
-            <a:prstDash val="solid"/>
-          </a:ln>
-        </p:spPr>
-        <p:txBody>
-          <a:bodyPr/>
-          <a:lstStyle/>
-          <a:p>
-            <a:endParaRPr lang="en-IN"/>
-          </a:p>
-        </p:txBody>
-      </p:sp>
-      <p:pic>
-        <p:nvPicPr>
-          <p:cNvPr id="19" name="Image 4" descr="preencoded.png"/>
-          <p:cNvPicPr>
-            <a:picLocks noChangeAspect="1"/>
-          </p:cNvPicPr>
-          <p:nvPr/>
-        </p:nvPicPr>
-        <p:blipFill>
-          <a:blip r:embed="rId7"/>
-          <a:srcRect t="-180" b="-180"/>
-          <a:stretch/>
-        </p:blipFill>
-        <p:spPr>
-          <a:xfrm>
-            <a:off x="2562149" y="3535070"/>
-            <a:ext cx="190195" cy="152705"/>
-          </a:xfrm>
-          <a:prstGeom prst="rect">
-            <a:avLst/>
-          </a:prstGeom>
-        </p:spPr>
-      </p:pic>
-      <p:sp>
-        <p:nvSpPr>
-          <p:cNvPr id="20" name="Text 13"/>
-          <p:cNvSpPr txBox="1"/>
-          <p:nvPr/>
-        </p:nvSpPr>
-        <p:spPr>
-          <a:xfrm>
-            <a:off x="2866644" y="3487522"/>
-            <a:ext cx="3891686" cy="238658"/>
-          </a:xfrm>
-          <a:prstGeom prst="rect">
-            <a:avLst/>
-          </a:prstGeom>
-          <a:noFill/>
-          <a:ln/>
-        </p:spPr>
-        <p:txBody>
-          <a:bodyPr wrap="square" lIns="0" tIns="0" rIns="0" bIns="0" rtlCol="0" anchor="ctr"/>
-          <a:lstStyle/>
-          <a:p>
-            <a:r>
-              <a:rPr lang="en-IN" sz="1400">
-                <a:solidFill>
-                  <a:schemeClr val="bg1"/>
-                </a:solidFill>
-              </a:rPr>
-              <a:t>https://github.com/Mandy434/drift-sense</a:t>
-            </a:r>
-            <a:endParaRPr lang="en-US" sz="1300" dirty="0">
-              <a:solidFill>
-                <a:schemeClr val="bg1"/>
-              </a:solidFill>
-            </a:endParaRPr>
-          </a:p>
-        </p:txBody>
-      </p:sp>
-      <p:sp>
-        <p:nvSpPr>
-          <p:cNvPr id="21" name="Shape 14"/>
-          <p:cNvSpPr/>
-          <p:nvPr/>
-        </p:nvSpPr>
-        <p:spPr>
-          <a:xfrm>
-            <a:off x="1190549" y="4449470"/>
-            <a:ext cx="9810598" cy="1447495"/>
-          </a:xfrm>
-          <a:prstGeom prst="roundRect">
-            <a:avLst>
-              <a:gd name="adj" fmla="val 4987"/>
-            </a:avLst>
-          </a:prstGeom>
-          <a:noFill/>
-          <a:ln w="12700">
-            <a:solidFill>
-              <a:srgbClr val="88E555">
-                <a:alpha val="20000"/>
-              </a:srgbClr>
-            </a:solidFill>
-            <a:prstDash val="solid"/>
-          </a:ln>
-        </p:spPr>
-        <p:txBody>
-          <a:bodyPr/>
-          <a:lstStyle/>
-          <a:p>
-            <a:endParaRPr lang="en-IN"/>
-          </a:p>
-        </p:txBody>
-      </p:sp>
-      <p:sp>
-        <p:nvSpPr>
-          <p:cNvPr id="22" name="Shape 15"/>
-          <p:cNvSpPr/>
-          <p:nvPr/>
-        </p:nvSpPr>
-        <p:spPr>
-          <a:xfrm>
-            <a:off x="1429207" y="4839919"/>
-            <a:ext cx="666598" cy="666598"/>
-          </a:xfrm>
-          <a:prstGeom prst="ellipse">
-            <a:avLst/>
-          </a:prstGeom>
-          <a:solidFill>
-            <a:srgbClr val="273383">
-              <a:alpha val="60000"/>
-            </a:srgbClr>
-          </a:solidFill>
-          <a:ln w="25400">
-            <a:solidFill>
-              <a:srgbClr val="AEFF82"/>
-            </a:solidFill>
-            <a:prstDash val="solid"/>
-          </a:ln>
-          <a:effectLst>
-            <a:outerShdw blurRad="139700" dist="12700" dir="16200000" algn="bl" rotWithShape="0">
-              <a:srgbClr val="88E555">
-                <a:alpha val="20000"/>
-              </a:srgbClr>
-            </a:outerShdw>
-          </a:effectLst>
-        </p:spPr>
-        <p:txBody>
-          <a:bodyPr/>
-          <a:lstStyle/>
-          <a:p>
-            <a:endParaRPr lang="en-IN"/>
-          </a:p>
-        </p:txBody>
-      </p:sp>
-      <p:pic>
-        <p:nvPicPr>
-          <p:cNvPr id="23" name="Image 5" descr="preencoded.png"/>
-          <p:cNvPicPr>
-            <a:picLocks noChangeAspect="1"/>
-          </p:cNvPicPr>
-          <p:nvPr/>
-        </p:nvPicPr>
-        <p:blipFill>
-          <a:blip r:embed="rId8"/>
-          <a:srcRect l="-607" r="-607"/>
-          <a:stretch/>
-        </p:blipFill>
-        <p:spPr>
-          <a:xfrm>
-            <a:off x="1567282" y="5001768"/>
-            <a:ext cx="390449" cy="342900"/>
-          </a:xfrm>
-          <a:prstGeom prst="rect">
-            <a:avLst/>
-          </a:prstGeom>
-        </p:spPr>
-      </p:pic>
-      <p:sp>
-        <p:nvSpPr>
-          <p:cNvPr id="24" name="Text 16"/>
-          <p:cNvSpPr txBox="1"/>
-          <p:nvPr/>
-        </p:nvSpPr>
-        <p:spPr>
-          <a:xfrm>
-            <a:off x="2400300" y="4687214"/>
-            <a:ext cx="3086100" cy="267005"/>
-          </a:xfrm>
-          <a:prstGeom prst="rect">
-            <a:avLst/>
-          </a:prstGeom>
-          <a:noFill/>
-          <a:ln/>
-        </p:spPr>
-        <p:txBody>
-          <a:bodyPr wrap="square" lIns="0" tIns="0" rIns="0" bIns="0" rtlCol="0" anchor="ctr"/>
-          <a:lstStyle/>
-          <a:p>
-            <a:pPr marL="0" indent="0" algn="l">
-              <a:buNone/>
-            </a:pPr>
-            <a:r>
-              <a:rPr lang="en-US" sz="1500" b="1" dirty="0">
-                <a:solidFill>
-                  <a:srgbClr val="88E555"/>
-                </a:solidFill>
-                <a:latin typeface="Poppins" pitchFamily="34" charset="0"/>
-                <a:ea typeface="Poppins" pitchFamily="34" charset="-122"/>
-                <a:cs typeface="Poppins" pitchFamily="34" charset="-120"/>
-              </a:rPr>
-              <a:t>Prototype / Simulation Video</a:t>
-            </a:r>
-            <a:endParaRPr lang="en-US" sz="1500" dirty="0"/>
-          </a:p>
-        </p:txBody>
-      </p:sp>
-      <p:sp>
-        <p:nvSpPr>
-          <p:cNvPr id="25" name="Shape 17"/>
-          <p:cNvSpPr/>
-          <p:nvPr/>
-        </p:nvSpPr>
-        <p:spPr>
-          <a:xfrm>
-            <a:off x="2400300" y="5068519"/>
-            <a:ext cx="8363102" cy="590702"/>
-          </a:xfrm>
-          <a:prstGeom prst="roundRect">
-            <a:avLst>
-              <a:gd name="adj" fmla="val 19974"/>
-            </a:avLst>
-          </a:prstGeom>
-          <a:solidFill>
-            <a:srgbClr val="FFFFFF">
-              <a:alpha val="10000"/>
-            </a:srgbClr>
-          </a:solidFill>
-          <a:ln w="12700">
-            <a:solidFill>
-              <a:srgbClr val="4B5563"/>
-            </a:solidFill>
-            <a:prstDash val="solid"/>
-          </a:ln>
-        </p:spPr>
-        <p:txBody>
-          <a:bodyPr/>
-          <a:lstStyle/>
-          <a:p>
-            <a:endParaRPr lang="en-IN"/>
-          </a:p>
-        </p:txBody>
-      </p:sp>
-      <p:pic>
-        <p:nvPicPr>
-          <p:cNvPr id="26" name="Image 6" descr="preencoded.png"/>
-          <p:cNvPicPr>
-            <a:picLocks noChangeAspect="1"/>
-          </p:cNvPicPr>
-          <p:nvPr/>
-        </p:nvPicPr>
-        <p:blipFill>
-          <a:blip r:embed="rId9"/>
-          <a:srcRect l="-33" r="-33"/>
-          <a:stretch/>
-        </p:blipFill>
-        <p:spPr>
-          <a:xfrm>
-            <a:off x="2562149" y="5287061"/>
-            <a:ext cx="171907" cy="152705"/>
-          </a:xfrm>
-          <a:prstGeom prst="rect">
-            <a:avLst/>
-          </a:prstGeom>
-        </p:spPr>
-      </p:pic>
-      <p:sp>
-        <p:nvSpPr>
-          <p:cNvPr id="27" name="Text 18"/>
-          <p:cNvSpPr txBox="1"/>
-          <p:nvPr/>
-        </p:nvSpPr>
-        <p:spPr>
-          <a:xfrm>
-            <a:off x="2848356" y="5239512"/>
-            <a:ext cx="6053328" cy="238658"/>
-          </a:xfrm>
-          <a:prstGeom prst="rect">
-            <a:avLst/>
-          </a:prstGeom>
-          <a:noFill/>
-          <a:ln/>
-        </p:spPr>
-        <p:txBody>
-          <a:bodyPr wrap="square" lIns="0" tIns="0" rIns="0" bIns="0" rtlCol="0" anchor="ctr"/>
-          <a:lstStyle/>
-          <a:p>
-            <a:pPr marL="0" indent="0" algn="l">
-              <a:buNone/>
-            </a:pPr>
-            <a:r>
-              <a:rPr lang="en-US" sz="1300" i="1" dirty="0">
-                <a:solidFill>
-                  <a:srgbClr val="D1D5DB"/>
-                </a:solidFill>
-                <a:latin typeface="Poppins" pitchFamily="34" charset="0"/>
-                <a:ea typeface="Poppins" pitchFamily="34" charset="-122"/>
-                <a:cs typeface="Poppins" pitchFamily="34" charset="-120"/>
-              </a:rPr>
-              <a:t>Not included — optional per problem statement; core deliverables (code, results, PPT) stand on their own.</a:t>
-            </a:r>
-            <a:endParaRPr lang="en-US" sz="1300" dirty="0"/>
-          </a:p>
-        </p:txBody>
-      </p:sp>
-      <p:pic>
-        <p:nvPicPr>
-          <p:cNvPr id="28" name="Picture 27">
-            <a:extLst>
-              <a:ext uri="{FF2B5EF4-FFF2-40B4-BE49-F238E27FC236}">
-                <a16:creationId xmlns:a16="http://schemas.microsoft.com/office/drawing/2014/main" id="{DAC5205F-3589-4B54-7039-C1C70523478B}"/>
-              </a:ext>
-            </a:extLst>
-          </p:cNvPr>
-          <p:cNvPicPr>
-            <a:picLocks noChangeAspect="1"/>
-          </p:cNvPicPr>
-          <p:nvPr/>
-        </p:nvPicPr>
-        <p:blipFill>
-          <a:blip r:embed="rId10"/>
-          <a:stretch>
-            <a:fillRect/>
-          </a:stretch>
-        </p:blipFill>
-        <p:spPr>
-          <a:xfrm>
-            <a:off x="5292164" y="227710"/>
-            <a:ext cx="1607366" cy="783591"/>
-          </a:xfrm>
-          <a:prstGeom prst="rect">
-            <a:avLst/>
-          </a:prstGeom>
-        </p:spPr>
-      </p:pic>
-      <p:sp>
-        <p:nvSpPr>
-          <p:cNvPr id="30" name="Shape 1">
-            <a:extLst>
-              <a:ext uri="{FF2B5EF4-FFF2-40B4-BE49-F238E27FC236}">
-                <a16:creationId xmlns:a16="http://schemas.microsoft.com/office/drawing/2014/main" id="{89A93441-4E5C-0FCA-6BDD-16AB2E1B711C}"/>
-              </a:ext>
-            </a:extLst>
-          </p:cNvPr>
-          <p:cNvSpPr/>
-          <p:nvPr/>
-        </p:nvSpPr>
-        <p:spPr>
-          <a:xfrm>
-            <a:off x="571500" y="167944"/>
-            <a:ext cx="11048695" cy="857707"/>
-          </a:xfrm>
-          <a:prstGeom prst="roundRect">
-            <a:avLst>
-              <a:gd name="adj" fmla="val 9476"/>
-            </a:avLst>
-          </a:prstGeom>
-          <a:solidFill>
-            <a:srgbClr val="FFFFFF">
-              <a:alpha val="95000"/>
-            </a:srgbClr>
-          </a:solidFill>
-          <a:ln/>
-          <a:effectLst>
-            <a:outerShdw blurRad="63500" dist="38100" dir="5400000" algn="bl" rotWithShape="0">
-              <a:srgbClr val="000000">
-                <a:alpha val="10000"/>
-              </a:srgbClr>
-            </a:outerShdw>
-          </a:effectLst>
-        </p:spPr>
-        <p:txBody>
-          <a:bodyPr/>
-          <a:lstStyle/>
-          <a:p>
-            <a:endParaRPr lang="en-IN"/>
-          </a:p>
-        </p:txBody>
-      </p:sp>
-      <p:pic>
-        <p:nvPicPr>
-          <p:cNvPr id="31" name="Picture 30">
-            <a:extLst>
-              <a:ext uri="{FF2B5EF4-FFF2-40B4-BE49-F238E27FC236}">
-                <a16:creationId xmlns:a16="http://schemas.microsoft.com/office/drawing/2014/main" id="{73E0C32B-9271-FA34-86BB-7D95EB5AB342}"/>
-              </a:ext>
-            </a:extLst>
-          </p:cNvPr>
-          <p:cNvPicPr>
-            <a:picLocks noChangeAspect="1"/>
-          </p:cNvPicPr>
-          <p:nvPr/>
-        </p:nvPicPr>
-        <p:blipFill>
-          <a:blip r:embed="rId11">
-            <a:extLst>
-              <a:ext uri="{28A0092B-C50C-407E-A947-70E740481C1C}">
-                <a14:useLocalDpi xmlns:a14="http://schemas.microsoft.com/office/drawing/2010/main" val="0"/>
-              </a:ext>
-            </a:extLst>
-          </a:blip>
-          <a:stretch>
-            <a:fillRect/>
-          </a:stretch>
-        </p:blipFill>
-        <p:spPr>
-          <a:xfrm>
-            <a:off x="1514101" y="297181"/>
-            <a:ext cx="9163491" cy="586435"/>
-          </a:xfrm>
-          <a:prstGeom prst="rect">
-            <a:avLst/>
-          </a:prstGeom>
-        </p:spPr>
-      </p:pic>
-    </p:spTree>
-  </p:cSld>
-  <p:clrMapOvr>
-    <a:masterClrMapping/>
-  </p:clrMapOvr>
-</p:sld>
-</file>
-
-<file path=ppt/slides/slide9.xml><?xml version="1.0" encoding="utf-8"?>
-<p:sld xmlns:a="http://schemas.openxmlformats.org/drawingml/2006/main" xmlns:r="http://schemas.openxmlformats.org/officeDocument/2006/relationships" xmlns:p="http://schemas.openxmlformats.org/presentationml/2006/main">
-  <p:cSld>
-    <p:spTree>
-      <p:nvGrpSpPr>
-        <p:cNvPr id="1" name=""/>
-        <p:cNvGrpSpPr/>
-        <p:nvPr/>
-      </p:nvGrpSpPr>
-      <p:grpSpPr>
-        <a:xfrm>
-          <a:off x="0" y="0"/>
-          <a:ext cx="0" cy="0"/>
-          <a:chOff x="0" y="0"/>
-          <a:chExt cx="0" cy="0"/>
-        </a:xfrm>
-      </p:grpSpPr>
-      <p:sp>
-        <p:nvSpPr>
-          <p:cNvPr id="2" name="Shape 0"/>
-          <p:cNvSpPr/>
-          <p:nvPr/>
-        </p:nvSpPr>
-        <p:spPr>
-          <a:xfrm>
-            <a:off x="0" y="0"/>
-            <a:ext cx="12191695" cy="6858000"/>
-          </a:xfrm>
-          <a:prstGeom prst="rect">
-            <a:avLst/>
-          </a:prstGeom>
-          <a:solidFill>
-            <a:srgbClr val="000036"/>
-          </a:solidFill>
-          <a:ln/>
-        </p:spPr>
-        <p:txBody>
-          <a:bodyPr/>
-          <a:lstStyle/>
-          <a:p>
-            <a:endParaRPr lang="en-IN"/>
-          </a:p>
-        </p:txBody>
-      </p:sp>
-      <p:pic>
-        <p:nvPicPr>
-          <p:cNvPr id="3" name="Image 0" descr="preencoded.png"/>
-          <p:cNvPicPr>
-            <a:picLocks noChangeAspect="1"/>
-          </p:cNvPicPr>
-          <p:nvPr/>
-        </p:nvPicPr>
-        <p:blipFill>
-          <a:blip r:embed="rId3">
-            <a:alphaModFix amt="10000"/>
-          </a:blip>
-          <a:srcRect l="12327" r="12327"/>
-          <a:stretch/>
-        </p:blipFill>
-        <p:spPr>
-          <a:xfrm>
-            <a:off x="0" y="0"/>
-            <a:ext cx="12191695" cy="6858000"/>
-          </a:xfrm>
-          <a:prstGeom prst="rect">
-            <a:avLst/>
-          </a:prstGeom>
-        </p:spPr>
-      </p:pic>
-      <p:sp>
-        <p:nvSpPr>
-          <p:cNvPr id="4" name="Shape 1"/>
-          <p:cNvSpPr/>
-          <p:nvPr/>
-        </p:nvSpPr>
-        <p:spPr>
-          <a:xfrm>
-            <a:off x="571500" y="286207"/>
-            <a:ext cx="11048695" cy="666598"/>
-          </a:xfrm>
-          <a:prstGeom prst="roundRect">
-            <a:avLst>
-              <a:gd name="adj" fmla="val 15677"/>
-            </a:avLst>
-          </a:prstGeom>
-          <a:solidFill>
-            <a:srgbClr val="FFFFFF">
-              <a:alpha val="95000"/>
-            </a:srgbClr>
-          </a:solidFill>
-          <a:ln/>
-          <a:effectLst>
-            <a:outerShdw blurRad="63500" dist="38100" dir="5400000" algn="bl" rotWithShape="0">
-              <a:srgbClr val="000000">
-                <a:alpha val="10000"/>
-              </a:srgbClr>
-            </a:outerShdw>
-          </a:effectLst>
-        </p:spPr>
-        <p:txBody>
-          <a:bodyPr/>
-          <a:lstStyle/>
-          <a:p>
-            <a:endParaRPr lang="en-IN"/>
-          </a:p>
-        </p:txBody>
-      </p:sp>
-      <p:pic>
-        <p:nvPicPr>
-          <p:cNvPr id="5" name="Image 1" descr="preencoded.png"/>
-          <p:cNvPicPr>
-            <a:picLocks noChangeAspect="1"/>
-          </p:cNvPicPr>
-          <p:nvPr/>
-        </p:nvPicPr>
-        <p:blipFill>
-          <a:blip r:embed="rId4"/>
-          <a:srcRect t="10" b="10"/>
-          <a:stretch/>
-        </p:blipFill>
-        <p:spPr>
-          <a:xfrm>
-            <a:off x="857707" y="381305"/>
-            <a:ext cx="1266444" cy="476402"/>
-          </a:xfrm>
-          <a:prstGeom prst="rect">
-            <a:avLst/>
-          </a:prstGeom>
-        </p:spPr>
-      </p:pic>
-      <p:pic>
-        <p:nvPicPr>
-          <p:cNvPr id="6" name="Image 2" descr="preencoded.png"/>
-          <p:cNvPicPr>
-            <a:picLocks noChangeAspect="1"/>
-          </p:cNvPicPr>
-          <p:nvPr/>
-        </p:nvPicPr>
-        <p:blipFill>
-          <a:blip r:embed="rId5"/>
-          <a:srcRect/>
-          <a:stretch/>
-        </p:blipFill>
-        <p:spPr>
-          <a:xfrm>
-            <a:off x="10858500" y="381305"/>
-            <a:ext cx="476402" cy="476402"/>
-          </a:xfrm>
-          <a:prstGeom prst="rect">
-            <a:avLst/>
-          </a:prstGeom>
-        </p:spPr>
-      </p:pic>
-      <p:sp>
-        <p:nvSpPr>
-          <p:cNvPr id="7" name="Shape 2"/>
-          <p:cNvSpPr/>
-          <p:nvPr/>
-        </p:nvSpPr>
-        <p:spPr>
-          <a:xfrm>
-            <a:off x="571500" y="1190549"/>
-            <a:ext cx="75895" cy="409651"/>
-          </a:xfrm>
-          <a:prstGeom prst="rect">
-            <a:avLst/>
-          </a:prstGeom>
-          <a:solidFill>
-            <a:srgbClr val="88E555"/>
-          </a:solidFill>
-          <a:ln/>
-        </p:spPr>
-        <p:txBody>
-          <a:bodyPr/>
-          <a:lstStyle/>
-          <a:p>
-            <a:endParaRPr lang="en-IN"/>
-          </a:p>
-        </p:txBody>
-      </p:sp>
-      <p:sp>
-        <p:nvSpPr>
-          <p:cNvPr id="8" name="Text 3"/>
-          <p:cNvSpPr txBox="1"/>
-          <p:nvPr/>
-        </p:nvSpPr>
-        <p:spPr>
-          <a:xfrm>
-            <a:off x="838505" y="1152144"/>
-            <a:ext cx="4624121" cy="467258"/>
-          </a:xfrm>
-          <a:prstGeom prst="rect">
-            <a:avLst/>
-          </a:prstGeom>
-          <a:noFill/>
-          <a:ln/>
-        </p:spPr>
-        <p:txBody>
-          <a:bodyPr wrap="square" lIns="0" tIns="0" rIns="0" bIns="0" rtlCol="0" anchor="ctr"/>
-          <a:lstStyle/>
-          <a:p>
-            <a:pPr marL="0" indent="0" algn="l">
-              <a:buNone/>
-            </a:pPr>
-            <a:r>
-              <a:rPr lang="en-US" sz="2600" b="1" dirty="0">
-                <a:solidFill>
-                  <a:srgbClr val="FFFFFF"/>
-                </a:solidFill>
-                <a:latin typeface="Poppins" pitchFamily="34" charset="0"/>
-                <a:ea typeface="Poppins" pitchFamily="34" charset="-122"/>
-                <a:cs typeface="Poppins" pitchFamily="34" charset="-120"/>
-              </a:rPr>
-              <a:t>Research Background</a:t>
-            </a:r>
-            <a:endParaRPr lang="en-US" sz="2600" dirty="0"/>
-          </a:p>
-        </p:txBody>
-      </p:sp>
-      <p:sp>
-        <p:nvSpPr>
-          <p:cNvPr id="9" name="Shape 4"/>
-          <p:cNvSpPr/>
-          <p:nvPr/>
-        </p:nvSpPr>
-        <p:spPr>
-          <a:xfrm>
-            <a:off x="571500" y="1830629"/>
-            <a:ext cx="11048695" cy="4743907"/>
-          </a:xfrm>
-          <a:prstGeom prst="roundRect">
-            <a:avLst>
-              <a:gd name="adj" fmla="val 619"/>
-            </a:avLst>
-          </a:prstGeom>
-          <a:solidFill>
-            <a:srgbClr val="FFFFFF">
-              <a:alpha val="5000"/>
-            </a:srgbClr>
-          </a:solidFill>
-          <a:ln w="12700">
-            <a:solidFill>
-              <a:srgbClr val="88E555">
-                <a:alpha val="30000"/>
-              </a:srgbClr>
-            </a:solidFill>
-            <a:prstDash val="solid"/>
-          </a:ln>
-        </p:spPr>
-        <p:txBody>
-          <a:bodyPr/>
-          <a:lstStyle/>
-          <a:p>
-            <a:endParaRPr lang="en-IN"/>
-          </a:p>
-        </p:txBody>
-      </p:sp>
-      <p:sp>
-        <p:nvSpPr>
-          <p:cNvPr id="10" name="Shape 5"/>
-          <p:cNvSpPr/>
-          <p:nvPr/>
-        </p:nvSpPr>
-        <p:spPr>
-          <a:xfrm>
-            <a:off x="571500" y="1830629"/>
-            <a:ext cx="190195" cy="190195"/>
-          </a:xfrm>
-          <a:prstGeom prst="roundRect">
-            <a:avLst>
-              <a:gd name="adj" fmla="val 192308"/>
-            </a:avLst>
-          </a:prstGeom>
-          <a:noFill/>
-          <a:ln w="38100">
-            <a:solidFill>
-              <a:srgbClr val="88E555"/>
-            </a:solidFill>
-            <a:prstDash val="solid"/>
-          </a:ln>
-        </p:spPr>
-        <p:txBody>
-          <a:bodyPr/>
-          <a:lstStyle/>
-          <a:p>
-            <a:endParaRPr lang="en-IN"/>
-          </a:p>
-        </p:txBody>
-      </p:sp>
-      <p:sp>
-        <p:nvSpPr>
-          <p:cNvPr id="11" name="Shape 6"/>
-          <p:cNvSpPr/>
-          <p:nvPr/>
-        </p:nvSpPr>
-        <p:spPr>
-          <a:xfrm>
-            <a:off x="11430000" y="1830629"/>
-            <a:ext cx="190195" cy="190195"/>
-          </a:xfrm>
-          <a:prstGeom prst="rect">
-            <a:avLst/>
-          </a:prstGeom>
-          <a:noFill/>
-          <a:ln w="38100">
-            <a:solidFill>
-              <a:srgbClr val="88E555"/>
-            </a:solidFill>
-            <a:prstDash val="solid"/>
-          </a:ln>
-        </p:spPr>
-        <p:txBody>
-          <a:bodyPr/>
-          <a:lstStyle/>
-          <a:p>
-            <a:endParaRPr lang="en-IN"/>
-          </a:p>
-        </p:txBody>
-      </p:sp>
-      <p:sp>
-        <p:nvSpPr>
-          <p:cNvPr id="12" name="Shape 7"/>
-          <p:cNvSpPr/>
-          <p:nvPr/>
-        </p:nvSpPr>
-        <p:spPr>
-          <a:xfrm>
-            <a:off x="571500" y="6381598"/>
-            <a:ext cx="190195" cy="190195"/>
-          </a:xfrm>
-          <a:prstGeom prst="rect">
-            <a:avLst/>
-          </a:prstGeom>
-          <a:noFill/>
-          <a:ln w="38100">
-            <a:solidFill>
-              <a:srgbClr val="88E555"/>
-            </a:solidFill>
-            <a:prstDash val="solid"/>
-          </a:ln>
-        </p:spPr>
-        <p:txBody>
-          <a:bodyPr/>
-          <a:lstStyle/>
-          <a:p>
-            <a:endParaRPr lang="en-IN"/>
-          </a:p>
-        </p:txBody>
-      </p:sp>
-      <p:sp>
-        <p:nvSpPr>
-          <p:cNvPr id="13" name="Shape 8"/>
-          <p:cNvSpPr/>
-          <p:nvPr/>
-        </p:nvSpPr>
-        <p:spPr>
-          <a:xfrm>
-            <a:off x="11430000" y="6381598"/>
-            <a:ext cx="190195" cy="190195"/>
-          </a:xfrm>
-          <a:prstGeom prst="rect">
-            <a:avLst/>
-          </a:prstGeom>
-          <a:noFill/>
-          <a:ln w="38100">
-            <a:solidFill>
-              <a:srgbClr val="88E555"/>
-            </a:solidFill>
-            <a:prstDash val="solid"/>
-          </a:ln>
-        </p:spPr>
-        <p:txBody>
-          <a:bodyPr/>
-          <a:lstStyle/>
-          <a:p>
-            <a:endParaRPr lang="en-IN"/>
-          </a:p>
-        </p:txBody>
-      </p:sp>
-      <p:sp>
-        <p:nvSpPr>
-          <p:cNvPr id="14" name="Shape 9"/>
-          <p:cNvSpPr/>
-          <p:nvPr/>
-        </p:nvSpPr>
-        <p:spPr>
-          <a:xfrm>
-            <a:off x="961949" y="2173529"/>
-            <a:ext cx="476402" cy="476402"/>
-          </a:xfrm>
-          <a:prstGeom prst="ellipse">
-            <a:avLst/>
-          </a:prstGeom>
-          <a:solidFill>
-            <a:srgbClr val="273383">
-              <a:alpha val="50000"/>
-            </a:srgbClr>
-          </a:solidFill>
-          <a:ln w="25400">
-            <a:solidFill>
-              <a:srgbClr val="AEFF82"/>
-            </a:solidFill>
-            <a:prstDash val="solid"/>
-          </a:ln>
-        </p:spPr>
-        <p:txBody>
-          <a:bodyPr/>
-          <a:lstStyle/>
-          <a:p>
-            <a:endParaRPr lang="en-IN"/>
-          </a:p>
-        </p:txBody>
-      </p:sp>
-      <p:pic>
-        <p:nvPicPr>
-          <p:cNvPr id="15" name="Image 3" descr="preencoded.png"/>
-          <p:cNvPicPr>
-            <a:picLocks noChangeAspect="1"/>
-          </p:cNvPicPr>
-          <p:nvPr/>
-        </p:nvPicPr>
-        <p:blipFill>
-          <a:blip r:embed="rId6"/>
-          <a:srcRect/>
-          <a:stretch/>
-        </p:blipFill>
-        <p:spPr>
-          <a:xfrm>
-            <a:off x="1086307" y="2297887"/>
-            <a:ext cx="228600" cy="228600"/>
-          </a:xfrm>
-          <a:prstGeom prst="rect">
-            <a:avLst/>
-          </a:prstGeom>
-        </p:spPr>
-      </p:pic>
-      <p:sp>
-        <p:nvSpPr>
-          <p:cNvPr id="16" name="Text 10"/>
-          <p:cNvSpPr txBox="1"/>
-          <p:nvPr/>
-        </p:nvSpPr>
-        <p:spPr>
-          <a:xfrm>
-            <a:off x="1628546" y="2173529"/>
-            <a:ext cx="3810305" cy="267005"/>
-          </a:xfrm>
-          <a:prstGeom prst="rect">
-            <a:avLst/>
-          </a:prstGeom>
-          <a:noFill/>
-          <a:ln/>
-        </p:spPr>
-        <p:txBody>
-          <a:bodyPr wrap="square" lIns="0" tIns="0" rIns="0" bIns="0" rtlCol="0" anchor="ctr"/>
-          <a:lstStyle/>
-          <a:p>
-            <a:pPr marL="0" indent="0" algn="l">
-              <a:buNone/>
-            </a:pPr>
-            <a:r>
-              <a:rPr lang="en-US" sz="1500" b="1" dirty="0">
-                <a:solidFill>
-                  <a:srgbClr val="88E555"/>
-                </a:solidFill>
-                <a:latin typeface="Poppins" pitchFamily="34" charset="0"/>
-                <a:ea typeface="Poppins" pitchFamily="34" charset="-122"/>
-                <a:cs typeface="Poppins" pitchFamily="34" charset="-120"/>
-              </a:rPr>
-              <a:t>Research Background &amp; Methodology</a:t>
-            </a:r>
-            <a:endParaRPr lang="en-US" sz="1500" dirty="0"/>
-          </a:p>
-        </p:txBody>
-      </p:sp>
-      <p:sp>
-        <p:nvSpPr>
-          <p:cNvPr id="17" name="Text 11"/>
-          <p:cNvSpPr txBox="1"/>
-          <p:nvPr/>
-        </p:nvSpPr>
-        <p:spPr>
-          <a:xfrm>
-            <a:off x="1628546" y="2516429"/>
-            <a:ext cx="5701284" cy="191110"/>
-          </a:xfrm>
-          <a:prstGeom prst="rect">
-            <a:avLst/>
-          </a:prstGeom>
-          <a:noFill/>
-          <a:ln/>
-        </p:spPr>
-        <p:txBody>
-          <a:bodyPr wrap="square" lIns="0" tIns="0" rIns="0" bIns="0" rtlCol="0" anchor="ctr"/>
-          <a:lstStyle/>
-          <a:p>
-            <a:pPr marL="0" indent="0" algn="l">
-              <a:buNone/>
-            </a:pPr>
-            <a:r>
-              <a:rPr lang="en-US" sz="1000" dirty="0">
-                <a:solidFill>
-                  <a:srgbClr val="D1D5DB"/>
-                </a:solidFill>
-                <a:latin typeface="Poppins" pitchFamily="34" charset="0"/>
-                <a:ea typeface="Poppins" pitchFamily="34" charset="-122"/>
-                <a:cs typeface="Poppins" pitchFamily="34" charset="-120"/>
-              </a:rPr>
-              <a:t>Briefly describe the research foundation or scientific principles supporting your idea.</a:t>
-            </a:r>
-            <a:endParaRPr lang="en-US" sz="1000" dirty="0"/>
-          </a:p>
-        </p:txBody>
-      </p:sp>
-      <p:sp>
-        <p:nvSpPr>
-          <p:cNvPr id="18" name="Shape 12"/>
-          <p:cNvSpPr/>
-          <p:nvPr/>
-        </p:nvSpPr>
-        <p:spPr>
-          <a:xfrm>
-            <a:off x="1628546" y="2783434"/>
-            <a:ext cx="9601200" cy="3400000"/>
-          </a:xfrm>
-          <a:prstGeom prst="roundRect">
-            <a:avLst>
-              <a:gd name="adj" fmla="val 6121"/>
-            </a:avLst>
-          </a:prstGeom>
-          <a:solidFill>
-            <a:srgbClr val="1E3A8A">
-              <a:alpha val="40000"/>
-            </a:srgbClr>
-          </a:solidFill>
-          <a:ln w="12700">
-            <a:solidFill>
-              <a:srgbClr val="1D4ED8"/>
-            </a:solidFill>
-            <a:prstDash val="solid"/>
-          </a:ln>
-        </p:spPr>
-        <p:txBody>
-          <a:bodyPr/>
-          <a:lstStyle/>
-          <a:p>
-            <a:endParaRPr lang="en-IN"/>
-          </a:p>
-        </p:txBody>
-      </p:sp>
-      <p:sp>
-        <p:nvSpPr>
-          <p:cNvPr id="19" name="Text 13"/>
-          <p:cNvSpPr txBox="1"/>
-          <p:nvPr/>
-        </p:nvSpPr>
-        <p:spPr>
-          <a:xfrm>
-            <a:off x="1790395" y="2900000"/>
-            <a:ext cx="9200000" cy="3100000"/>
-          </a:xfrm>
-          <a:prstGeom prst="rect">
-            <a:avLst/>
-          </a:prstGeom>
-          <a:noFill/>
-          <a:ln/>
-        </p:spPr>
-        <p:txBody>
-          <a:bodyPr wrap="square" lIns="0" tIns="0" rIns="0" bIns="0" rtlCol="0" anchor="t"/>
-          <a:lstStyle/>
-          <a:p>
-            <a:pPr marL="0" indent="0" algn="l">
-              <a:buNone/>
-            </a:pPr>
-            <a:endParaRPr lang="en-US" sz="1200" i="1" dirty="0">
-              <a:solidFill>
-                <a:srgbClr val="FFFFFF">
-                  <a:alpha val="70000"/>
-                </a:srgbClr>
-              </a:solidFill>
-              <a:latin typeface="Poppins" pitchFamily="34" charset="0"/>
-              <a:ea typeface="Poppins" pitchFamily="34" charset="-122"/>
-              <a:cs typeface="Poppins" pitchFamily="34" charset="-120"/>
-            </a:endParaRPr>
-          </a:p>
-          <a:p>
-            <a:pPr marL="0" indent="0" algn="l">
-              <a:buNone/>
-            </a:pPr>
-            <a:endParaRPr lang="en-US" sz="1200" i="1" dirty="0">
-              <a:solidFill>
-                <a:srgbClr val="FFFFFF">
-                  <a:alpha val="70000"/>
-                </a:srgbClr>
-              </a:solidFill>
-              <a:latin typeface="Poppins" pitchFamily="34" charset="0"/>
-              <a:ea typeface="Poppins" pitchFamily="34" charset="-122"/>
-              <a:cs typeface="Poppins" pitchFamily="34" charset="-120"/>
-            </a:endParaRPr>
-          </a:p>
-          <a:p>
-            <a:pPr marL="0" indent="0" algn="l">
-              <a:buNone/>
-            </a:pPr>
-            <a:endParaRPr lang="en-US" sz="1200" i="1" dirty="0">
-              <a:solidFill>
-                <a:srgbClr val="FFFFFF">
-                  <a:alpha val="70000"/>
-                </a:srgbClr>
-              </a:solidFill>
-              <a:latin typeface="Poppins" pitchFamily="34" charset="0"/>
-              <a:ea typeface="Poppins" pitchFamily="34" charset="-122"/>
-              <a:cs typeface="Poppins" pitchFamily="34" charset="-120"/>
-            </a:endParaRPr>
-          </a:p>
-          <a:p>
-            <a:pPr marL="0" indent="0" algn="l">
-              <a:buNone/>
-            </a:pPr>
-            <a:endParaRPr lang="en-US" sz="1200" i="1" dirty="0">
-              <a:solidFill>
-                <a:srgbClr val="FFFFFF">
-                  <a:alpha val="70000"/>
-                </a:srgbClr>
-              </a:solidFill>
-              <a:latin typeface="Poppins" pitchFamily="34" charset="0"/>
-              <a:ea typeface="Poppins" pitchFamily="34" charset="-122"/>
-              <a:cs typeface="Poppins" pitchFamily="34" charset="-120"/>
-            </a:endParaRPr>
-          </a:p>
-          <a:p>
-            <a:pPr marL="0" indent="0" algn="l">
-              <a:buNone/>
-            </a:pPr>
-            <a:endParaRPr lang="en-US" sz="1200" i="1" dirty="0">
-              <a:solidFill>
-                <a:srgbClr val="FFFFFF">
-                  <a:alpha val="70000"/>
-                </a:srgbClr>
-              </a:solidFill>
-              <a:latin typeface="Poppins" pitchFamily="34" charset="0"/>
-              <a:ea typeface="Poppins" pitchFamily="34" charset="-122"/>
-              <a:cs typeface="Poppins" pitchFamily="34" charset="-120"/>
-            </a:endParaRPr>
-          </a:p>
-          <a:p>
-            <a:pPr marL="0" indent="0" algn="l">
-              <a:buNone/>
-            </a:pPr>
-            <a:r>
-              <a:rPr lang="en-US" sz="1200" i="1" dirty="0">
-                <a:solidFill>
-                  <a:srgbClr val="FFFFFF">
-                    <a:alpha val="70000"/>
-                  </a:srgbClr>
-                </a:solidFill>
-                <a:latin typeface="Poppins" pitchFamily="34" charset="0"/>
-                <a:ea typeface="Poppins" pitchFamily="34" charset="-122"/>
-                <a:cs typeface="Poppins" pitchFamily="34" charset="-120"/>
-              </a:rPr>
-              <a:t>Every noise model and augmentation follows published SEM physics and process-variation literature.</a:t>
-            </a:r>
-            <a:endParaRPr lang="en-US" sz="1200" dirty="0"/>
-          </a:p>
-          <a:p>
-            <a:pPr marL="0" indent="0" algn="l">
-              <a:buNone/>
-            </a:pPr>
-            <a:r>
-              <a:rPr lang="en-US" sz="1200" i="1" dirty="0">
-                <a:solidFill>
-                  <a:srgbClr val="FFFFFF">
-                    <a:alpha val="70000"/>
-                  </a:srgbClr>
-                </a:solidFill>
-                <a:latin typeface="Poppins" pitchFamily="34" charset="0"/>
-                <a:ea typeface="Poppins" pitchFamily="34" charset="-122"/>
-                <a:cs typeface="Poppins" pitchFamily="34" charset="-120"/>
-              </a:rPr>
-              <a:t>SEM chain: secondary-electron edge contrast, Gaussian probe PSF, dose-dependent Poisson statistics.</a:t>
-            </a:r>
-            <a:endParaRPr lang="en-US" sz="1200" dirty="0"/>
-          </a:p>
-          <a:p>
-            <a:pPr marL="0" indent="0" algn="l">
-              <a:buNone/>
-            </a:pPr>
-            <a:r>
-              <a:rPr lang="en-US" sz="1200" i="1" dirty="0">
-                <a:solidFill>
-                  <a:srgbClr val="FFFFFF">
-                    <a:alpha val="70000"/>
-                  </a:srgbClr>
-                </a:solidFill>
-                <a:latin typeface="Poppins" pitchFamily="34" charset="0"/>
-                <a:ea typeface="Poppins" pitchFamily="34" charset="-122"/>
-                <a:cs typeface="Poppins" pitchFamily="34" charset="-120"/>
-              </a:rPr>
-              <a:t>Structure: DRAM word-line/bit-line/via organisation; FinFET fin-plus-gate cell geometry.</a:t>
-            </a:r>
-            <a:endParaRPr lang="en-US" sz="1200" dirty="0"/>
-          </a:p>
-          <a:p>
-            <a:pPr marL="0" indent="0" algn="l">
-              <a:buNone/>
-            </a:pPr>
-            <a:r>
-              <a:rPr lang="en-US" sz="1200" i="1" dirty="0">
-                <a:solidFill>
-                  <a:srgbClr val="FFFFFF">
-                    <a:alpha val="70000"/>
-                  </a:srgbClr>
-                </a:solidFill>
-                <a:latin typeface="Poppins" pitchFamily="34" charset="0"/>
-                <a:ea typeface="Poppins" pitchFamily="34" charset="-122"/>
-                <a:cs typeface="Poppins" pitchFamily="34" charset="-120"/>
-              </a:rPr>
-              <a:t>Process variation: systematic across-die CD non-uniformity — the physical reason a site is findable at all.</a:t>
-            </a:r>
-            <a:endParaRPr lang="en-US" sz="1200" dirty="0"/>
-          </a:p>
-          <a:p>
-            <a:pPr marL="0" indent="0" algn="l">
-              <a:buNone/>
-            </a:pPr>
-            <a:r>
-              <a:rPr lang="en-US" sz="1200" i="1" dirty="0">
-                <a:solidFill>
-                  <a:srgbClr val="FFFFFF">
-                    <a:alpha val="70000"/>
-                  </a:srgbClr>
-                </a:solidFill>
-                <a:latin typeface="Poppins" pitchFamily="34" charset="0"/>
-                <a:ea typeface="Poppins" pitchFamily="34" charset="-122"/>
-                <a:cs typeface="Poppins" pitchFamily="34" charset="-120"/>
-              </a:rPr>
-              <a:t>Optical modality: thin-film interference reflectance, diffraction-limited imaging, chromatic aberration, Bayer demosaic correlation.</a:t>
-            </a:r>
-            <a:endParaRPr lang="en-US" sz="1200" dirty="0"/>
-          </a:p>
-          <a:p>
-            <a:pPr marL="0" indent="0" algn="l">
-              <a:buNone/>
-            </a:pPr>
-            <a:r>
-              <a:rPr lang="en-US" sz="1200" i="1" dirty="0">
-                <a:solidFill>
-                  <a:srgbClr val="FFFFFF">
-                    <a:alpha val="70000"/>
-                  </a:srgbClr>
-                </a:solidFill>
-                <a:latin typeface="Poppins" pitchFamily="34" charset="0"/>
-                <a:ea typeface="Poppins" pitchFamily="34" charset="-122"/>
-                <a:cs typeface="Poppins" pitchFamily="34" charset="-120"/>
-              </a:rPr>
-              <a:t>Airy disc approximated as a Gaussian, σ ≈ 0.21 λ/NA — the Rayleigh radius as sigma over-blurs by ~1.5×.</a:t>
-            </a:r>
-            <a:endParaRPr lang="en-US" sz="1200" dirty="0"/>
-          </a:p>
-          <a:p>
-            <a:pPr marL="0" indent="0" algn="l">
-              <a:buNone/>
-            </a:pPr>
-            <a:r>
-              <a:rPr lang="en-US" sz="1200" i="1" dirty="0">
-                <a:solidFill>
-                  <a:srgbClr val="FFFFFF">
-                    <a:alpha val="70000"/>
-                  </a:srgbClr>
-                </a:solidFill>
-                <a:latin typeface="Poppins" pitchFamily="34" charset="0"/>
-                <a:ea typeface="Poppins" pitchFamily="34" charset="-122"/>
-                <a:cs typeface="Poppins" pitchFamily="34" charset="-120"/>
-              </a:rPr>
-              <a:t>Solvability: a margin bug let ~1 pair in 30 be unsolvable by construction; found, fixed, and now a regression test.</a:t>
-            </a:r>
-            <a:endParaRPr lang="en-US" sz="1200" dirty="0"/>
-          </a:p>
-          <a:p>
-            <a:pPr marL="0" indent="0" algn="l">
-              <a:buNone/>
-            </a:pPr>
-            <a:r>
-              <a:rPr lang="en-US" sz="1200" i="1" dirty="0">
-                <a:solidFill>
-                  <a:srgbClr val="FFFFFF">
-                    <a:alpha val="70000"/>
-                  </a:srgbClr>
-                </a:solidFill>
-                <a:latin typeface="Poppins" pitchFamily="34" charset="0"/>
-                <a:ea typeface="Poppins" pitchFamily="34" charset="-122"/>
-                <a:cs typeface="Poppins" pitchFamily="34" charset="-120"/>
-              </a:rPr>
-              <a:t>Multi-seed reporting: at n=20 the standard error is ~5 pp, so one run cannot separate two variants.</a:t>
-            </a:r>
-            <a:endParaRPr lang="en-US" sz="1200" dirty="0"/>
-          </a:p>
-          <a:p>
-            <a:pPr marL="0" indent="0" algn="l">
-              <a:buNone/>
-            </a:pPr>
-            <a:r>
-              <a:rPr lang="en-US" sz="1200" i="1" dirty="0">
-                <a:solidFill>
-                  <a:srgbClr val="FFFFFF">
-                    <a:alpha val="70000"/>
-                  </a:srgbClr>
-                </a:solidFill>
-                <a:latin typeface="Poppins" pitchFamily="34" charset="0"/>
-                <a:ea typeface="Poppins" pitchFamily="34" charset="-122"/>
-                <a:cs typeface="Poppins" pitchFamily="34" charset="-120"/>
-              </a:rPr>
-              <a:t>Full choice-by-choice citation map is in references.md in the repository.</a:t>
-            </a:r>
-            <a:endParaRPr lang="en-US" sz="1200" dirty="0"/>
-          </a:p>
-        </p:txBody>
-      </p:sp>
-      <p:pic>
-        <p:nvPicPr>
-          <p:cNvPr id="30" name="Picture 29">
-            <a:extLst>
-              <a:ext uri="{FF2B5EF4-FFF2-40B4-BE49-F238E27FC236}">
-                <a16:creationId xmlns:a16="http://schemas.microsoft.com/office/drawing/2014/main" id="{135E3709-F1C8-6E84-EA51-720EFCF71B26}"/>
-              </a:ext>
-            </a:extLst>
-          </p:cNvPr>
-          <p:cNvPicPr>
-            <a:picLocks noChangeAspect="1"/>
-          </p:cNvPicPr>
-          <p:nvPr/>
-        </p:nvPicPr>
-        <p:blipFill>
-          <a:blip r:embed="rId8"/>
-          <a:stretch>
-            <a:fillRect/>
-          </a:stretch>
-        </p:blipFill>
-        <p:spPr>
-          <a:xfrm>
-            <a:off x="5292164" y="227710"/>
-            <a:ext cx="1607366" cy="783591"/>
-          </a:xfrm>
-          <a:prstGeom prst="rect">
-            <a:avLst/>
-          </a:prstGeom>
-        </p:spPr>
-      </p:pic>
-      <p:sp>
-        <p:nvSpPr>
-          <p:cNvPr id="32" name="Shape 1">
-            <a:extLst>
-              <a:ext uri="{FF2B5EF4-FFF2-40B4-BE49-F238E27FC236}">
-                <a16:creationId xmlns:a16="http://schemas.microsoft.com/office/drawing/2014/main" id="{3E27E131-AC1D-E75C-0267-02565ACC1BC3}"/>
-              </a:ext>
-            </a:extLst>
-          </p:cNvPr>
-          <p:cNvSpPr/>
-          <p:nvPr/>
-        </p:nvSpPr>
-        <p:spPr>
-          <a:xfrm>
-            <a:off x="571500" y="259714"/>
-            <a:ext cx="11048695" cy="857707"/>
-          </a:xfrm>
-          <a:prstGeom prst="roundRect">
-            <a:avLst>
-              <a:gd name="adj" fmla="val 9476"/>
-            </a:avLst>
-          </a:prstGeom>
-          <a:solidFill>
-            <a:srgbClr val="FFFFFF">
-              <a:alpha val="95000"/>
-            </a:srgbClr>
-          </a:solidFill>
-          <a:ln/>
-          <a:effectLst>
-            <a:outerShdw blurRad="63500" dist="38100" dir="5400000" algn="bl" rotWithShape="0">
-              <a:srgbClr val="000000">
-                <a:alpha val="10000"/>
-              </a:srgbClr>
-            </a:outerShdw>
-          </a:effectLst>
-        </p:spPr>
-        <p:txBody>
-          <a:bodyPr/>
-          <a:lstStyle/>
-          <a:p>
-            <a:endParaRPr lang="en-IN"/>
-          </a:p>
-        </p:txBody>
-      </p:sp>
-      <p:pic>
-        <p:nvPicPr>
-          <p:cNvPr id="33" name="Picture 32">
-            <a:extLst>
-              <a:ext uri="{FF2B5EF4-FFF2-40B4-BE49-F238E27FC236}">
-                <a16:creationId xmlns:a16="http://schemas.microsoft.com/office/drawing/2014/main" id="{1D876DBE-D402-1B41-B952-69F6F5BF98C9}"/>
-              </a:ext>
-            </a:extLst>
-          </p:cNvPr>
-          <p:cNvPicPr>
-            <a:picLocks noChangeAspect="1"/>
-          </p:cNvPicPr>
-          <p:nvPr/>
-        </p:nvPicPr>
-        <p:blipFill>
-          <a:blip r:embed="rId9">
-            <a:extLst>
-              <a:ext uri="{28A0092B-C50C-407E-A947-70E740481C1C}">
-                <a14:useLocalDpi xmlns:a14="http://schemas.microsoft.com/office/drawing/2010/main" val="0"/>
-              </a:ext>
-            </a:extLst>
-          </a:blip>
-          <a:stretch>
-            <a:fillRect/>
-          </a:stretch>
-        </p:blipFill>
-        <p:spPr>
-          <a:xfrm>
-            <a:off x="1514101" y="390016"/>
             <a:ext cx="9163491" cy="586435"/>
           </a:xfrm>
           <a:prstGeom prst="rect">

--- a/solution_presentation.pptx
+++ b/solution_presentation.pptx
@@ -13332,7 +13332,7 @@
                 <a:ea typeface="Poppins" pitchFamily="34" charset="-122"/>
                 <a:cs typeface="Poppins" pitchFamily="34" charset="-120"/>
               </a:rPr>
-              <a:t>28 contract tests, including one that fails loudly if the optical path degenerates into applyColorMap.</a:t>
+              <a:t>29 contract tests, including one that fails loudly if the optical path degenerates into applyColorMap.</a:t>
             </a:r>
             <a:endParaRPr lang="en-US" sz="1200" dirty="0"/>
           </a:p>
@@ -15278,7 +15278,7 @@
                 <a:ea typeface="Poppins" pitchFamily="34" charset="-122"/>
                 <a:cs typeface="Poppins" pitchFamily="34" charset="-120"/>
               </a:rPr>
-              <a:t>Reproducible: seeded RNG, pinned requirements.txt, 28-test pytest suite, README runs clone → generate → localize → evaluate.</a:t>
+              <a:t>Reproducible: seeded RNG, pinned requirements.txt, 29-test pytest suite, README runs clone → generate → localize → evaluate.</a:t>
             </a:r>
             <a:endParaRPr lang="en-US" sz="1300" dirty="0"/>
           </a:p>
@@ -15491,7 +15491,7 @@
                 <a:ea typeface="Poppins" pitchFamily="34" charset="-122"/>
                 <a:cs typeface="Poppins" pitchFamily="34" charset="-120"/>
               </a:rPr>
-              <a:t>tests/ — 28 tests</a:t>
+              <a:t>tests/ — 29 tests</a:t>
             </a:r>
             <a:endParaRPr lang="en-US" sz="800" dirty="0"/>
           </a:p>

--- a/solution_presentation.pptx
+++ b/solution_presentation.pptx
@@ -13125,7 +13125,7 @@
                 <a:ea typeface="Poppins" pitchFamily="34" charset="-122"/>
                 <a:cs typeface="Poppins" pitchFamily="34" charset="-120"/>
               </a:rPr>
-              <a:t>Honest ablation shipped: the --visual-clarity flag makes cleaner images by disabling both cues — it costs 24 points (71.2 %), off by default.</a:t>
+              <a:t>Honest ablation shipped: the --visual-clarity flag makes cleaner images by disabling both cues — it costs 11.7 points (81.67 %), off by default.</a:t>
             </a:r>
             <a:endParaRPr lang="en-US" sz="1050" dirty="0"/>
           </a:p>
@@ -14480,7 +14480,7 @@
                 <a:ea typeface="Poppins" pitchFamily="34" charset="-122"/>
                 <a:cs typeface="Poppins" pitchFamily="34" charset="-120"/>
               </a:rPr>
-              <a:t>Honest limits: failures concentrate on near-uniform FinFET dies; boundary-straddling crops drop to 85 %; the clean-image build to 71.2 %.</a:t>
+              <a:t>Honest limits: failures concentrate on near-uniform FinFET dies; boundary-straddling crops drop to 85 %; the clean-image build to 81.67 %.</a:t>
             </a:r>
             <a:endParaRPr lang="en-US" sz="1000" dirty="0"/>
           </a:p>
